--- a/x_memory/docs2/논문연구I-발표자료.pptx
+++ b/x_memory/docs2/논문연구I-발표자료.pptx
@@ -5,15 +5,16 @@
     <p:sldMasterId id="2147483648" r:id="rId1"/>
   </p:sldMasterIdLst>
   <p:notesMasterIdLst>
-    <p:notesMasterId r:id="rId8"/>
+    <p:notesMasterId r:id="rId9"/>
   </p:notesMasterIdLst>
   <p:sldIdLst>
     <p:sldId id="259" r:id="rId2"/>
     <p:sldId id="260" r:id="rId3"/>
     <p:sldId id="256" r:id="rId4"/>
-    <p:sldId id="257" r:id="rId5"/>
-    <p:sldId id="258" r:id="rId6"/>
-    <p:sldId id="261" r:id="rId7"/>
+    <p:sldId id="262" r:id="rId5"/>
+    <p:sldId id="257" r:id="rId6"/>
+    <p:sldId id="258" r:id="rId7"/>
+    <p:sldId id="261" r:id="rId8"/>
   </p:sldIdLst>
   <p:sldSz cx="12192000" cy="6858000"/>
   <p:notesSz cx="6858000" cy="9144000"/>
@@ -202,7 +203,7 @@
           <a:p>
             <a:fld id="{1FB9BF83-B5BE-4DD4-A332-58395F2573B7}" type="datetimeFigureOut">
               <a:rPr lang="ko-KR" altLang="en-US" smtClean="0"/>
-              <a:t>2025-12-10</a:t>
+              <a:t>2025-12-11</a:t>
             </a:fld>
             <a:endParaRPr lang="ko-KR" altLang="en-US"/>
           </a:p>
@@ -774,6 +775,114 @@
   <p:cSld>
     <p:spTree>
       <p:nvGrpSpPr>
+        <p:cNvPr id="1" name="">
+          <a:extLst>
+            <a:ext uri="{FF2B5EF4-FFF2-40B4-BE49-F238E27FC236}">
+              <a16:creationId xmlns:a16="http://schemas.microsoft.com/office/drawing/2014/main" id="{7A6CC1A9-CF19-FBF5-4493-2F9E83C541F9}"/>
+            </a:ext>
+          </a:extLst>
+        </p:cNvPr>
+        <p:cNvGrpSpPr/>
+        <p:nvPr/>
+      </p:nvGrpSpPr>
+      <p:grpSpPr>
+        <a:xfrm>
+          <a:off x="0" y="0"/>
+          <a:ext cx="0" cy="0"/>
+          <a:chOff x="0" y="0"/>
+          <a:chExt cx="0" cy="0"/>
+        </a:xfrm>
+      </p:grpSpPr>
+      <p:sp>
+        <p:nvSpPr>
+          <p:cNvPr id="2" name="슬라이드 이미지 개체 틀 1">
+            <a:extLst>
+              <a:ext uri="{FF2B5EF4-FFF2-40B4-BE49-F238E27FC236}">
+                <a16:creationId xmlns:a16="http://schemas.microsoft.com/office/drawing/2014/main" id="{5594510B-AF13-C9E9-29E5-72FD3C3D3FEB}"/>
+              </a:ext>
+            </a:extLst>
+          </p:cNvPr>
+          <p:cNvSpPr>
+            <a:spLocks noGrp="1" noRot="1" noChangeAspect="1"/>
+          </p:cNvSpPr>
+          <p:nvPr>
+            <p:ph type="sldImg"/>
+          </p:nvPr>
+        </p:nvSpPr>
+        <p:spPr/>
+      </p:sp>
+      <p:sp>
+        <p:nvSpPr>
+          <p:cNvPr id="3" name="슬라이드 노트 개체 틀 2">
+            <a:extLst>
+              <a:ext uri="{FF2B5EF4-FFF2-40B4-BE49-F238E27FC236}">
+                <a16:creationId xmlns:a16="http://schemas.microsoft.com/office/drawing/2014/main" id="{03B6CFC1-575F-136B-09BE-8A5A0E3FC153}"/>
+              </a:ext>
+            </a:extLst>
+          </p:cNvPr>
+          <p:cNvSpPr>
+            <a:spLocks noGrp="1"/>
+          </p:cNvSpPr>
+          <p:nvPr>
+            <p:ph type="body" idx="1"/>
+          </p:nvPr>
+        </p:nvSpPr>
+        <p:spPr/>
+        <p:txBody>
+          <a:bodyPr/>
+          <a:lstStyle/>
+          <a:p>
+            <a:endParaRPr lang="ko-KR" altLang="en-US" dirty="0"/>
+          </a:p>
+        </p:txBody>
+      </p:sp>
+      <p:sp>
+        <p:nvSpPr>
+          <p:cNvPr id="4" name="슬라이드 번호 개체 틀 3">
+            <a:extLst>
+              <a:ext uri="{FF2B5EF4-FFF2-40B4-BE49-F238E27FC236}">
+                <a16:creationId xmlns:a16="http://schemas.microsoft.com/office/drawing/2014/main" id="{A2008B6A-66DB-9271-B832-856BFF0882E9}"/>
+              </a:ext>
+            </a:extLst>
+          </p:cNvPr>
+          <p:cNvSpPr>
+            <a:spLocks noGrp="1"/>
+          </p:cNvSpPr>
+          <p:nvPr>
+            <p:ph type="sldNum" sz="quarter" idx="5"/>
+          </p:nvPr>
+        </p:nvSpPr>
+        <p:spPr/>
+        <p:txBody>
+          <a:bodyPr/>
+          <a:lstStyle/>
+          <a:p>
+            <a:fld id="{0098AE32-E7AE-48A5-9392-CCB4D2CF538A}" type="slidenum">
+              <a:rPr lang="ko-KR" altLang="en-US" smtClean="0"/>
+              <a:t>4</a:t>
+            </a:fld>
+            <a:endParaRPr lang="ko-KR" altLang="en-US"/>
+          </a:p>
+        </p:txBody>
+      </p:sp>
+    </p:spTree>
+    <p:extLst>
+      <p:ext uri="{BB962C8B-B14F-4D97-AF65-F5344CB8AC3E}">
+        <p14:creationId xmlns:p14="http://schemas.microsoft.com/office/powerpoint/2010/main" val="588736412"/>
+      </p:ext>
+    </p:extLst>
+  </p:cSld>
+  <p:clrMapOvr>
+    <a:masterClrMapping/>
+  </p:clrMapOvr>
+</p:notes>
+</file>
+
+<file path=ppt/notesSlides/notesSlide5.xml><?xml version="1.0" encoding="utf-8"?>
+<p:notes xmlns:a="http://schemas.openxmlformats.org/drawingml/2006/main" xmlns:r="http://schemas.openxmlformats.org/officeDocument/2006/relationships" xmlns:p="http://schemas.openxmlformats.org/presentationml/2006/main">
+  <p:cSld>
+    <p:spTree>
+      <p:nvGrpSpPr>
         <p:cNvPr id="1" name=""/>
         <p:cNvGrpSpPr/>
         <p:nvPr/>
@@ -834,7 +943,7 @@
           <a:p>
             <a:fld id="{0098AE32-E7AE-48A5-9392-CCB4D2CF538A}" type="slidenum">
               <a:rPr lang="ko-KR" altLang="en-US" smtClean="0"/>
-              <a:t>4</a:t>
+              <a:t>5</a:t>
             </a:fld>
             <a:endParaRPr lang="ko-KR" altLang="en-US"/>
           </a:p>
@@ -853,7 +962,7 @@
 </p:notes>
 </file>
 
-<file path=ppt/notesSlides/notesSlide5.xml><?xml version="1.0" encoding="utf-8"?>
+<file path=ppt/notesSlides/notesSlide6.xml><?xml version="1.0" encoding="utf-8"?>
 <p:notes xmlns:a="http://schemas.openxmlformats.org/drawingml/2006/main" xmlns:r="http://schemas.openxmlformats.org/officeDocument/2006/relationships" xmlns:p="http://schemas.openxmlformats.org/presentationml/2006/main">
   <p:cSld>
     <p:spTree>
@@ -942,7 +1051,7 @@
           <a:p>
             <a:fld id="{0098AE32-E7AE-48A5-9392-CCB4D2CF538A}" type="slidenum">
               <a:rPr lang="ko-KR" altLang="en-US" smtClean="0"/>
-              <a:t>5</a:t>
+              <a:t>6</a:t>
             </a:fld>
             <a:endParaRPr lang="ko-KR" altLang="en-US"/>
           </a:p>
@@ -961,7 +1070,7 @@
 </p:notes>
 </file>
 
-<file path=ppt/notesSlides/notesSlide6.xml><?xml version="1.0" encoding="utf-8"?>
+<file path=ppt/notesSlides/notesSlide7.xml><?xml version="1.0" encoding="utf-8"?>
 <p:notes xmlns:a="http://schemas.openxmlformats.org/drawingml/2006/main" xmlns:r="http://schemas.openxmlformats.org/officeDocument/2006/relationships" xmlns:p="http://schemas.openxmlformats.org/presentationml/2006/main">
   <p:cSld>
     <p:spTree>
@@ -1050,7 +1159,7 @@
           <a:p>
             <a:fld id="{0098AE32-E7AE-48A5-9392-CCB4D2CF538A}" type="slidenum">
               <a:rPr lang="ko-KR" altLang="en-US" smtClean="0"/>
-              <a:t>6</a:t>
+              <a:t>7</a:t>
             </a:fld>
             <a:endParaRPr lang="ko-KR" altLang="en-US"/>
           </a:p>
@@ -1216,7 +1325,7 @@
           <a:p>
             <a:fld id="{36209A1A-9265-4240-B6C3-FDC5AC5FF33D}" type="datetimeFigureOut">
               <a:rPr lang="ko-KR" altLang="en-US" smtClean="0"/>
-              <a:t>2025-12-10</a:t>
+              <a:t>2025-12-11</a:t>
             </a:fld>
             <a:endParaRPr lang="ko-KR" altLang="en-US"/>
           </a:p>
@@ -1414,7 +1523,7 @@
           <a:p>
             <a:fld id="{36209A1A-9265-4240-B6C3-FDC5AC5FF33D}" type="datetimeFigureOut">
               <a:rPr lang="ko-KR" altLang="en-US" smtClean="0"/>
-              <a:t>2025-12-10</a:t>
+              <a:t>2025-12-11</a:t>
             </a:fld>
             <a:endParaRPr lang="ko-KR" altLang="en-US"/>
           </a:p>
@@ -1622,7 +1731,7 @@
           <a:p>
             <a:fld id="{36209A1A-9265-4240-B6C3-FDC5AC5FF33D}" type="datetimeFigureOut">
               <a:rPr lang="ko-KR" altLang="en-US" smtClean="0"/>
-              <a:t>2025-12-10</a:t>
+              <a:t>2025-12-11</a:t>
             </a:fld>
             <a:endParaRPr lang="ko-KR" altLang="en-US"/>
           </a:p>
@@ -1820,7 +1929,7 @@
           <a:p>
             <a:fld id="{36209A1A-9265-4240-B6C3-FDC5AC5FF33D}" type="datetimeFigureOut">
               <a:rPr lang="ko-KR" altLang="en-US" smtClean="0"/>
-              <a:t>2025-12-10</a:t>
+              <a:t>2025-12-11</a:t>
             </a:fld>
             <a:endParaRPr lang="ko-KR" altLang="en-US"/>
           </a:p>
@@ -2095,7 +2204,7 @@
           <a:p>
             <a:fld id="{36209A1A-9265-4240-B6C3-FDC5AC5FF33D}" type="datetimeFigureOut">
               <a:rPr lang="ko-KR" altLang="en-US" smtClean="0"/>
-              <a:t>2025-12-10</a:t>
+              <a:t>2025-12-11</a:t>
             </a:fld>
             <a:endParaRPr lang="ko-KR" altLang="en-US"/>
           </a:p>
@@ -2360,7 +2469,7 @@
           <a:p>
             <a:fld id="{36209A1A-9265-4240-B6C3-FDC5AC5FF33D}" type="datetimeFigureOut">
               <a:rPr lang="ko-KR" altLang="en-US" smtClean="0"/>
-              <a:t>2025-12-10</a:t>
+              <a:t>2025-12-11</a:t>
             </a:fld>
             <a:endParaRPr lang="ko-KR" altLang="en-US"/>
           </a:p>
@@ -2772,7 +2881,7 @@
           <a:p>
             <a:fld id="{36209A1A-9265-4240-B6C3-FDC5AC5FF33D}" type="datetimeFigureOut">
               <a:rPr lang="ko-KR" altLang="en-US" smtClean="0"/>
-              <a:t>2025-12-10</a:t>
+              <a:t>2025-12-11</a:t>
             </a:fld>
             <a:endParaRPr lang="ko-KR" altLang="en-US"/>
           </a:p>
@@ -2913,7 +3022,7 @@
           <a:p>
             <a:fld id="{36209A1A-9265-4240-B6C3-FDC5AC5FF33D}" type="datetimeFigureOut">
               <a:rPr lang="ko-KR" altLang="en-US" smtClean="0"/>
-              <a:t>2025-12-10</a:t>
+              <a:t>2025-12-11</a:t>
             </a:fld>
             <a:endParaRPr lang="ko-KR" altLang="en-US"/>
           </a:p>
@@ -3026,7 +3135,7 @@
           <a:p>
             <a:fld id="{36209A1A-9265-4240-B6C3-FDC5AC5FF33D}" type="datetimeFigureOut">
               <a:rPr lang="ko-KR" altLang="en-US" smtClean="0"/>
-              <a:t>2025-12-10</a:t>
+              <a:t>2025-12-11</a:t>
             </a:fld>
             <a:endParaRPr lang="ko-KR" altLang="en-US"/>
           </a:p>
@@ -3337,7 +3446,7 @@
           <a:p>
             <a:fld id="{36209A1A-9265-4240-B6C3-FDC5AC5FF33D}" type="datetimeFigureOut">
               <a:rPr lang="ko-KR" altLang="en-US" smtClean="0"/>
-              <a:t>2025-12-10</a:t>
+              <a:t>2025-12-11</a:t>
             </a:fld>
             <a:endParaRPr lang="ko-KR" altLang="en-US"/>
           </a:p>
@@ -3625,7 +3734,7 @@
           <a:p>
             <a:fld id="{36209A1A-9265-4240-B6C3-FDC5AC5FF33D}" type="datetimeFigureOut">
               <a:rPr lang="ko-KR" altLang="en-US" smtClean="0"/>
-              <a:t>2025-12-10</a:t>
+              <a:t>2025-12-11</a:t>
             </a:fld>
             <a:endParaRPr lang="ko-KR" altLang="en-US"/>
           </a:p>
@@ -3866,7 +3975,7 @@
           <a:p>
             <a:fld id="{36209A1A-9265-4240-B6C3-FDC5AC5FF33D}" type="datetimeFigureOut">
               <a:rPr lang="ko-KR" altLang="en-US" smtClean="0"/>
-              <a:t>2025-12-10</a:t>
+              <a:t>2025-12-11</a:t>
             </a:fld>
             <a:endParaRPr lang="ko-KR" altLang="en-US"/>
           </a:p>
@@ -6198,6 +6307,139 @@
   <p:cSld>
     <p:spTree>
       <p:nvGrpSpPr>
+        <p:cNvPr id="1" name="">
+          <a:extLst>
+            <a:ext uri="{FF2B5EF4-FFF2-40B4-BE49-F238E27FC236}">
+              <a16:creationId xmlns:a16="http://schemas.microsoft.com/office/drawing/2014/main" id="{BE2354DF-0720-13D7-0223-1DD5F40FF47D}"/>
+            </a:ext>
+          </a:extLst>
+        </p:cNvPr>
+        <p:cNvGrpSpPr/>
+        <p:nvPr/>
+      </p:nvGrpSpPr>
+      <p:grpSpPr>
+        <a:xfrm>
+          <a:off x="0" y="0"/>
+          <a:ext cx="0" cy="0"/>
+          <a:chOff x="0" y="0"/>
+          <a:chExt cx="0" cy="0"/>
+        </a:xfrm>
+      </p:grpSpPr>
+      <p:sp>
+        <p:nvSpPr>
+          <p:cNvPr id="4" name="TextBox 3">
+            <a:extLst>
+              <a:ext uri="{FF2B5EF4-FFF2-40B4-BE49-F238E27FC236}">
+                <a16:creationId xmlns:a16="http://schemas.microsoft.com/office/drawing/2014/main" id="{36C14675-C451-097D-D5A7-B7D18E2C84A9}"/>
+              </a:ext>
+            </a:extLst>
+          </p:cNvPr>
+          <p:cNvSpPr txBox="1"/>
+          <p:nvPr/>
+        </p:nvSpPr>
+        <p:spPr>
+          <a:xfrm>
+            <a:off x="394735" y="173013"/>
+            <a:ext cx="11302928" cy="369332"/>
+          </a:xfrm>
+          <a:prstGeom prst="rect">
+            <a:avLst/>
+          </a:prstGeom>
+          <a:noFill/>
+        </p:spPr>
+        <p:txBody>
+          <a:bodyPr wrap="square" rtlCol="0">
+            <a:spAutoFit/>
+          </a:bodyPr>
+          <a:lstStyle/>
+          <a:p>
+            <a:r>
+              <a:rPr lang="en-US" altLang="ko-KR" b="1" dirty="0">
+                <a:latin typeface="+mj-lt"/>
+              </a:rPr>
+              <a:t>1. </a:t>
+            </a:r>
+            <a:r>
+              <a:rPr lang="ko-KR" altLang="en-US" b="1" dirty="0">
+                <a:latin typeface="+mj-lt"/>
+              </a:rPr>
+              <a:t>기술의 배경 </a:t>
+            </a:r>
+            <a:r>
+              <a:rPr lang="en-US" altLang="ko-KR" b="1" dirty="0">
+                <a:latin typeface="+mj-lt"/>
+              </a:rPr>
+              <a:t>– </a:t>
+            </a:r>
+            <a:r>
+              <a:rPr lang="ko-KR" altLang="en-US" b="1" dirty="0" err="1">
+                <a:latin typeface="+mj-lt"/>
+              </a:rPr>
+              <a:t>드론의</a:t>
+            </a:r>
+            <a:r>
+              <a:rPr lang="ko-KR" altLang="en-US" b="1" dirty="0">
+                <a:latin typeface="+mj-lt"/>
+              </a:rPr>
+              <a:t> 비행</a:t>
+            </a:r>
+            <a:endParaRPr lang="ko-KR" altLang="en-US" b="1" dirty="0"/>
+          </a:p>
+        </p:txBody>
+      </p:sp>
+      <p:sp>
+        <p:nvSpPr>
+          <p:cNvPr id="9" name="TextBox 8">
+            <a:extLst>
+              <a:ext uri="{FF2B5EF4-FFF2-40B4-BE49-F238E27FC236}">
+                <a16:creationId xmlns:a16="http://schemas.microsoft.com/office/drawing/2014/main" id="{8B33718D-EAB5-4C8E-3871-0485AAE095F1}"/>
+              </a:ext>
+            </a:extLst>
+          </p:cNvPr>
+          <p:cNvSpPr txBox="1"/>
+          <p:nvPr/>
+        </p:nvSpPr>
+        <p:spPr>
+          <a:xfrm>
+            <a:off x="359246" y="6443459"/>
+            <a:ext cx="11172354" cy="215444"/>
+          </a:xfrm>
+          <a:prstGeom prst="rect">
+            <a:avLst/>
+          </a:prstGeom>
+          <a:noFill/>
+        </p:spPr>
+        <p:txBody>
+          <a:bodyPr wrap="square">
+            <a:spAutoFit/>
+          </a:bodyPr>
+          <a:lstStyle/>
+          <a:p>
+            <a:r>
+              <a:rPr lang="en-US" altLang="ko-KR" sz="800" b="1" dirty="0"/>
+              <a:t>1 [Source: ]</a:t>
+            </a:r>
+          </a:p>
+        </p:txBody>
+      </p:sp>
+    </p:spTree>
+    <p:extLst>
+      <p:ext uri="{BB962C8B-B14F-4D97-AF65-F5344CB8AC3E}">
+        <p14:creationId xmlns:p14="http://schemas.microsoft.com/office/powerpoint/2010/main" val="2069636764"/>
+      </p:ext>
+    </p:extLst>
+  </p:cSld>
+  <p:clrMapOvr>
+    <a:masterClrMapping/>
+  </p:clrMapOvr>
+</p:sld>
+</file>
+
+<file path=ppt/slides/slide5.xml><?xml version="1.0" encoding="utf-8"?>
+<p:sld xmlns:a="http://schemas.openxmlformats.org/drawingml/2006/main" xmlns:r="http://schemas.openxmlformats.org/officeDocument/2006/relationships" xmlns:p="http://schemas.openxmlformats.org/presentationml/2006/main">
+  <p:cSld>
+    <p:spTree>
+      <p:nvGrpSpPr>
         <p:cNvPr id="1" name=""/>
         <p:cNvGrpSpPr/>
         <p:nvPr/>
@@ -7105,7 +7347,7 @@
 </p:sld>
 </file>
 
-<file path=ppt/slides/slide5.xml><?xml version="1.0" encoding="utf-8"?>
+<file path=ppt/slides/slide6.xml><?xml version="1.0" encoding="utf-8"?>
 <p:sld xmlns:a="http://schemas.openxmlformats.org/drawingml/2006/main" xmlns:r="http://schemas.openxmlformats.org/officeDocument/2006/relationships" xmlns:p="http://schemas.openxmlformats.org/presentationml/2006/main">
   <p:cSld>
     <p:spTree>
@@ -7400,7 +7642,7 @@
 </p:sld>
 </file>
 
-<file path=ppt/slides/slide6.xml><?xml version="1.0" encoding="utf-8"?>
+<file path=ppt/slides/slide7.xml><?xml version="1.0" encoding="utf-8"?>
 <p:sld xmlns:a="http://schemas.openxmlformats.org/drawingml/2006/main" xmlns:r="http://schemas.openxmlformats.org/officeDocument/2006/relationships" xmlns:p="http://schemas.openxmlformats.org/presentationml/2006/main">
   <p:cSld>
     <p:spTree>

--- a/x_memory/docs2/논문연구I-발표자료.pptx
+++ b/x_memory/docs2/논문연구I-발표자료.pptx
@@ -5,7 +5,7 @@
     <p:sldMasterId id="2147483648" r:id="rId1"/>
   </p:sldMasterIdLst>
   <p:notesMasterIdLst>
-    <p:notesMasterId r:id="rId10"/>
+    <p:notesMasterId r:id="rId11"/>
   </p:notesMasterIdLst>
   <p:sldIdLst>
     <p:sldId id="259" r:id="rId2"/>
@@ -16,6 +16,7 @@
     <p:sldId id="257" r:id="rId7"/>
     <p:sldId id="258" r:id="rId8"/>
     <p:sldId id="261" r:id="rId9"/>
+    <p:sldId id="264" r:id="rId10"/>
   </p:sldIdLst>
   <p:sldSz cx="12192000" cy="6858000"/>
   <p:notesSz cx="6858000" cy="9144000"/>
@@ -204,7 +205,7 @@
           <a:p>
             <a:fld id="{1FB9BF83-B5BE-4DD4-A332-58395F2573B7}" type="datetimeFigureOut">
               <a:rPr lang="ko-KR" altLang="en-US" smtClean="0"/>
-              <a:t>2025-12-11</a:t>
+              <a:t>2025-12-14</a:t>
             </a:fld>
             <a:endParaRPr lang="ko-KR" altLang="en-US"/>
           </a:p>
@@ -716,25 +717,805 @@
         </p:nvSpPr>
         <p:spPr/>
       </p:sp>
-      <p:sp>
-        <p:nvSpPr>
-          <p:cNvPr id="3" name="슬라이드 노트 개체 틀 2"/>
-          <p:cNvSpPr>
-            <a:spLocks noGrp="1"/>
-          </p:cNvSpPr>
-          <p:nvPr>
-            <p:ph type="body" idx="1"/>
-          </p:nvPr>
-        </p:nvSpPr>
-        <p:spPr/>
-        <p:txBody>
-          <a:bodyPr/>
-          <a:lstStyle/>
-          <a:p>
-            <a:endParaRPr lang="ko-KR" altLang="en-US" dirty="0"/>
-          </a:p>
-        </p:txBody>
-      </p:sp>
+      <mc:AlternateContent xmlns:mc="http://schemas.openxmlformats.org/markup-compatibility/2006" xmlns:a14="http://schemas.microsoft.com/office/drawing/2010/main">
+        <mc:Choice Requires="a14">
+          <p:sp>
+            <p:nvSpPr>
+              <p:cNvPr id="3" name="슬라이드 노트 개체 틀 2"/>
+              <p:cNvSpPr>
+                <a:spLocks noGrp="1"/>
+              </p:cNvSpPr>
+              <p:nvPr>
+                <p:ph type="body" idx="1"/>
+              </p:nvPr>
+            </p:nvSpPr>
+            <p:spPr/>
+            <p:txBody>
+              <a:bodyPr/>
+              <a:lstStyle/>
+              <a:p>
+                <a:r>
+                  <a:rPr lang="ko-KR" altLang="en-US" dirty="0"/>
+                  <a:t>이 슬라이드는 </a:t>
+                </a:r>
+                <a:r>
+                  <a:rPr lang="ko-KR" altLang="en-US" dirty="0" err="1"/>
+                  <a:t>멀티콥터</a:t>
+                </a:r>
+                <a:r>
+                  <a:rPr lang="ko-KR" altLang="en-US" dirty="0"/>
+                  <a:t> </a:t>
+                </a:r>
+                <a:r>
+                  <a:rPr lang="ko-KR" altLang="en-US" dirty="0" err="1"/>
+                  <a:t>드론의</a:t>
+                </a:r>
+                <a:r>
+                  <a:rPr lang="ko-KR" altLang="en-US" dirty="0"/>
+                  <a:t> 기본적인 </a:t>
+                </a:r>
+                <a:r>
+                  <a:rPr lang="ko-KR" altLang="en-US" b="1" dirty="0"/>
+                  <a:t>자세 제어 구조</a:t>
+                </a:r>
+                <a:r>
+                  <a:rPr lang="ko-KR" altLang="en-US" dirty="0"/>
+                  <a:t>를 설명한다</a:t>
+                </a:r>
+                <a:r>
+                  <a:rPr lang="en-US" altLang="ko-KR" dirty="0"/>
+                  <a:t>.</a:t>
+                </a:r>
+                <a:br>
+                  <a:rPr lang="en-US" altLang="ko-KR" dirty="0"/>
+                </a:br>
+                <a:r>
+                  <a:rPr lang="ko-KR" altLang="en-US" dirty="0"/>
+                  <a:t>상단 그림은 </a:t>
+                </a:r>
+                <a:r>
+                  <a:rPr lang="ko-KR" altLang="en-US" dirty="0" err="1"/>
+                  <a:t>드론의</a:t>
+                </a:r>
+                <a:r>
+                  <a:rPr lang="ko-KR" altLang="en-US" dirty="0"/>
+                  <a:t> 자세를 구성하는 </a:t>
+                </a:r>
+                <a:r>
+                  <a:rPr lang="en-US" altLang="ko-KR" b="1" dirty="0"/>
+                  <a:t>Roll, Pitch, Yaw</a:t>
+                </a:r>
+                <a:r>
+                  <a:rPr lang="ko-KR" altLang="en-US" b="1" dirty="0"/>
+                  <a:t>의 </a:t>
+                </a:r>
+                <a:r>
+                  <a:rPr lang="en-US" altLang="ko-KR" b="1" dirty="0"/>
+                  <a:t>3</a:t>
+                </a:r>
+                <a:r>
+                  <a:rPr lang="ko-KR" altLang="en-US" b="1" dirty="0"/>
+                  <a:t>축</a:t>
+                </a:r>
+                <a:r>
+                  <a:rPr lang="ko-KR" altLang="en-US" dirty="0"/>
+                  <a:t>을 나타내며</a:t>
+                </a:r>
+                <a:r>
+                  <a:rPr lang="en-US" altLang="ko-KR" dirty="0"/>
+                  <a:t>, </a:t>
+                </a:r>
+                <a:r>
+                  <a:rPr lang="ko-KR" altLang="en-US" dirty="0" err="1"/>
+                  <a:t>드론은</a:t>
+                </a:r>
+                <a:r>
+                  <a:rPr lang="ko-KR" altLang="en-US" dirty="0"/>
+                  <a:t> 이 세 축을 제어함으로써 방향과 안정성을 유지한다</a:t>
+                </a:r>
+                <a:r>
+                  <a:rPr lang="en-US" altLang="ko-KR" dirty="0"/>
+                  <a:t>.</a:t>
+                </a:r>
+              </a:p>
+              <a:p>
+                <a:r>
+                  <a:rPr lang="ko-KR" altLang="en-US" dirty="0"/>
+                  <a:t>하단 그림은 </a:t>
+                </a:r>
+                <a:r>
+                  <a:rPr lang="ko-KR" altLang="en-US" dirty="0" err="1"/>
+                  <a:t>멀티콥터에서</a:t>
+                </a:r>
+                <a:r>
+                  <a:rPr lang="ko-KR" altLang="en-US" dirty="0"/>
+                  <a:t> 일반적으로 사용되는 </a:t>
+                </a:r>
+                <a:r>
+                  <a:rPr lang="ko-KR" altLang="en-US" b="1" dirty="0"/>
+                  <a:t>계단식</a:t>
+                </a:r>
+                <a:r>
+                  <a:rPr lang="en-US" altLang="ko-KR" b="1" dirty="0"/>
+                  <a:t>(cascaded) </a:t>
+                </a:r>
+                <a:r>
+                  <a:rPr lang="ko-KR" altLang="en-US" b="1" dirty="0"/>
+                  <a:t>제어 구조</a:t>
+                </a:r>
+                <a:r>
+                  <a:rPr lang="ko-KR" altLang="en-US" dirty="0"/>
+                  <a:t>의 개념도이다</a:t>
+                </a:r>
+                <a:r>
+                  <a:rPr lang="en-US" altLang="ko-KR" dirty="0"/>
+                  <a:t>.</a:t>
+                </a:r>
+                <a:br>
+                  <a:rPr lang="en-US" altLang="ko-KR" dirty="0"/>
+                </a:br>
+                <a:r>
+                  <a:rPr lang="ko-KR" altLang="en-US" dirty="0"/>
+                  <a:t>이 구조는 </a:t>
+                </a:r>
+                <a:r>
+                  <a:rPr lang="ko-KR" altLang="en-US" b="1" dirty="0"/>
+                  <a:t>외부 루프</a:t>
+                </a:r>
+                <a:r>
+                  <a:rPr lang="ko-KR" altLang="en-US" dirty="0"/>
+                  <a:t>와 </a:t>
+                </a:r>
+                <a:r>
+                  <a:rPr lang="ko-KR" altLang="en-US" b="1" dirty="0"/>
+                  <a:t>내부 루프</a:t>
+                </a:r>
+                <a:r>
+                  <a:rPr lang="ko-KR" altLang="en-US" dirty="0"/>
+                  <a:t>로 구성된다</a:t>
+                </a:r>
+                <a:r>
+                  <a:rPr lang="en-US" altLang="ko-KR" dirty="0"/>
+                  <a:t>.</a:t>
+                </a:r>
+              </a:p>
+              <a:p>
+                <a:r>
+                  <a:rPr lang="ko-KR" altLang="en-US" dirty="0"/>
+                  <a:t>외부 루프는 목표 위치와 속도를 기준으로 현재 상태와의 오차를 계산하고</a:t>
+                </a:r>
+                <a:r>
+                  <a:rPr lang="en-US" altLang="ko-KR" dirty="0"/>
+                  <a:t>, </a:t>
+                </a:r>
+                <a:r>
+                  <a:rPr lang="ko-KR" altLang="en-US" dirty="0" err="1"/>
+                  <a:t>드론이</a:t>
+                </a:r>
+                <a:r>
+                  <a:rPr lang="ko-KR" altLang="en-US" dirty="0"/>
+                  <a:t> 이동하기 위해 </a:t>
+                </a:r>
+                <a:r>
+                  <a:rPr lang="ko-KR" altLang="en-US" b="1" dirty="0"/>
+                  <a:t>필요한 가속도 수준을 산출</a:t>
+                </a:r>
+                <a:r>
+                  <a:rPr lang="ko-KR" altLang="en-US" dirty="0"/>
+                  <a:t>한다</a:t>
+                </a:r>
+                <a:r>
+                  <a:rPr lang="en-US" altLang="ko-KR" dirty="0"/>
+                  <a:t>.</a:t>
+                </a:r>
+                <a:br>
+                  <a:rPr lang="en-US" altLang="ko-KR" dirty="0"/>
+                </a:br>
+                <a:r>
+                  <a:rPr lang="ko-KR" altLang="en-US" dirty="0"/>
+                  <a:t>이 가속도를 만들어내기 위해 필요한 **목표 자세</a:t>
+                </a:r>
+                <a:r>
+                  <a:rPr lang="en-US" altLang="ko-KR" dirty="0"/>
+                  <a:t>(roll, pitch)**</a:t>
+                </a:r>
+                <a:r>
+                  <a:rPr lang="ko-KR" altLang="en-US" dirty="0"/>
+                  <a:t>가 외부 루프의 출력으로 생성된다</a:t>
+                </a:r>
+                <a:r>
+                  <a:rPr lang="en-US" altLang="ko-KR" dirty="0"/>
+                  <a:t>.</a:t>
+                </a:r>
+                <a:br>
+                  <a:rPr lang="en-US" altLang="ko-KR" dirty="0"/>
+                </a:br>
+                <a:r>
+                  <a:rPr lang="ko-KR" altLang="en-US" dirty="0"/>
+                  <a:t>즉</a:t>
+                </a:r>
+                <a:r>
+                  <a:rPr lang="en-US" altLang="ko-KR" dirty="0"/>
+                  <a:t>, </a:t>
+                </a:r>
+                <a:r>
+                  <a:rPr lang="ko-KR" altLang="en-US" dirty="0"/>
+                  <a:t>외부 루프는 자세를 직접 제어하는 것이 아니라</a:t>
+                </a:r>
+                <a:r>
+                  <a:rPr lang="en-US" altLang="ko-KR" dirty="0"/>
+                  <a:t>, </a:t>
+                </a:r>
+                <a:r>
+                  <a:rPr lang="ko-KR" altLang="en-US" dirty="0"/>
+                  <a:t>위치</a:t>
+                </a:r>
+                <a:r>
+                  <a:rPr lang="en-US" altLang="ko-KR" dirty="0"/>
+                  <a:t>·</a:t>
+                </a:r>
+                <a:r>
+                  <a:rPr lang="ko-KR" altLang="en-US" dirty="0"/>
+                  <a:t>속도 제어의 결과로 </a:t>
+                </a:r>
+                <a:r>
+                  <a:rPr lang="ko-KR" altLang="en-US" b="1" dirty="0"/>
+                  <a:t>자세 명령을 계산</a:t>
+                </a:r>
+                <a:r>
+                  <a:rPr lang="ko-KR" altLang="en-US" dirty="0"/>
+                  <a:t>한다</a:t>
+                </a:r>
+                <a:r>
+                  <a:rPr lang="en-US" altLang="ko-KR" dirty="0"/>
+                  <a:t>.</a:t>
+                </a:r>
+              </a:p>
+              <a:p>
+                <a:r>
+                  <a:rPr lang="ko-KR" altLang="en-US" dirty="0"/>
+                  <a:t>내부 루프는 외부 루프에서 생성된 목표 자세를 실제로 구현하는 역할을 한다</a:t>
+                </a:r>
+                <a:r>
+                  <a:rPr lang="en-US" altLang="ko-KR" dirty="0"/>
+                  <a:t>.</a:t>
+                </a:r>
+                <a:br>
+                  <a:rPr lang="en-US" altLang="ko-KR" dirty="0"/>
+                </a:br>
+                <a:r>
+                  <a:rPr lang="ko-KR" altLang="en-US" dirty="0"/>
+                  <a:t>자세 및 각속도 제어기를 통해 </a:t>
+                </a:r>
+                <a:r>
+                  <a:rPr lang="en-US" altLang="ko-KR" dirty="0"/>
+                  <a:t>IMU </a:t>
+                </a:r>
+                <a:r>
+                  <a:rPr lang="ko-KR" altLang="en-US" dirty="0"/>
+                  <a:t>기반으로 모터 출력을 고주파로 제어하여</a:t>
+                </a:r>
+                <a:r>
+                  <a:rPr lang="en-US" altLang="ko-KR" dirty="0"/>
+                  <a:t>, </a:t>
+                </a:r>
+                <a:r>
+                  <a:rPr lang="ko-KR" altLang="en-US" dirty="0" err="1"/>
+                  <a:t>드론이</a:t>
+                </a:r>
+                <a:r>
+                  <a:rPr lang="ko-KR" altLang="en-US" dirty="0"/>
+                  <a:t> 목표 자세를 빠르고 안정적으로 추종하도록 한다</a:t>
+                </a:r>
+                <a:r>
+                  <a:rPr lang="en-US" altLang="ko-KR" dirty="0"/>
+                  <a:t>.</a:t>
+                </a:r>
+              </a:p>
+              <a:p>
+                <a:r>
+                  <a:rPr lang="ko-KR" altLang="en-US" dirty="0"/>
+                  <a:t>이와 같은 계단식 제어 구조는 대부분의 </a:t>
+                </a:r>
+                <a:r>
+                  <a:rPr lang="ko-KR" altLang="en-US" dirty="0" err="1"/>
+                  <a:t>멀티콥터</a:t>
+                </a:r>
+                <a:r>
+                  <a:rPr lang="ko-KR" altLang="en-US" dirty="0"/>
+                  <a:t> 비행 제어 시스템에서 표준적으로 사용된다</a:t>
+                </a:r>
+                <a:r>
+                  <a:rPr lang="en-US" altLang="ko-KR" dirty="0"/>
+                  <a:t>.</a:t>
+                </a:r>
+              </a:p>
+            </p:txBody>
+          </p:sp>
+        </mc:Choice>
+        <mc:Fallback xmlns="">
+          <p:sp>
+            <p:nvSpPr>
+              <p:cNvPr id="3" name="슬라이드 노트 개체 틀 2"/>
+              <p:cNvSpPr>
+                <a:spLocks noGrp="1"/>
+              </p:cNvSpPr>
+              <p:nvPr>
+                <p:ph type="body" idx="1"/>
+              </p:nvPr>
+            </p:nvSpPr>
+            <p:spPr/>
+            <p:txBody>
+              <a:bodyPr/>
+              <a:lstStyle/>
+              <a:p>
+                <a:r>
+                  <a:rPr lang="ko-KR" altLang="en-US" dirty="0"/>
+                  <a:t>외부 자세 제어 루프는 </a:t>
+                </a:r>
+                <a:r>
+                  <a:rPr lang="en-US" altLang="ko-KR" dirty="0"/>
+                  <a:t>PX4</a:t>
+                </a:r>
+                <a:r>
+                  <a:rPr lang="ko-KR" altLang="en-US" dirty="0"/>
+                  <a:t>의 </a:t>
+                </a:r>
+                <a:r>
+                  <a:rPr lang="en-US" altLang="ko-KR" dirty="0"/>
+                  <a:t>Attitude Outer Loop</a:t>
+                </a:r>
+                <a:r>
+                  <a:rPr lang="ko-KR" altLang="en-US" dirty="0"/>
+                  <a:t>에 해당한다</a:t>
+                </a:r>
+                <a:r>
+                  <a:rPr lang="en-US" altLang="ko-KR" dirty="0"/>
+                  <a:t>.</a:t>
+                </a:r>
+                <a:br>
+                  <a:rPr lang="en-US" altLang="ko-KR" dirty="0"/>
+                </a:br>
+                <a:r>
+                  <a:rPr lang="ko-KR" altLang="en-US" dirty="0"/>
+                  <a:t>이 루프의 목적은 목표 자세와 현재 자세의 오차를 계산하여</a:t>
+                </a:r>
+                <a:r>
+                  <a:rPr lang="en-US" altLang="ko-KR" dirty="0"/>
+                  <a:t>, </a:t>
+                </a:r>
+                <a:r>
+                  <a:rPr lang="ko-KR" altLang="en-US" dirty="0"/>
+                  <a:t>이를 각속도 </a:t>
+                </a:r>
+                <a:r>
+                  <a:rPr lang="ko-KR" altLang="en-US" dirty="0" err="1"/>
+                  <a:t>목표값으로</a:t>
+                </a:r>
+                <a:r>
+                  <a:rPr lang="ko-KR" altLang="en-US" dirty="0"/>
+                  <a:t> 변환하는 것이다</a:t>
+                </a:r>
+                <a:r>
+                  <a:rPr lang="en-US" altLang="ko-KR" dirty="0"/>
+                  <a:t>.</a:t>
+                </a:r>
+              </a:p>
+              <a:p>
+                <a:r>
+                  <a:rPr lang="ko-KR" altLang="en-US" dirty="0"/>
+                  <a:t>입력으로는 목표 자세 </a:t>
+                </a:r>
+                <a:r>
+                  <a:rPr lang="ko-KR" altLang="en-US" sz="1200" i="0" kern="1200">
+                    <a:solidFill>
+                      <a:schemeClr val="tx1"/>
+                    </a:solidFill>
+                    <a:latin typeface="+mn-lt"/>
+                    <a:ea typeface="+mn-ea"/>
+                    <a:cs typeface="+mn-cs"/>
+                  </a:rPr>
+                  <a:t>𝑞_𝑠𝑝</a:t>
+                </a:r>
+                <a:r>
+                  <a:rPr lang="ko-KR" altLang="en-US" dirty="0"/>
+                  <a:t>와 현재 추정된 자세 </a:t>
+                </a:r>
+                <a:r>
+                  <a:rPr lang="ko-KR" altLang="en-US" sz="1200" i="0" kern="1200">
+                    <a:solidFill>
+                      <a:schemeClr val="tx1"/>
+                    </a:solidFill>
+                    <a:latin typeface="+mn-lt"/>
+                    <a:ea typeface="+mn-ea"/>
+                    <a:cs typeface="+mn-cs"/>
+                  </a:rPr>
+                  <a:t>𝑞</a:t>
+                </a:r>
+                <a:r>
+                  <a:rPr lang="ko-KR" altLang="en-US" dirty="0"/>
+                  <a:t>가 사용된다</a:t>
+                </a:r>
+                <a:r>
+                  <a:rPr lang="en-US" altLang="ko-KR" dirty="0"/>
+                  <a:t>.</a:t>
+                </a:r>
+                <a:br>
+                  <a:rPr lang="en-US" altLang="ko-KR" dirty="0"/>
+                </a:br>
+                <a:r>
+                  <a:rPr lang="ko-KR" altLang="en-US" dirty="0"/>
+                  <a:t>두 자세의 차이는 </a:t>
+                </a:r>
+                <a:r>
+                  <a:rPr lang="en-US" altLang="ko-KR" dirty="0"/>
+                  <a:t>Error quaternion </a:t>
+                </a:r>
+                <a:r>
+                  <a:rPr lang="ko-KR" altLang="en-US" sz="1200" i="0" kern="1200">
+                    <a:solidFill>
+                      <a:schemeClr val="tx1"/>
+                    </a:solidFill>
+                    <a:latin typeface="+mn-lt"/>
+                    <a:ea typeface="+mn-ea"/>
+                    <a:cs typeface="+mn-cs"/>
+                  </a:rPr>
+                  <a:t>𝑞_𝑒</a:t>
+                </a:r>
+                <a:r>
+                  <a:rPr lang="ko-KR" altLang="en-US" dirty="0"/>
+                  <a:t>로 계산되며</a:t>
+                </a:r>
+                <a:r>
+                  <a:rPr lang="en-US" altLang="ko-KR" dirty="0"/>
+                  <a:t>, </a:t>
+                </a:r>
+                <a:r>
+                  <a:rPr lang="ko-KR" altLang="en-US" dirty="0"/>
+                  <a:t>이는 현재 자세에서 목표 자세로 이동하기 위해 필요한 회전을 의미한다</a:t>
+                </a:r>
+                <a:r>
+                  <a:rPr lang="en-US" altLang="ko-KR" dirty="0"/>
+                  <a:t>.</a:t>
+                </a:r>
+              </a:p>
+              <a:p>
+                <a:r>
+                  <a:rPr lang="en-US" altLang="ko-KR" dirty="0"/>
+                  <a:t>Error quaternion</a:t>
+                </a:r>
+                <a:r>
+                  <a:rPr lang="ko-KR" altLang="en-US" dirty="0"/>
+                  <a:t>에서 회전의 크기</a:t>
+                </a:r>
+                <a:r>
+                  <a:rPr lang="en-US" altLang="ko-KR" dirty="0"/>
+                  <a:t>(</a:t>
+                </a:r>
+                <a:r>
+                  <a:rPr lang="ko-KR" altLang="en-US" dirty="0"/>
+                  <a:t>스칼라 성분</a:t>
+                </a:r>
+                <a:r>
+                  <a:rPr lang="en-US" altLang="ko-KR" dirty="0"/>
+                  <a:t>)</a:t>
+                </a:r>
+                <a:r>
+                  <a:rPr lang="ko-KR" altLang="en-US" dirty="0"/>
+                  <a:t>는 </a:t>
+                </a:r>
+                <a:r>
+                  <a:rPr lang="ko-KR" altLang="en-US" sz="1200" i="0" kern="1200">
+                    <a:solidFill>
+                      <a:schemeClr val="tx1"/>
+                    </a:solidFill>
+                    <a:latin typeface="+mn-lt"/>
+                    <a:ea typeface="+mn-ea"/>
+                    <a:cs typeface="+mn-cs"/>
+                  </a:rPr>
+                  <a:t>𝑞_</a:t>
+                </a:r>
+                <a:r>
+                  <a:rPr lang="en-US" altLang="ko-KR" sz="1200" i="0" kern="1200">
+                    <a:solidFill>
+                      <a:schemeClr val="tx1"/>
+                    </a:solidFill>
+                    <a:latin typeface="+mn-lt"/>
+                    <a:ea typeface="+mn-ea"/>
+                    <a:cs typeface="+mn-cs"/>
+                  </a:rPr>
+                  <a:t>0</a:t>
+                </a:r>
+                <a:r>
+                  <a:rPr lang="ko-KR" altLang="en-US" sz="1200" i="0" kern="1200">
+                    <a:solidFill>
+                      <a:schemeClr val="tx1"/>
+                    </a:solidFill>
+                    <a:latin typeface="+mn-lt"/>
+                    <a:ea typeface="+mn-ea"/>
+                    <a:cs typeface="+mn-cs"/>
+                  </a:rPr>
+                  <a:t>𝑒</a:t>
+                </a:r>
+                <a:r>
+                  <a:rPr lang="ko-KR" altLang="en-US" dirty="0"/>
+                  <a:t>로 추출되고</a:t>
+                </a:r>
+                <a:r>
+                  <a:rPr lang="en-US" altLang="ko-KR" dirty="0"/>
+                  <a:t>,</a:t>
+                </a:r>
+                <a:br>
+                  <a:rPr lang="en-US" altLang="ko-KR" dirty="0"/>
+                </a:br>
+                <a:r>
+                  <a:rPr lang="ko-KR" altLang="en-US" dirty="0"/>
+                  <a:t>회전의 방향</a:t>
+                </a:r>
+                <a:r>
+                  <a:rPr lang="en-US" altLang="ko-KR" dirty="0"/>
+                  <a:t>(</a:t>
+                </a:r>
+                <a:r>
+                  <a:rPr lang="ko-KR" altLang="en-US" dirty="0"/>
+                  <a:t>벡터 성분</a:t>
+                </a:r>
+                <a:r>
+                  <a:rPr lang="en-US" altLang="ko-KR" dirty="0"/>
+                  <a:t>)</a:t>
+                </a:r>
+                <a:r>
+                  <a:rPr lang="ko-KR" altLang="en-US" dirty="0"/>
+                  <a:t>은 </a:t>
+                </a:r>
+                <a:r>
+                  <a:rPr lang="ko-KR" altLang="en-US" sz="1200" i="0" kern="1200">
+                    <a:solidFill>
+                      <a:schemeClr val="tx1"/>
+                    </a:solidFill>
+                    <a:latin typeface="+mn-lt"/>
+                    <a:ea typeface="+mn-ea"/>
+                    <a:cs typeface="+mn-cs"/>
+                  </a:rPr>
+                  <a:t>𝑞 ⃗_𝑒</a:t>
+                </a:r>
+                <a:r>
+                  <a:rPr lang="ko-KR" altLang="en-US" dirty="0"/>
+                  <a:t>로 분리된다</a:t>
+                </a:r>
+                <a:r>
+                  <a:rPr lang="en-US" altLang="ko-KR" dirty="0"/>
+                  <a:t>.</a:t>
+                </a:r>
+                <a:br>
+                  <a:rPr lang="en-US" altLang="ko-KR" dirty="0"/>
+                </a:br>
+                <a:r>
+                  <a:rPr lang="ko-KR" altLang="en-US" dirty="0"/>
+                  <a:t>이때 </a:t>
+                </a:r>
+                <a:r>
+                  <a:rPr lang="en-US" altLang="ko-KR" dirty="0" err="1"/>
+                  <a:t>sgn</a:t>
+                </a:r>
+                <a:r>
+                  <a:rPr lang="en-US" altLang="ko-KR" dirty="0"/>
+                  <a:t> </a:t>
+                </a:r>
+                <a:r>
+                  <a:rPr lang="ko-KR" altLang="en-US" dirty="0"/>
+                  <a:t>연산은 </a:t>
+                </a:r>
+                <a:r>
+                  <a:rPr lang="ko-KR" altLang="en-US" dirty="0" err="1"/>
+                  <a:t>쿼터니언의</a:t>
+                </a:r>
+                <a:r>
+                  <a:rPr lang="ko-KR" altLang="en-US" dirty="0"/>
+                  <a:t> 부호를 결정하여 최단 회전 경로</a:t>
+                </a:r>
+                <a:r>
+                  <a:rPr lang="en-US" altLang="ko-KR" dirty="0"/>
+                  <a:t>(shortest rotation)</a:t>
+                </a:r>
+                <a:r>
+                  <a:rPr lang="ko-KR" altLang="en-US" dirty="0"/>
+                  <a:t>를 선택한다</a:t>
+                </a:r>
+                <a:r>
+                  <a:rPr lang="en-US" altLang="ko-KR" dirty="0"/>
+                  <a:t>.</a:t>
+                </a:r>
+              </a:p>
+              <a:p>
+                <a:r>
+                  <a:rPr lang="ko-KR" altLang="en-US" dirty="0"/>
+                  <a:t>회전의 크기와 방향 성분은 곱셈 연산을 통해 결합되며</a:t>
+                </a:r>
+                <a:r>
+                  <a:rPr lang="en-US" altLang="ko-KR" dirty="0"/>
+                  <a:t>,</a:t>
+                </a:r>
+                <a:br>
+                  <a:rPr lang="en-US" altLang="ko-KR" dirty="0"/>
+                </a:br>
+                <a:r>
+                  <a:rPr lang="ko-KR" altLang="en-US" dirty="0"/>
+                  <a:t>이 결과는 자세 오차에 비례한 각속도 방향 성분을 나타낸다</a:t>
+                </a:r>
+                <a:r>
+                  <a:rPr lang="en-US" altLang="ko-KR" dirty="0"/>
+                  <a:t>.</a:t>
+                </a:r>
+              </a:p>
+              <a:p>
+                <a:r>
+                  <a:rPr lang="ko-KR" altLang="en-US" dirty="0"/>
+                  <a:t>외부 자세 제어기는 비례 이득</a:t>
+                </a:r>
+                <a:r>
+                  <a:rPr lang="en-US" altLang="ko-KR" dirty="0"/>
+                  <a:t>(P gain)</a:t>
+                </a:r>
+                <a:r>
+                  <a:rPr lang="ko-KR" altLang="en-US" dirty="0"/>
+                  <a:t>만을 사용하는 </a:t>
+                </a:r>
+                <a:r>
+                  <a:rPr lang="en-US" altLang="ko-KR" dirty="0"/>
+                  <a:t>P </a:t>
+                </a:r>
+                <a:r>
+                  <a:rPr lang="ko-KR" altLang="en-US" dirty="0"/>
+                  <a:t>제어</a:t>
+                </a:r>
+                <a:r>
+                  <a:rPr lang="en-US" altLang="ko-KR" dirty="0"/>
+                  <a:t>(Proportional Control)</a:t>
+                </a:r>
+                <a:r>
+                  <a:rPr lang="ko-KR" altLang="en-US" dirty="0"/>
+                  <a:t> 구조로 구성되며</a:t>
+                </a:r>
+                <a:r>
+                  <a:rPr lang="en-US" altLang="ko-KR" dirty="0"/>
+                  <a:t>,</a:t>
+                </a:r>
+                <a:br>
+                  <a:rPr lang="en-US" altLang="ko-KR" dirty="0"/>
+                </a:br>
+                <a:r>
+                  <a:rPr lang="ko-KR" altLang="en-US" dirty="0"/>
+                  <a:t>자세 오차에 비례하여 목표 각속도 </a:t>
+                </a:r>
+                <a:r>
+                  <a:rPr lang="en-US" altLang="ko-KR" sz="1200" i="0" kern="1200">
+                    <a:solidFill>
+                      <a:schemeClr val="tx1"/>
+                    </a:solidFill>
+                    <a:latin typeface="+mn-lt"/>
+                    <a:ea typeface="+mn-ea"/>
+                    <a:cs typeface="+mn-cs"/>
+                  </a:rPr>
+                  <a:t>Ω</a:t>
+                </a:r>
+                <a:r>
+                  <a:rPr lang="ko-KR" altLang="en-US" sz="1200" i="0" kern="1200">
+                    <a:solidFill>
+                      <a:schemeClr val="tx1"/>
+                    </a:solidFill>
+                    <a:latin typeface="+mn-lt"/>
+                    <a:ea typeface="+mn-ea"/>
+                    <a:cs typeface="+mn-cs"/>
+                  </a:rPr>
+                  <a:t>_𝑠𝑝</a:t>
+                </a:r>
+                <a:r>
+                  <a:rPr lang="ko-KR" altLang="en-US" dirty="0"/>
+                  <a:t>를 생성한다</a:t>
+                </a:r>
+                <a:r>
+                  <a:rPr lang="en-US" altLang="ko-KR" dirty="0"/>
+                  <a:t>.</a:t>
+                </a:r>
+              </a:p>
+              <a:p>
+                <a:r>
+                  <a:rPr lang="en-US" altLang="ko-KR" dirty="0"/>
+                  <a:t> </a:t>
+                </a:r>
+                <a:r>
+                  <a:rPr lang="ko-KR" altLang="en-US" dirty="0"/>
+                  <a:t>생성된 각속도 </a:t>
+                </a:r>
+                <a:r>
+                  <a:rPr lang="ko-KR" altLang="en-US" dirty="0" err="1"/>
+                  <a:t>목표값은</a:t>
+                </a:r>
+                <a:r>
+                  <a:rPr lang="ko-KR" altLang="en-US" dirty="0"/>
+                  <a:t> 포화</a:t>
+                </a:r>
+                <a:r>
+                  <a:rPr lang="en-US" altLang="ko-KR" dirty="0"/>
+                  <a:t>(saturation) </a:t>
+                </a:r>
+                <a:r>
+                  <a:rPr lang="ko-KR" altLang="en-US" dirty="0"/>
+                  <a:t>블록을 통해 물리적 한계 내로 제한되며</a:t>
+                </a:r>
+                <a:r>
+                  <a:rPr lang="en-US" altLang="ko-KR" dirty="0"/>
+                  <a:t>,</a:t>
+                </a:r>
+                <a:br>
+                  <a:rPr lang="en-US" altLang="ko-KR" dirty="0"/>
+                </a:br>
+                <a:r>
+                  <a:rPr lang="ko-KR" altLang="en-US" dirty="0"/>
+                  <a:t>최종적으로 내부 각속도 제어 루프</a:t>
+                </a:r>
+                <a:r>
+                  <a:rPr lang="en-US" altLang="ko-KR" dirty="0"/>
+                  <a:t>(Rate Controller)</a:t>
+                </a:r>
+                <a:r>
+                  <a:rPr lang="ko-KR" altLang="en-US" dirty="0"/>
+                  <a:t>에 입력된다</a:t>
+                </a:r>
+                <a:r>
+                  <a:rPr lang="en-US" altLang="ko-KR" dirty="0"/>
+                  <a:t>.</a:t>
+                </a:r>
+              </a:p>
+              <a:p>
+                <a:r>
+                  <a:rPr lang="ko-KR" altLang="en-US" dirty="0"/>
+                  <a:t>외부 자세 제어 루프는 </a:t>
+                </a:r>
+                <a:r>
+                  <a:rPr lang="ko-KR" altLang="en-US" dirty="0" err="1"/>
+                  <a:t>저대역폭</a:t>
+                </a:r>
+                <a:r>
+                  <a:rPr lang="en-US" altLang="ko-KR" dirty="0"/>
+                  <a:t>(low bandwidth) </a:t>
+                </a:r>
+                <a:r>
+                  <a:rPr lang="ko-KR" altLang="en-US" dirty="0"/>
+                  <a:t>제어를 담당하며</a:t>
+                </a:r>
+                <a:r>
+                  <a:rPr lang="en-US" altLang="ko-KR" dirty="0"/>
+                  <a:t>,</a:t>
+                </a:r>
+                <a:br>
+                  <a:rPr lang="en-US" altLang="ko-KR" dirty="0"/>
+                </a:br>
+                <a:r>
+                  <a:rPr lang="ko-KR" altLang="en-US" dirty="0"/>
+                  <a:t>실제 비행 안정화와 빠른 응답은 내부 고주파 </a:t>
+                </a:r>
+                <a:r>
+                  <a:rPr lang="en-US" altLang="ko-KR" dirty="0"/>
+                  <a:t>Rate PID </a:t>
+                </a:r>
+                <a:r>
+                  <a:rPr lang="ko-KR" altLang="en-US" dirty="0"/>
+                  <a:t>제어 루프에서 수행된다</a:t>
+                </a:r>
+                <a:r>
+                  <a:rPr lang="en-US" altLang="ko-KR" dirty="0"/>
+                  <a:t>.</a:t>
+                </a:r>
+              </a:p>
+              <a:p>
+                <a:endParaRPr lang="ko-KR" altLang="en-US" dirty="0"/>
+              </a:p>
+            </p:txBody>
+          </p:sp>
+        </mc:Fallback>
+      </mc:AlternateContent>
       <p:sp>
         <p:nvSpPr>
           <p:cNvPr id="4" name="슬라이드 번호 개체 틀 3"/>
@@ -752,7 +1533,7 @@
           <a:p>
             <a:fld id="{0098AE32-E7AE-48A5-9392-CCB4D2CF538A}" type="slidenum">
               <a:rPr lang="ko-KR" altLang="en-US" smtClean="0"/>
-              <a:t>5</a:t>
+              <a:t>4</a:t>
             </a:fld>
             <a:endParaRPr lang="ko-KR" altLang="en-US"/>
           </a:p>
@@ -761,7 +1542,7 @@
     </p:spTree>
     <p:extLst>
       <p:ext uri="{BB962C8B-B14F-4D97-AF65-F5344CB8AC3E}">
-        <p14:creationId xmlns:p14="http://schemas.microsoft.com/office/powerpoint/2010/main" val="4252559566"/>
+        <p14:creationId xmlns:p14="http://schemas.microsoft.com/office/powerpoint/2010/main" val="3116013371"/>
       </p:ext>
     </p:extLst>
   </p:cSld>
@@ -815,6 +1596,578 @@
           <a:bodyPr/>
           <a:lstStyle/>
           <a:p>
+            <a:r>
+              <a:rPr lang="ko-KR" altLang="en-US" dirty="0"/>
+              <a:t>본 슬라이드는 </a:t>
+            </a:r>
+            <a:r>
+              <a:rPr lang="ko-KR" altLang="en-US" dirty="0" err="1"/>
+              <a:t>드론</a:t>
+            </a:r>
+            <a:r>
+              <a:rPr lang="ko-KR" altLang="en-US" dirty="0"/>
+              <a:t> 자세 제어에서 요구되는 실시간 제어 루프 구조와 주기 특성을 정리한 것이다</a:t>
+            </a:r>
+            <a:r>
+              <a:rPr lang="en-US" altLang="ko-KR" dirty="0"/>
+              <a:t>.</a:t>
+            </a:r>
+            <a:br>
+              <a:rPr lang="en-US" altLang="ko-KR" dirty="0"/>
+            </a:br>
+            <a:r>
+              <a:rPr lang="ko-KR" altLang="en-US" dirty="0"/>
+              <a:t>상단 블록도는 </a:t>
+            </a:r>
+            <a:r>
+              <a:rPr lang="en-US" altLang="ko-KR" dirty="0"/>
+              <a:t>IMU </a:t>
+            </a:r>
+            <a:r>
+              <a:rPr lang="ko-KR" altLang="en-US" dirty="0"/>
+              <a:t>센서</a:t>
+            </a:r>
+            <a:r>
+              <a:rPr lang="en-US" altLang="ko-KR" dirty="0"/>
+              <a:t>, </a:t>
+            </a:r>
+            <a:r>
+              <a:rPr lang="ko-KR" altLang="en-US" dirty="0"/>
+              <a:t>자세 제어기</a:t>
+            </a:r>
+            <a:r>
+              <a:rPr lang="en-US" altLang="ko-KR" dirty="0"/>
+              <a:t>(PID), PWM </a:t>
+            </a:r>
+            <a:r>
+              <a:rPr lang="ko-KR" altLang="en-US" dirty="0"/>
+              <a:t>출력</a:t>
+            </a:r>
+            <a:r>
+              <a:rPr lang="en-US" altLang="ko-KR" dirty="0"/>
+              <a:t>, </a:t>
+            </a:r>
+            <a:r>
+              <a:rPr lang="ko-KR" altLang="en-US" dirty="0"/>
+              <a:t>모터로 이어지는 전형적인 제어 흐름을 나타내며</a:t>
+            </a:r>
+            <a:r>
+              <a:rPr lang="en-US" altLang="ko-KR" dirty="0"/>
+              <a:t>, </a:t>
+            </a:r>
+            <a:r>
+              <a:rPr lang="ko-KR" altLang="en-US" dirty="0"/>
+              <a:t>각 단계마다 서로 다른 동작 주기를 가진다</a:t>
+            </a:r>
+            <a:r>
+              <a:rPr lang="en-US" altLang="ko-KR" dirty="0"/>
+              <a:t>.</a:t>
+            </a:r>
+          </a:p>
+          <a:p>
+            <a:r>
+              <a:rPr lang="en-US" altLang="ko-KR" dirty="0"/>
+              <a:t>IMU </a:t>
+            </a:r>
+            <a:r>
+              <a:rPr lang="ko-KR" altLang="en-US" dirty="0"/>
+              <a:t>센서는 일반적으로 </a:t>
+            </a:r>
+            <a:r>
+              <a:rPr lang="en-US" altLang="ko-KR" dirty="0"/>
+              <a:t>1~8 kHz </a:t>
+            </a:r>
+            <a:r>
+              <a:rPr lang="ko-KR" altLang="en-US" dirty="0"/>
+              <a:t>범위의 높은 샘플링 주기로 </a:t>
+            </a:r>
+            <a:r>
+              <a:rPr lang="ko-KR" altLang="en-US" dirty="0" err="1"/>
+              <a:t>자이로</a:t>
+            </a:r>
+            <a:r>
+              <a:rPr lang="ko-KR" altLang="en-US" dirty="0"/>
+              <a:t> 및 가속도 데이터를 생성하며</a:t>
+            </a:r>
+            <a:r>
+              <a:rPr lang="en-US" altLang="ko-KR" dirty="0"/>
+              <a:t>, </a:t>
+            </a:r>
+            <a:r>
+              <a:rPr lang="ko-KR" altLang="en-US" dirty="0"/>
+              <a:t>이는 기체의 미세한 회전과 진동을 포착하기 위함이다</a:t>
+            </a:r>
+            <a:r>
+              <a:rPr lang="en-US" altLang="ko-KR" dirty="0"/>
+              <a:t>.</a:t>
+            </a:r>
+            <a:br>
+              <a:rPr lang="en-US" altLang="ko-KR" dirty="0"/>
+            </a:br>
+            <a:r>
+              <a:rPr lang="en-US" altLang="ko-KR" dirty="0"/>
+              <a:t>Flight Controller </a:t>
+            </a:r>
+            <a:r>
+              <a:rPr lang="ko-KR" altLang="en-US" dirty="0"/>
+              <a:t>펌웨어의 제어 루프는 이러한 센서 데이터를 처리하여 자세</a:t>
+            </a:r>
+            <a:r>
+              <a:rPr lang="en-US" altLang="ko-KR" dirty="0"/>
+              <a:t>(Pitch, Roll, Yaw)</a:t>
+            </a:r>
+            <a:r>
+              <a:rPr lang="ko-KR" altLang="en-US" dirty="0"/>
+              <a:t>를 계산하고 모터 명령을 생성하는 주기로</a:t>
+            </a:r>
+            <a:r>
+              <a:rPr lang="en-US" altLang="ko-KR" dirty="0"/>
+              <a:t>, </a:t>
+            </a:r>
+            <a:r>
+              <a:rPr lang="ko-KR" altLang="en-US" dirty="0"/>
+              <a:t>보통 </a:t>
+            </a:r>
+            <a:r>
+              <a:rPr lang="en-US" altLang="ko-KR" dirty="0"/>
+              <a:t>1~8 kHz </a:t>
+            </a:r>
+            <a:r>
+              <a:rPr lang="ko-KR" altLang="en-US" dirty="0"/>
+              <a:t>범위에서 동작한다</a:t>
+            </a:r>
+            <a:r>
+              <a:rPr lang="en-US" altLang="ko-KR" dirty="0"/>
+              <a:t>.</a:t>
+            </a:r>
+            <a:br>
+              <a:rPr lang="en-US" altLang="ko-KR" dirty="0"/>
+            </a:br>
+            <a:r>
+              <a:rPr lang="ko-KR" altLang="en-US" dirty="0"/>
+              <a:t>이후 모터 제어 단계에서는 </a:t>
+            </a:r>
+            <a:r>
+              <a:rPr lang="en-US" altLang="ko-KR" dirty="0"/>
+              <a:t>PWM </a:t>
+            </a:r>
+            <a:r>
+              <a:rPr lang="ko-KR" altLang="en-US" dirty="0"/>
+              <a:t>또는 디지털 프로토콜을 통해 수백 </a:t>
+            </a:r>
+            <a:r>
+              <a:rPr lang="en-US" altLang="ko-KR" dirty="0"/>
+              <a:t>Hz </a:t>
+            </a:r>
+            <a:r>
+              <a:rPr lang="ko-KR" altLang="en-US" dirty="0"/>
+              <a:t>수준으로 출력이 전달된다</a:t>
+            </a:r>
+            <a:r>
+              <a:rPr lang="en-US" altLang="ko-KR" dirty="0"/>
+              <a:t>.</a:t>
+            </a:r>
+          </a:p>
+          <a:p>
+            <a:r>
+              <a:rPr lang="ko-KR" altLang="en-US" dirty="0"/>
+              <a:t>하단 표는 주요 </a:t>
+            </a:r>
+            <a:r>
+              <a:rPr lang="en-US" altLang="ko-KR" dirty="0"/>
+              <a:t>Flight Controller </a:t>
+            </a:r>
+            <a:r>
+              <a:rPr lang="ko-KR" altLang="en-US" dirty="0"/>
+              <a:t>펌웨어별 </a:t>
+            </a:r>
+            <a:r>
+              <a:rPr lang="en-US" altLang="ko-KR" dirty="0"/>
+              <a:t>IMU </a:t>
+            </a:r>
+            <a:r>
+              <a:rPr lang="ko-KR" altLang="en-US" dirty="0"/>
+              <a:t>센서 루프와 제어 루프 속도를 비교한 것이다</a:t>
+            </a:r>
+            <a:r>
+              <a:rPr lang="en-US" altLang="ko-KR" dirty="0"/>
+              <a:t>.</a:t>
+            </a:r>
+            <a:br>
+              <a:rPr lang="en-US" altLang="ko-KR" dirty="0"/>
+            </a:br>
+            <a:r>
+              <a:rPr lang="en-US" altLang="ko-KR" dirty="0" err="1"/>
+              <a:t>ArduPilot</a:t>
+            </a:r>
+            <a:r>
+              <a:rPr lang="ko-KR" altLang="en-US" dirty="0"/>
+              <a:t>은 센서 루프는 가변적이나 제어 루프는 스케줄러 구조에 의해 약 </a:t>
+            </a:r>
+            <a:r>
+              <a:rPr lang="en-US" altLang="ko-KR" dirty="0"/>
+              <a:t>400 Hz</a:t>
+            </a:r>
+            <a:r>
+              <a:rPr lang="ko-KR" altLang="en-US" dirty="0"/>
+              <a:t>로 고정되어 있으며</a:t>
+            </a:r>
+            <a:r>
+              <a:rPr lang="en-US" altLang="ko-KR" dirty="0"/>
+              <a:t>, PX4</a:t>
+            </a:r>
+            <a:r>
+              <a:rPr lang="ko-KR" altLang="en-US" dirty="0"/>
+              <a:t>와 </a:t>
+            </a:r>
+            <a:r>
+              <a:rPr lang="en-US" altLang="ko-KR" dirty="0" err="1"/>
+              <a:t>Betaflight</a:t>
+            </a:r>
+            <a:r>
+              <a:rPr lang="ko-KR" altLang="en-US" dirty="0"/>
+              <a:t>는 파라미터 설정을 통해 제어 루프 주기를 비교적 유연하게 조정할 수 있다</a:t>
+            </a:r>
+            <a:r>
+              <a:rPr lang="en-US" altLang="ko-KR" dirty="0"/>
+              <a:t>.</a:t>
+            </a:r>
+          </a:p>
+          <a:p>
+            <a:r>
+              <a:rPr lang="ko-KR" altLang="en-US" dirty="0"/>
+              <a:t>이와 같은 차이는 시뮬레이터 설계 시 단순히 센서 데이터를 생성하는 </a:t>
+            </a:r>
+            <a:r>
+              <a:rPr lang="ko-KR" altLang="en-US" dirty="0" err="1"/>
+              <a:t>것뿐만</a:t>
+            </a:r>
+            <a:r>
+              <a:rPr lang="ko-KR" altLang="en-US" dirty="0"/>
+              <a:t> 아니라</a:t>
+            </a:r>
+            <a:r>
+              <a:rPr lang="en-US" altLang="ko-KR" dirty="0"/>
+              <a:t>, </a:t>
+            </a:r>
+            <a:r>
+              <a:rPr lang="ko-KR" altLang="en-US" dirty="0"/>
+              <a:t>실제 펌웨어와 동일한 제어 루프 주기와 타이밍 구조를 재현하는 것이 중요함을 보여준다</a:t>
+            </a:r>
+            <a:r>
+              <a:rPr lang="en-US" altLang="ko-KR" dirty="0"/>
+              <a:t>.</a:t>
+            </a:r>
+          </a:p>
+        </p:txBody>
+      </p:sp>
+      <p:sp>
+        <p:nvSpPr>
+          <p:cNvPr id="4" name="슬라이드 번호 개체 틀 3"/>
+          <p:cNvSpPr>
+            <a:spLocks noGrp="1"/>
+          </p:cNvSpPr>
+          <p:nvPr>
+            <p:ph type="sldNum" sz="quarter" idx="5"/>
+          </p:nvPr>
+        </p:nvSpPr>
+        <p:spPr/>
+        <p:txBody>
+          <a:bodyPr/>
+          <a:lstStyle/>
+          <a:p>
+            <a:fld id="{0098AE32-E7AE-48A5-9392-CCB4D2CF538A}" type="slidenum">
+              <a:rPr lang="ko-KR" altLang="en-US" smtClean="0"/>
+              <a:t>5</a:t>
+            </a:fld>
+            <a:endParaRPr lang="ko-KR" altLang="en-US"/>
+          </a:p>
+        </p:txBody>
+      </p:sp>
+    </p:spTree>
+    <p:extLst>
+      <p:ext uri="{BB962C8B-B14F-4D97-AF65-F5344CB8AC3E}">
+        <p14:creationId xmlns:p14="http://schemas.microsoft.com/office/powerpoint/2010/main" val="4252559566"/>
+      </p:ext>
+    </p:extLst>
+  </p:cSld>
+  <p:clrMapOvr>
+    <a:masterClrMapping/>
+  </p:clrMapOvr>
+</p:notes>
+</file>
+
+<file path=ppt/notesSlides/notesSlide5.xml><?xml version="1.0" encoding="utf-8"?>
+<p:notes xmlns:a="http://schemas.openxmlformats.org/drawingml/2006/main" xmlns:r="http://schemas.openxmlformats.org/officeDocument/2006/relationships" xmlns:p="http://schemas.openxmlformats.org/presentationml/2006/main">
+  <p:cSld>
+    <p:spTree>
+      <p:nvGrpSpPr>
+        <p:cNvPr id="1" name=""/>
+        <p:cNvGrpSpPr/>
+        <p:nvPr/>
+      </p:nvGrpSpPr>
+      <p:grpSpPr>
+        <a:xfrm>
+          <a:off x="0" y="0"/>
+          <a:ext cx="0" cy="0"/>
+          <a:chOff x="0" y="0"/>
+          <a:chExt cx="0" cy="0"/>
+        </a:xfrm>
+      </p:grpSpPr>
+      <p:sp>
+        <p:nvSpPr>
+          <p:cNvPr id="2" name="슬라이드 이미지 개체 틀 1"/>
+          <p:cNvSpPr>
+            <a:spLocks noGrp="1" noRot="1" noChangeAspect="1"/>
+          </p:cNvSpPr>
+          <p:nvPr>
+            <p:ph type="sldImg"/>
+          </p:nvPr>
+        </p:nvSpPr>
+        <p:spPr/>
+      </p:sp>
+      <p:sp>
+        <p:nvSpPr>
+          <p:cNvPr id="3" name="슬라이드 노트 개체 틀 2"/>
+          <p:cNvSpPr>
+            <a:spLocks noGrp="1"/>
+          </p:cNvSpPr>
+          <p:nvPr>
+            <p:ph type="body" idx="1"/>
+          </p:nvPr>
+        </p:nvSpPr>
+        <p:spPr/>
+        <p:txBody>
+          <a:bodyPr/>
+          <a:lstStyle/>
+          <a:p>
+            <a:r>
+              <a:rPr lang="ko-KR" altLang="en-US" dirty="0"/>
+              <a:t>본 슬라이드는 기존 </a:t>
+            </a:r>
+            <a:r>
+              <a:rPr lang="ko-KR" altLang="en-US" dirty="0" err="1"/>
+              <a:t>드론</a:t>
+            </a:r>
+            <a:r>
+              <a:rPr lang="ko-KR" altLang="en-US" dirty="0"/>
+              <a:t> 시뮬레이터의 전반적인 구조와 제어 관점에서의 한계를 정리한 것이다</a:t>
+            </a:r>
+            <a:r>
+              <a:rPr lang="en-US" altLang="ko-KR" dirty="0"/>
+              <a:t>.</a:t>
+            </a:r>
+            <a:br>
+              <a:rPr lang="en-US" altLang="ko-KR" dirty="0"/>
+            </a:br>
+            <a:r>
+              <a:rPr lang="ko-KR" altLang="en-US" dirty="0"/>
+              <a:t>오른쪽에 제시된 </a:t>
+            </a:r>
+            <a:r>
+              <a:rPr lang="en-US" altLang="ko-KR" dirty="0" err="1"/>
+              <a:t>AirSim</a:t>
+            </a:r>
+            <a:r>
+              <a:rPr lang="en-US" altLang="ko-KR" dirty="0"/>
+              <a:t> </a:t>
+            </a:r>
+            <a:r>
+              <a:rPr lang="ko-KR" altLang="en-US" dirty="0"/>
+              <a:t>아키텍처는 물리 엔진</a:t>
+            </a:r>
+            <a:r>
+              <a:rPr lang="en-US" altLang="ko-KR" dirty="0"/>
+              <a:t>, </a:t>
+            </a:r>
+            <a:r>
+              <a:rPr lang="ko-KR" altLang="en-US" dirty="0"/>
+              <a:t>센서 모델</a:t>
+            </a:r>
+            <a:r>
+              <a:rPr lang="en-US" altLang="ko-KR" dirty="0"/>
+              <a:t>, </a:t>
+            </a:r>
+            <a:r>
+              <a:rPr lang="ko-KR" altLang="en-US" dirty="0"/>
+              <a:t>환경 모델</a:t>
+            </a:r>
+            <a:r>
+              <a:rPr lang="en-US" altLang="ko-KR" dirty="0"/>
+              <a:t>, </a:t>
+            </a:r>
+            <a:r>
+              <a:rPr lang="ko-KR" altLang="en-US" dirty="0"/>
+              <a:t>렌더링 및 </a:t>
+            </a:r>
+            <a:r>
+              <a:rPr lang="en-US" altLang="ko-KR" dirty="0"/>
+              <a:t>API </a:t>
+            </a:r>
+            <a:r>
+              <a:rPr lang="ko-KR" altLang="en-US" dirty="0"/>
+              <a:t>계층이 분리된 구조로</a:t>
+            </a:r>
+            <a:r>
+              <a:rPr lang="en-US" altLang="ko-KR" dirty="0"/>
+              <a:t>, </a:t>
+            </a:r>
+            <a:r>
+              <a:rPr lang="ko-KR" altLang="en-US" dirty="0"/>
+              <a:t>시각화 및 인지</a:t>
+            </a:r>
+            <a:r>
+              <a:rPr lang="en-US" altLang="ko-KR" dirty="0"/>
+              <a:t>(perception) </a:t>
+            </a:r>
+            <a:r>
+              <a:rPr lang="ko-KR" altLang="en-US" dirty="0"/>
+              <a:t>연구에는 적합하나 제어 루프 관점에서는 여러 계층을 거치며 지연과 </a:t>
+            </a:r>
+            <a:r>
+              <a:rPr lang="ko-KR" altLang="en-US" dirty="0" err="1"/>
+              <a:t>지터가</a:t>
+            </a:r>
+            <a:r>
+              <a:rPr lang="ko-KR" altLang="en-US" dirty="0"/>
+              <a:t> 발생한다</a:t>
+            </a:r>
+            <a:r>
+              <a:rPr lang="en-US" altLang="ko-KR" dirty="0"/>
+              <a:t>.</a:t>
+            </a:r>
+          </a:p>
+          <a:p>
+            <a:r>
+              <a:rPr lang="ko-KR" altLang="en-US" dirty="0"/>
+              <a:t>하단 표는 대표적인 </a:t>
+            </a:r>
+            <a:r>
+              <a:rPr lang="ko-KR" altLang="en-US" dirty="0" err="1"/>
+              <a:t>드론</a:t>
+            </a:r>
+            <a:r>
+              <a:rPr lang="ko-KR" altLang="en-US" dirty="0"/>
+              <a:t> 시뮬레이터들의 센서 루프 및 제어 루프 속도를 비교한 것이다</a:t>
+            </a:r>
+            <a:r>
+              <a:rPr lang="en-US" altLang="ko-KR" dirty="0"/>
+              <a:t>.</a:t>
+            </a:r>
+            <a:br>
+              <a:rPr lang="en-US" altLang="ko-KR" dirty="0"/>
+            </a:br>
+            <a:r>
+              <a:rPr lang="en-US" altLang="ko-KR" dirty="0"/>
+              <a:t>SITL</a:t>
+            </a:r>
+            <a:r>
+              <a:rPr lang="ko-KR" altLang="en-US" dirty="0"/>
+              <a:t>은 비교적 높은 제어 루프 속도를 제공하지만 고주파 </a:t>
+            </a:r>
+            <a:r>
+              <a:rPr lang="en-US" altLang="ko-KR" dirty="0"/>
+              <a:t>IMU </a:t>
+            </a:r>
+            <a:r>
+              <a:rPr lang="ko-KR" altLang="en-US" dirty="0"/>
+              <a:t>센서 루프 재현에는 한계가 있으며</a:t>
+            </a:r>
+            <a:r>
+              <a:rPr lang="en-US" altLang="ko-KR" dirty="0"/>
+              <a:t>, Gazebo</a:t>
+            </a:r>
+            <a:r>
+              <a:rPr lang="ko-KR" altLang="en-US" dirty="0"/>
+              <a:t>와 </a:t>
+            </a:r>
+            <a:r>
+              <a:rPr lang="en-US" altLang="ko-KR" dirty="0" err="1"/>
+              <a:t>AirSim</a:t>
+            </a:r>
+            <a:r>
+              <a:rPr lang="ko-KR" altLang="en-US" dirty="0"/>
+              <a:t>은 </a:t>
+            </a:r>
+            <a:r>
+              <a:rPr lang="en-US" altLang="ko-KR" dirty="0"/>
+              <a:t>ROS </a:t>
+            </a:r>
+            <a:r>
+              <a:rPr lang="ko-KR" altLang="en-US" dirty="0"/>
+              <a:t>또는 </a:t>
+            </a:r>
+            <a:r>
+              <a:rPr lang="en-US" altLang="ko-KR" dirty="0"/>
+              <a:t>RPC </a:t>
+            </a:r>
+            <a:r>
+              <a:rPr lang="ko-KR" altLang="en-US" dirty="0"/>
+              <a:t>기반 통신 구조로 인해 센서 및 제어 루프 주기가 수백 </a:t>
+            </a:r>
+            <a:r>
+              <a:rPr lang="en-US" altLang="ko-KR" dirty="0"/>
+              <a:t>Hz </a:t>
+            </a:r>
+            <a:r>
+              <a:rPr lang="ko-KR" altLang="en-US" dirty="0"/>
+              <a:t>수준으로 제한된다</a:t>
+            </a:r>
+            <a:r>
+              <a:rPr lang="en-US" altLang="ko-KR" dirty="0"/>
+              <a:t>.</a:t>
+            </a:r>
+            <a:br>
+              <a:rPr lang="en-US" altLang="ko-KR" dirty="0"/>
+            </a:br>
+            <a:r>
+              <a:rPr lang="en-US" altLang="ko-KR" dirty="0"/>
+              <a:t>MATLAB/Simulink</a:t>
+            </a:r>
+            <a:r>
+              <a:rPr lang="ko-KR" altLang="en-US" dirty="0"/>
+              <a:t>는 모델 기반 설계에 적합하지만</a:t>
+            </a:r>
+            <a:r>
+              <a:rPr lang="en-US" altLang="ko-KR" dirty="0"/>
+              <a:t>, </a:t>
+            </a:r>
+            <a:r>
+              <a:rPr lang="ko-KR" altLang="en-US" dirty="0"/>
+              <a:t>실시간 스케줄링 부재로 고주파 제어 루프 구현에는 구조적인 제약이 존재한다</a:t>
+            </a:r>
+            <a:r>
+              <a:rPr lang="en-US" altLang="ko-KR" dirty="0"/>
+              <a:t>.</a:t>
+            </a:r>
+          </a:p>
+          <a:p>
+            <a:r>
+              <a:rPr lang="ko-KR" altLang="en-US" dirty="0"/>
+              <a:t>이와 같은 구조적 한계로 인해 기존 시뮬레이터에서는 </a:t>
+            </a:r>
+            <a:r>
+              <a:rPr lang="ko-KR" altLang="en-US" dirty="0" err="1"/>
+              <a:t>실기체</a:t>
+            </a:r>
+            <a:r>
+              <a:rPr lang="ko-KR" altLang="en-US" dirty="0"/>
+              <a:t> 수준의 고주파 제어 특성을 정확히 재현하기 어려우며</a:t>
+            </a:r>
+            <a:r>
+              <a:rPr lang="en-US" altLang="ko-KR" dirty="0"/>
+              <a:t>, </a:t>
+            </a:r>
+            <a:r>
+              <a:rPr lang="ko-KR" altLang="en-US" dirty="0"/>
+              <a:t>이는 시뮬레이션 기반 제어기 튜닝의 한계로 이어진다</a:t>
+            </a:r>
+            <a:r>
+              <a:rPr lang="en-US" altLang="ko-KR" dirty="0"/>
+              <a:t>.</a:t>
+            </a:r>
+          </a:p>
+          <a:p>
             <a:endParaRPr lang="ko-KR" altLang="en-US" dirty="0"/>
           </a:p>
         </p:txBody>
@@ -855,7 +2208,7 @@
 </p:notes>
 </file>
 
-<file path=ppt/notesSlides/notesSlide5.xml><?xml version="1.0" encoding="utf-8"?>
+<file path=ppt/notesSlides/notesSlide6.xml><?xml version="1.0" encoding="utf-8"?>
 <p:notes xmlns:a="http://schemas.openxmlformats.org/drawingml/2006/main" xmlns:r="http://schemas.openxmlformats.org/officeDocument/2006/relationships" xmlns:p="http://schemas.openxmlformats.org/presentationml/2006/main">
   <p:cSld>
     <p:spTree>
@@ -963,7 +2316,7 @@
 </p:notes>
 </file>
 
-<file path=ppt/notesSlides/notesSlide6.xml><?xml version="1.0" encoding="utf-8"?>
+<file path=ppt/notesSlides/notesSlide7.xml><?xml version="1.0" encoding="utf-8"?>
 <p:notes xmlns:a="http://schemas.openxmlformats.org/drawingml/2006/main" xmlns:r="http://schemas.openxmlformats.org/officeDocument/2006/relationships" xmlns:p="http://schemas.openxmlformats.org/presentationml/2006/main">
   <p:cSld>
     <p:spTree>
@@ -1062,6 +2415,90 @@
     <p:extLst>
       <p:ext uri="{BB962C8B-B14F-4D97-AF65-F5344CB8AC3E}">
         <p14:creationId xmlns:p14="http://schemas.microsoft.com/office/powerpoint/2010/main" val="257321211"/>
+      </p:ext>
+    </p:extLst>
+  </p:cSld>
+  <p:clrMapOvr>
+    <a:masterClrMapping/>
+  </p:clrMapOvr>
+</p:notes>
+</file>
+
+<file path=ppt/notesSlides/notesSlide8.xml><?xml version="1.0" encoding="utf-8"?>
+<p:notes xmlns:a="http://schemas.openxmlformats.org/drawingml/2006/main" xmlns:r="http://schemas.openxmlformats.org/officeDocument/2006/relationships" xmlns:p="http://schemas.openxmlformats.org/presentationml/2006/main">
+  <p:cSld>
+    <p:spTree>
+      <p:nvGrpSpPr>
+        <p:cNvPr id="1" name=""/>
+        <p:cNvGrpSpPr/>
+        <p:nvPr/>
+      </p:nvGrpSpPr>
+      <p:grpSpPr>
+        <a:xfrm>
+          <a:off x="0" y="0"/>
+          <a:ext cx="0" cy="0"/>
+          <a:chOff x="0" y="0"/>
+          <a:chExt cx="0" cy="0"/>
+        </a:xfrm>
+      </p:grpSpPr>
+      <p:sp>
+        <p:nvSpPr>
+          <p:cNvPr id="2" name="슬라이드 이미지 개체 틀 1"/>
+          <p:cNvSpPr>
+            <a:spLocks noGrp="1" noRot="1" noChangeAspect="1"/>
+          </p:cNvSpPr>
+          <p:nvPr>
+            <p:ph type="sldImg"/>
+          </p:nvPr>
+        </p:nvSpPr>
+        <p:spPr/>
+      </p:sp>
+      <p:sp>
+        <p:nvSpPr>
+          <p:cNvPr id="3" name="슬라이드 노트 개체 틀 2"/>
+          <p:cNvSpPr>
+            <a:spLocks noGrp="1"/>
+          </p:cNvSpPr>
+          <p:nvPr>
+            <p:ph type="body" idx="1"/>
+          </p:nvPr>
+        </p:nvSpPr>
+        <p:spPr/>
+        <p:txBody>
+          <a:bodyPr/>
+          <a:lstStyle/>
+          <a:p>
+            <a:endParaRPr lang="ko-KR" altLang="en-US" dirty="0"/>
+          </a:p>
+        </p:txBody>
+      </p:sp>
+      <p:sp>
+        <p:nvSpPr>
+          <p:cNvPr id="4" name="슬라이드 번호 개체 틀 3"/>
+          <p:cNvSpPr>
+            <a:spLocks noGrp="1"/>
+          </p:cNvSpPr>
+          <p:nvPr>
+            <p:ph type="sldNum" sz="quarter" idx="5"/>
+          </p:nvPr>
+        </p:nvSpPr>
+        <p:spPr/>
+        <p:txBody>
+          <a:bodyPr/>
+          <a:lstStyle/>
+          <a:p>
+            <a:fld id="{0098AE32-E7AE-48A5-9392-CCB4D2CF538A}" type="slidenum">
+              <a:rPr lang="ko-KR" altLang="en-US" smtClean="0"/>
+              <a:t>9</a:t>
+            </a:fld>
+            <a:endParaRPr lang="ko-KR" altLang="en-US"/>
+          </a:p>
+        </p:txBody>
+      </p:sp>
+    </p:spTree>
+    <p:extLst>
+      <p:ext uri="{BB962C8B-B14F-4D97-AF65-F5344CB8AC3E}">
+        <p14:creationId xmlns:p14="http://schemas.microsoft.com/office/powerpoint/2010/main" val="817678727"/>
       </p:ext>
     </p:extLst>
   </p:cSld>
@@ -1218,7 +2655,7 @@
           <a:p>
             <a:fld id="{36209A1A-9265-4240-B6C3-FDC5AC5FF33D}" type="datetimeFigureOut">
               <a:rPr lang="ko-KR" altLang="en-US" smtClean="0"/>
-              <a:t>2025-12-11</a:t>
+              <a:t>2025-12-14</a:t>
             </a:fld>
             <a:endParaRPr lang="ko-KR" altLang="en-US"/>
           </a:p>
@@ -1416,7 +2853,7 @@
           <a:p>
             <a:fld id="{36209A1A-9265-4240-B6C3-FDC5AC5FF33D}" type="datetimeFigureOut">
               <a:rPr lang="ko-KR" altLang="en-US" smtClean="0"/>
-              <a:t>2025-12-11</a:t>
+              <a:t>2025-12-14</a:t>
             </a:fld>
             <a:endParaRPr lang="ko-KR" altLang="en-US"/>
           </a:p>
@@ -1624,7 +3061,7 @@
           <a:p>
             <a:fld id="{36209A1A-9265-4240-B6C3-FDC5AC5FF33D}" type="datetimeFigureOut">
               <a:rPr lang="ko-KR" altLang="en-US" smtClean="0"/>
-              <a:t>2025-12-11</a:t>
+              <a:t>2025-12-14</a:t>
             </a:fld>
             <a:endParaRPr lang="ko-KR" altLang="en-US"/>
           </a:p>
@@ -1822,7 +3259,7 @@
           <a:p>
             <a:fld id="{36209A1A-9265-4240-B6C3-FDC5AC5FF33D}" type="datetimeFigureOut">
               <a:rPr lang="ko-KR" altLang="en-US" smtClean="0"/>
-              <a:t>2025-12-11</a:t>
+              <a:t>2025-12-14</a:t>
             </a:fld>
             <a:endParaRPr lang="ko-KR" altLang="en-US"/>
           </a:p>
@@ -2097,7 +3534,7 @@
           <a:p>
             <a:fld id="{36209A1A-9265-4240-B6C3-FDC5AC5FF33D}" type="datetimeFigureOut">
               <a:rPr lang="ko-KR" altLang="en-US" smtClean="0"/>
-              <a:t>2025-12-11</a:t>
+              <a:t>2025-12-14</a:t>
             </a:fld>
             <a:endParaRPr lang="ko-KR" altLang="en-US"/>
           </a:p>
@@ -2362,7 +3799,7 @@
           <a:p>
             <a:fld id="{36209A1A-9265-4240-B6C3-FDC5AC5FF33D}" type="datetimeFigureOut">
               <a:rPr lang="ko-KR" altLang="en-US" smtClean="0"/>
-              <a:t>2025-12-11</a:t>
+              <a:t>2025-12-14</a:t>
             </a:fld>
             <a:endParaRPr lang="ko-KR" altLang="en-US"/>
           </a:p>
@@ -2774,7 +4211,7 @@
           <a:p>
             <a:fld id="{36209A1A-9265-4240-B6C3-FDC5AC5FF33D}" type="datetimeFigureOut">
               <a:rPr lang="ko-KR" altLang="en-US" smtClean="0"/>
-              <a:t>2025-12-11</a:t>
+              <a:t>2025-12-14</a:t>
             </a:fld>
             <a:endParaRPr lang="ko-KR" altLang="en-US"/>
           </a:p>
@@ -2915,7 +4352,7 @@
           <a:p>
             <a:fld id="{36209A1A-9265-4240-B6C3-FDC5AC5FF33D}" type="datetimeFigureOut">
               <a:rPr lang="ko-KR" altLang="en-US" smtClean="0"/>
-              <a:t>2025-12-11</a:t>
+              <a:t>2025-12-14</a:t>
             </a:fld>
             <a:endParaRPr lang="ko-KR" altLang="en-US"/>
           </a:p>
@@ -3028,7 +4465,7 @@
           <a:p>
             <a:fld id="{36209A1A-9265-4240-B6C3-FDC5AC5FF33D}" type="datetimeFigureOut">
               <a:rPr lang="ko-KR" altLang="en-US" smtClean="0"/>
-              <a:t>2025-12-11</a:t>
+              <a:t>2025-12-14</a:t>
             </a:fld>
             <a:endParaRPr lang="ko-KR" altLang="en-US"/>
           </a:p>
@@ -3339,7 +4776,7 @@
           <a:p>
             <a:fld id="{36209A1A-9265-4240-B6C3-FDC5AC5FF33D}" type="datetimeFigureOut">
               <a:rPr lang="ko-KR" altLang="en-US" smtClean="0"/>
-              <a:t>2025-12-11</a:t>
+              <a:t>2025-12-14</a:t>
             </a:fld>
             <a:endParaRPr lang="ko-KR" altLang="en-US"/>
           </a:p>
@@ -3627,7 +5064,7 @@
           <a:p>
             <a:fld id="{36209A1A-9265-4240-B6C3-FDC5AC5FF33D}" type="datetimeFigureOut">
               <a:rPr lang="ko-KR" altLang="en-US" smtClean="0"/>
-              <a:t>2025-12-11</a:t>
+              <a:t>2025-12-14</a:t>
             </a:fld>
             <a:endParaRPr lang="ko-KR" altLang="en-US"/>
           </a:p>
@@ -3868,7 +5305,7 @@
           <a:p>
             <a:fld id="{36209A1A-9265-4240-B6C3-FDC5AC5FF33D}" type="datetimeFigureOut">
               <a:rPr lang="ko-KR" altLang="en-US" smtClean="0"/>
-              <a:t>2025-12-11</a:t>
+              <a:t>2025-12-14</a:t>
             </a:fld>
             <a:endParaRPr lang="ko-KR" altLang="en-US"/>
           </a:p>
@@ -4917,7 +6354,7 @@
           <p:nvPr/>
         </p:nvPicPr>
         <p:blipFill>
-          <a:blip r:embed="rId2">
+          <a:blip r:embed="rId3">
             <a:extLst>
               <a:ext uri="{28A0092B-C50C-407E-A947-70E740481C1C}">
                 <a14:useLocalDpi xmlns:a14="http://schemas.microsoft.com/office/drawing/2010/main" val="0"/>
@@ -4932,7 +6369,7 @@
         <p:spPr bwMode="auto">
           <a:xfrm>
             <a:off x="733498" y="806934"/>
-            <a:ext cx="4458400" cy="2501658"/>
+            <a:ext cx="3289042" cy="1845518"/>
           </a:xfrm>
           <a:prstGeom prst="rect">
             <a:avLst/>
@@ -4963,8 +6400,8 @@
         </p:nvSpPr>
         <p:spPr>
           <a:xfrm>
-            <a:off x="733498" y="3308592"/>
-            <a:ext cx="4458400" cy="246221"/>
+            <a:off x="733497" y="2670820"/>
+            <a:ext cx="2850294" cy="276999"/>
           </a:xfrm>
           <a:prstGeom prst="rect">
             <a:avLst/>
@@ -4978,30 +6415,232 @@
           <a:lstStyle/>
           <a:p>
             <a:r>
-              <a:rPr lang="en-US" altLang="ko-KR" sz="1000" dirty="0"/>
+              <a:rPr lang="en-US" altLang="ko-KR" sz="1200" b="1" dirty="0"/>
               <a:t>[</a:t>
             </a:r>
             <a:r>
-              <a:rPr lang="ko-KR" altLang="en-US" sz="1000" dirty="0" err="1"/>
+              <a:rPr lang="ko-KR" altLang="en-US" sz="1200" b="1" dirty="0" err="1"/>
               <a:t>드론의</a:t>
             </a:r>
             <a:r>
-              <a:rPr lang="ko-KR" altLang="en-US" sz="1000" dirty="0"/>
+              <a:rPr lang="ko-KR" altLang="en-US" sz="1200" b="1" dirty="0"/>
               <a:t> 자세</a:t>
             </a:r>
             <a:r>
-              <a:rPr lang="en-US" altLang="ko-KR" sz="1000" dirty="0"/>
+              <a:rPr lang="en-US" altLang="ko-KR" sz="1200" b="1" dirty="0"/>
               <a:t>(Attitude) 3</a:t>
             </a:r>
             <a:r>
-              <a:rPr lang="ko-KR" altLang="en-US" sz="1000" dirty="0"/>
+              <a:rPr lang="ko-KR" altLang="en-US" sz="1200" b="1" dirty="0"/>
               <a:t>축</a:t>
             </a:r>
             <a:r>
-              <a:rPr lang="en-US" altLang="ko-KR" sz="1000" dirty="0"/>
+              <a:rPr lang="en-US" altLang="ko-KR" sz="1200" b="1" dirty="0"/>
               <a:t>]</a:t>
             </a:r>
-            <a:endParaRPr lang="ko-KR" altLang="en-US" sz="1000" dirty="0"/>
+            <a:endParaRPr lang="ko-KR" altLang="en-US" sz="1200" b="1" dirty="0"/>
+          </a:p>
+        </p:txBody>
+      </p:sp>
+      <p:sp>
+        <p:nvSpPr>
+          <p:cNvPr id="8" name="TextBox 7">
+            <a:extLst>
+              <a:ext uri="{FF2B5EF4-FFF2-40B4-BE49-F238E27FC236}">
+                <a16:creationId xmlns:a16="http://schemas.microsoft.com/office/drawing/2014/main" id="{53F05D2D-8D92-E573-0396-25C9D5760B83}"/>
+              </a:ext>
+            </a:extLst>
+          </p:cNvPr>
+          <p:cNvSpPr txBox="1"/>
+          <p:nvPr/>
+        </p:nvSpPr>
+        <p:spPr>
+          <a:xfrm>
+            <a:off x="359246" y="6443459"/>
+            <a:ext cx="11172354" cy="215444"/>
+          </a:xfrm>
+          <a:prstGeom prst="rect">
+            <a:avLst/>
+          </a:prstGeom>
+          <a:noFill/>
+        </p:spPr>
+        <p:txBody>
+          <a:bodyPr wrap="square">
+            <a:spAutoFit/>
+          </a:bodyPr>
+          <a:lstStyle/>
+          <a:p>
+            <a:r>
+              <a:rPr lang="en-US" altLang="ko-KR" sz="800" b="1" dirty="0"/>
+              <a:t>1 [Source: </a:t>
+            </a:r>
+            <a:r>
+              <a:rPr lang="en-US" altLang="ko-KR" sz="800" dirty="0"/>
+              <a:t>Generic cascaded control architecture for </a:t>
+            </a:r>
+            <a:r>
+              <a:rPr lang="en-US" altLang="ko-KR" sz="800" dirty="0" err="1"/>
+              <a:t>multicopter</a:t>
+            </a:r>
+            <a:r>
+              <a:rPr lang="en-US" altLang="ko-KR" sz="800" dirty="0"/>
+              <a:t> UAVs </a:t>
+            </a:r>
+            <a:r>
+              <a:rPr lang="en-US" altLang="ko-KR" sz="800" b="1" dirty="0"/>
+              <a:t>]</a:t>
+            </a:r>
+            <a:endParaRPr lang="ko-KR" altLang="en-US" sz="800" b="1" dirty="0"/>
+          </a:p>
+        </p:txBody>
+      </p:sp>
+      <p:pic>
+        <p:nvPicPr>
+          <p:cNvPr id="5" name="그림 4">
+            <a:extLst>
+              <a:ext uri="{FF2B5EF4-FFF2-40B4-BE49-F238E27FC236}">
+                <a16:creationId xmlns:a16="http://schemas.microsoft.com/office/drawing/2014/main" id="{97888545-0301-70A6-EF30-56E0ECDA8DD2}"/>
+              </a:ext>
+            </a:extLst>
+          </p:cNvPr>
+          <p:cNvPicPr>
+            <a:picLocks noChangeAspect="1"/>
+          </p:cNvPicPr>
+          <p:nvPr/>
+        </p:nvPicPr>
+        <p:blipFill>
+          <a:blip r:embed="rId4">
+            <a:extLst>
+              <a:ext uri="{28A0092B-C50C-407E-A947-70E740481C1C}">
+                <a14:useLocalDpi xmlns:a14="http://schemas.microsoft.com/office/drawing/2010/main" val="0"/>
+              </a:ext>
+            </a:extLst>
+          </a:blip>
+          <a:stretch>
+            <a:fillRect/>
+          </a:stretch>
+        </p:blipFill>
+        <p:spPr>
+          <a:xfrm>
+            <a:off x="733496" y="3276771"/>
+            <a:ext cx="4643847" cy="1955878"/>
+          </a:xfrm>
+          <a:prstGeom prst="rect">
+            <a:avLst/>
+          </a:prstGeom>
+        </p:spPr>
+      </p:pic>
+      <p:sp>
+        <p:nvSpPr>
+          <p:cNvPr id="9" name="TextBox 8">
+            <a:extLst>
+              <a:ext uri="{FF2B5EF4-FFF2-40B4-BE49-F238E27FC236}">
+                <a16:creationId xmlns:a16="http://schemas.microsoft.com/office/drawing/2014/main" id="{D4EF83CF-7F43-6783-6210-E1666B9B3FB3}"/>
+              </a:ext>
+            </a:extLst>
+          </p:cNvPr>
+          <p:cNvSpPr txBox="1"/>
+          <p:nvPr/>
+        </p:nvSpPr>
+        <p:spPr>
+          <a:xfrm>
+            <a:off x="733496" y="5232649"/>
+            <a:ext cx="4643847" cy="276999"/>
+          </a:xfrm>
+          <a:prstGeom prst="rect">
+            <a:avLst/>
+          </a:prstGeom>
+          <a:noFill/>
+        </p:spPr>
+        <p:txBody>
+          <a:bodyPr wrap="square">
+            <a:spAutoFit/>
+          </a:bodyPr>
+          <a:lstStyle/>
+          <a:p>
+            <a:r>
+              <a:rPr lang="en-US" altLang="ko-KR" sz="1200" b="1" dirty="0"/>
+              <a:t>[</a:t>
+            </a:r>
+            <a:r>
+              <a:rPr lang="ko-KR" altLang="en-US" sz="1200" dirty="0" err="1"/>
+              <a:t>멀티콥터</a:t>
+            </a:r>
+            <a:r>
+              <a:rPr lang="ko-KR" altLang="en-US" sz="1200" dirty="0"/>
+              <a:t> 계단식 제어 구조를 개념적으로 재구성한 그림</a:t>
+            </a:r>
+            <a:r>
+              <a:rPr lang="en-US" altLang="ko-KR" sz="1200" b="1" dirty="0"/>
+              <a:t>] 1</a:t>
+            </a:r>
+            <a:endParaRPr lang="ko-KR" altLang="en-US" sz="1200" b="1" dirty="0"/>
+          </a:p>
+        </p:txBody>
+      </p:sp>
+      <p:sp>
+        <p:nvSpPr>
+          <p:cNvPr id="11" name="TextBox 10">
+            <a:extLst>
+              <a:ext uri="{FF2B5EF4-FFF2-40B4-BE49-F238E27FC236}">
+                <a16:creationId xmlns:a16="http://schemas.microsoft.com/office/drawing/2014/main" id="{7C1CAE21-8327-9CA2-B061-338C5B863D47}"/>
+              </a:ext>
+            </a:extLst>
+          </p:cNvPr>
+          <p:cNvSpPr txBox="1"/>
+          <p:nvPr/>
+        </p:nvSpPr>
+        <p:spPr>
+          <a:xfrm>
+            <a:off x="733497" y="5820233"/>
+            <a:ext cx="10798103" cy="461665"/>
+          </a:xfrm>
+          <a:prstGeom prst="rect">
+            <a:avLst/>
+          </a:prstGeom>
+          <a:noFill/>
+        </p:spPr>
+        <p:txBody>
+          <a:bodyPr wrap="square">
+            <a:spAutoFit/>
+          </a:bodyPr>
+          <a:lstStyle/>
+          <a:p>
+            <a:r>
+              <a:rPr lang="ko-KR" altLang="en-US" sz="1200" b="1" dirty="0" err="1"/>
+              <a:t>멀티콥터의</a:t>
+            </a:r>
+            <a:r>
+              <a:rPr lang="ko-KR" altLang="en-US" sz="1200" b="1" dirty="0"/>
+              <a:t> 계단식</a:t>
+            </a:r>
+            <a:r>
+              <a:rPr lang="en-US" altLang="ko-KR" sz="1200" b="1" dirty="0"/>
+              <a:t>(cascaded) </a:t>
+            </a:r>
+            <a:r>
+              <a:rPr lang="ko-KR" altLang="en-US" sz="1200" b="1" dirty="0"/>
+              <a:t>제어 구조</a:t>
+            </a:r>
+            <a:br>
+              <a:rPr lang="ko-KR" altLang="en-US" sz="1200" dirty="0"/>
+            </a:br>
+            <a:r>
+              <a:rPr lang="ko-KR" altLang="en-US" sz="1200" dirty="0"/>
+              <a:t>외부 루프는 위치 및 속도를 제어하여 목표 자세를 생성하고</a:t>
+            </a:r>
+            <a:r>
+              <a:rPr lang="en-US" altLang="ko-KR" sz="1200" dirty="0"/>
+              <a:t>, </a:t>
+            </a:r>
+            <a:r>
+              <a:rPr lang="ko-KR" altLang="en-US" sz="1200" dirty="0"/>
+              <a:t>내부 루프는 자세 및 각속도를 고주파로 제어하여 모터 출력을 결정한다</a:t>
+            </a:r>
+            <a:r>
+              <a:rPr lang="en-US" altLang="ko-KR" sz="1200" dirty="0"/>
+              <a:t>.</a:t>
+            </a:r>
           </a:p>
         </p:txBody>
       </p:sp>
@@ -5135,11 +6774,11 @@
           <a:p>
             <a:pPr algn="ctr"/>
             <a:r>
-              <a:rPr lang="en-US" altLang="ko-KR" sz="1600" dirty="0"/>
+              <a:rPr lang="en-US" altLang="ko-KR" sz="1600" b="1" dirty="0"/>
               <a:t>IMU</a:t>
             </a:r>
             <a:r>
-              <a:rPr lang="ko-KR" altLang="en-US" sz="1600" dirty="0"/>
+              <a:rPr lang="ko-KR" altLang="en-US" sz="1600" b="1" dirty="0"/>
               <a:t> 센서</a:t>
             </a:r>
             <a:br>
@@ -5194,11 +6833,11 @@
           <a:p>
             <a:pPr algn="ctr"/>
             <a:r>
-              <a:rPr lang="en-US" altLang="ko-KR" sz="1600" dirty="0"/>
+              <a:rPr lang="en-US" altLang="ko-KR" sz="1600" b="1" dirty="0"/>
               <a:t>PID </a:t>
             </a:r>
             <a:r>
-              <a:rPr lang="ko-KR" altLang="en-US" sz="1600" dirty="0"/>
+              <a:rPr lang="ko-KR" altLang="en-US" sz="1600" b="1" dirty="0"/>
               <a:t>제어기</a:t>
             </a:r>
             <a:br>
@@ -5296,11 +6935,11 @@
           <a:p>
             <a:pPr algn="ctr"/>
             <a:r>
-              <a:rPr lang="en-US" altLang="ko-KR" sz="1600" dirty="0"/>
+              <a:rPr lang="en-US" altLang="ko-KR" sz="1600" b="1" dirty="0"/>
               <a:t>PWM</a:t>
             </a:r>
             <a:r>
-              <a:rPr lang="ko-KR" altLang="en-US" sz="1600" dirty="0"/>
+              <a:rPr lang="ko-KR" altLang="en-US" sz="1600" b="1" dirty="0"/>
               <a:t> 출력</a:t>
             </a:r>
           </a:p>
@@ -5380,7 +7019,7 @@
             <a:pPr algn="ctr"/>
             <a:r>
               <a:rPr lang="en-US" altLang="ko-KR" sz="1200" dirty="0"/>
-              <a:t>1 kHz</a:t>
+              <a:t>8 kHz</a:t>
             </a:r>
             <a:endParaRPr lang="en-US" altLang="ko-KR" sz="1200" b="1" dirty="0"/>
           </a:p>
@@ -5543,7 +7182,7 @@
           <a:p>
             <a:pPr algn="ctr"/>
             <a:r>
-              <a:rPr lang="ko-KR" altLang="en-US" sz="1600" dirty="0"/>
+              <a:rPr lang="ko-KR" altLang="en-US" sz="1600" b="1" dirty="0"/>
               <a:t>모터</a:t>
             </a:r>
           </a:p>
@@ -5712,7 +7351,7 @@
         <p:spPr>
           <a:xfrm>
             <a:off x="394735" y="2092801"/>
-            <a:ext cx="11330939" cy="1569660"/>
+            <a:ext cx="11330939" cy="1323439"/>
           </a:xfrm>
           <a:prstGeom prst="rect">
             <a:avLst/>
@@ -5730,6 +7369,10 @@
               <a:t> </a:t>
             </a:r>
             <a:r>
+              <a:rPr lang="en-US" altLang="ko-KR" sz="1600" dirty="0"/>
+              <a:t>I</a:t>
+            </a:r>
+            <a:r>
               <a:rPr lang="en-US" altLang="ko-KR" sz="1600" b="1" dirty="0"/>
               <a:t>MU </a:t>
             </a:r>
@@ -5739,7 +7382,7 @@
             </a:r>
             <a:r>
               <a:rPr lang="en-US" altLang="ko-KR" sz="1600" b="1" dirty="0"/>
-              <a:t>1~32 kHz</a:t>
+              <a:t>1~8 kHz</a:t>
             </a:r>
             <a:r>
               <a:rPr lang="ko-KR" altLang="en-US" sz="1600" b="1" dirty="0"/>
@@ -5759,11 +7402,7 @@
             </a:r>
             <a:r>
               <a:rPr lang="ko-KR" altLang="en-US" sz="1600" b="1" dirty="0"/>
-              <a:t>로 동작합니다</a:t>
-            </a:r>
-            <a:r>
-              <a:rPr lang="en-US" altLang="ko-KR" sz="1600" b="1" dirty="0"/>
-              <a:t>.</a:t>
+              <a:t>로 동작</a:t>
             </a:r>
             <a:br>
               <a:rPr lang="ko-KR" altLang="en-US" sz="1600" dirty="0"/>
@@ -5858,11 +7497,7 @@
             </a:r>
             <a:r>
               <a:rPr lang="ko-KR" altLang="en-US" sz="1600" dirty="0"/>
-              <a:t>에서 동작합니다</a:t>
-            </a:r>
-            <a:r>
-              <a:rPr lang="en-US" altLang="ko-KR" sz="1600" dirty="0"/>
-              <a:t>.</a:t>
+              <a:t>에서 동작</a:t>
             </a:r>
             <a:endParaRPr lang="en-US" altLang="ko-KR" sz="1600" dirty="0">
               <a:effectLst/>
@@ -5870,12 +7505,137 @@
           </a:p>
         </p:txBody>
       </p:sp>
+      <p:sp>
+        <p:nvSpPr>
+          <p:cNvPr id="45" name="TextBox 44">
+            <a:extLst>
+              <a:ext uri="{FF2B5EF4-FFF2-40B4-BE49-F238E27FC236}">
+                <a16:creationId xmlns:a16="http://schemas.microsoft.com/office/drawing/2014/main" id="{D14C01FF-CB3D-2773-AC17-ADC91AD7B90B}"/>
+              </a:ext>
+            </a:extLst>
+          </p:cNvPr>
+          <p:cNvSpPr txBox="1"/>
+          <p:nvPr/>
+        </p:nvSpPr>
+        <p:spPr>
+          <a:xfrm>
+            <a:off x="480102" y="5706586"/>
+            <a:ext cx="11330939" cy="461665"/>
+          </a:xfrm>
+          <a:prstGeom prst="rect">
+            <a:avLst/>
+          </a:prstGeom>
+          <a:noFill/>
+        </p:spPr>
+        <p:txBody>
+          <a:bodyPr wrap="square" rtlCol="0">
+            <a:spAutoFit/>
+          </a:bodyPr>
+          <a:lstStyle/>
+          <a:p>
+            <a:r>
+              <a:rPr lang="en-US" altLang="ko-KR" sz="1200" dirty="0"/>
+              <a:t>* </a:t>
+            </a:r>
+            <a:r>
+              <a:rPr lang="ko-KR" altLang="en-US" sz="1200" dirty="0"/>
+              <a:t>시뮬레이터에서 실기체와 동일한 동적 특성을 재현하려면 최소 </a:t>
+            </a:r>
+            <a:r>
+              <a:rPr lang="en-US" altLang="ko-KR" sz="1200" dirty="0"/>
+              <a:t>1 kHz </a:t>
+            </a:r>
+            <a:r>
+              <a:rPr lang="ko-KR" altLang="en-US" sz="1200" dirty="0"/>
+              <a:t>이상의 </a:t>
+            </a:r>
+            <a:r>
+              <a:rPr lang="en-US" altLang="ko-KR" sz="1200" dirty="0"/>
+              <a:t>IMU ODR </a:t>
+            </a:r>
+            <a:r>
+              <a:rPr lang="ko-KR" altLang="en-US" sz="1200" dirty="0"/>
+              <a:t>및 제어 루프 주기를 지원해야 하며</a:t>
+            </a:r>
+            <a:r>
+              <a:rPr lang="en-US" altLang="ko-KR" sz="1200" dirty="0"/>
+              <a:t>, </a:t>
+            </a:r>
+            <a:r>
+              <a:rPr lang="ko-KR" altLang="en-US" sz="1200" dirty="0"/>
+              <a:t>고성능 재현을 위해서는 </a:t>
+            </a:r>
+            <a:r>
+              <a:rPr lang="en-US" altLang="ko-KR" sz="1200" dirty="0"/>
+              <a:t>8 kHz </a:t>
+            </a:r>
+            <a:r>
+              <a:rPr lang="ko-KR" altLang="en-US" sz="1200" dirty="0"/>
+              <a:t>이상이 바람직하다</a:t>
+            </a:r>
+            <a:r>
+              <a:rPr lang="en-US" altLang="ko-KR" sz="1200" dirty="0"/>
+              <a:t>.</a:t>
+            </a:r>
+          </a:p>
+        </p:txBody>
+      </p:sp>
+      <p:sp>
+        <p:nvSpPr>
+          <p:cNvPr id="2" name="TextBox 1">
+            <a:extLst>
+              <a:ext uri="{FF2B5EF4-FFF2-40B4-BE49-F238E27FC236}">
+                <a16:creationId xmlns:a16="http://schemas.microsoft.com/office/drawing/2014/main" id="{7847334D-8D6C-0BBA-0A70-ADEB9A79A7CF}"/>
+              </a:ext>
+            </a:extLst>
+          </p:cNvPr>
+          <p:cNvSpPr txBox="1"/>
+          <p:nvPr/>
+        </p:nvSpPr>
+        <p:spPr>
+          <a:xfrm>
+            <a:off x="459475" y="3654925"/>
+            <a:ext cx="5847847" cy="338554"/>
+          </a:xfrm>
+          <a:prstGeom prst="rect">
+            <a:avLst/>
+          </a:prstGeom>
+          <a:noFill/>
+        </p:spPr>
+        <p:txBody>
+          <a:bodyPr wrap="square" rtlCol="0">
+            <a:spAutoFit/>
+          </a:bodyPr>
+          <a:lstStyle/>
+          <a:p>
+            <a:r>
+              <a:rPr lang="en-US" altLang="ko-KR" sz="1600" dirty="0"/>
+              <a:t>FC(Flight Controller) Firmware</a:t>
+            </a:r>
+            <a:r>
+              <a:rPr lang="ko-KR" altLang="en-US" sz="1600" dirty="0"/>
+              <a:t>별 </a:t>
+            </a:r>
+            <a:r>
+              <a:rPr lang="en-US" altLang="ko-KR" sz="1600" dirty="0"/>
+              <a:t>IMU </a:t>
+            </a:r>
+            <a:r>
+              <a:rPr lang="ko-KR" altLang="en-US" sz="1600" dirty="0"/>
+              <a:t>샘플링 속도</a:t>
+            </a:r>
+            <a:endParaRPr lang="ko-KR" altLang="en-US" sz="1600" dirty="0">
+              <a:effectLst/>
+            </a:endParaRPr>
+          </a:p>
+        </p:txBody>
+      </p:sp>
       <p:graphicFrame>
         <p:nvGraphicFramePr>
-          <p:cNvPr id="41" name="표 40">
-            <a:extLst>
-              <a:ext uri="{FF2B5EF4-FFF2-40B4-BE49-F238E27FC236}">
-                <a16:creationId xmlns:a16="http://schemas.microsoft.com/office/drawing/2014/main" id="{D8063F0A-E507-B75A-DF9F-0E94E1D6CCA0}"/>
+          <p:cNvPr id="7" name="표 6">
+            <a:extLst>
+              <a:ext uri="{FF2B5EF4-FFF2-40B4-BE49-F238E27FC236}">
+                <a16:creationId xmlns:a16="http://schemas.microsoft.com/office/drawing/2014/main" id="{7957626F-0D6B-DD64-055A-B5ABE26F6672}"/>
               </a:ext>
             </a:extLst>
           </p:cNvPr>
@@ -5885,14 +7645,14 @@
           <p:nvPr>
             <p:extLst>
               <p:ext uri="{D42A27DB-BD31-4B8C-83A1-F6EECF244321}">
-                <p14:modId xmlns:p14="http://schemas.microsoft.com/office/powerpoint/2010/main" val="2388585552"/>
+                <p14:modId xmlns:p14="http://schemas.microsoft.com/office/powerpoint/2010/main" val="3126286883"/>
               </p:ext>
             </p:extLst>
           </p:nvPr>
         </p:nvGraphicFramePr>
         <p:xfrm>
-          <a:off x="459475" y="4000697"/>
-          <a:ext cx="4423675" cy="1569720"/>
+          <a:off x="480102" y="4015666"/>
+          <a:ext cx="11051498" cy="1508760"/>
         </p:xfrm>
         <a:graphic>
           <a:graphicData uri="http://schemas.openxmlformats.org/drawingml/2006/table">
@@ -5901,414 +7661,31 @@
                 <a:tableStyleId>{5C22544A-7EE6-4342-B048-85BDC9FD1C3A}</a:tableStyleId>
               </a:tblPr>
               <a:tblGrid>
-                <a:gridCol w="1544879">
-                  <a:extLst>
-                    <a:ext uri="{9D8B030D-6E8A-4147-A177-3AD203B41FA5}">
-                      <a16:colId xmlns:a16="http://schemas.microsoft.com/office/drawing/2014/main" val="3861258388"/>
-                    </a:ext>
-                  </a:extLst>
-                </a:gridCol>
-                <a:gridCol w="2878796">
-                  <a:extLst>
-                    <a:ext uri="{9D8B030D-6E8A-4147-A177-3AD203B41FA5}">
-                      <a16:colId xmlns:a16="http://schemas.microsoft.com/office/drawing/2014/main" val="319173569"/>
-                    </a:ext>
-                  </a:extLst>
-                </a:gridCol>
-              </a:tblGrid>
-              <a:tr h="370840">
-                <a:tc>
-                  <a:txBody>
-                    <a:bodyPr/>
-                    <a:lstStyle/>
-                    <a:p>
-                      <a:pPr marL="0" indent="0" algn="ctr" latinLnBrk="1">
-                        <a:buFont typeface="+mj-lt"/>
-                        <a:buNone/>
-                      </a:pPr>
-                      <a:r>
-                        <a:rPr lang="en-US" altLang="ko-KR" sz="1200" dirty="0"/>
-                        <a:t>IMU</a:t>
-                      </a:r>
-                      <a:r>
-                        <a:rPr lang="ko-KR" altLang="en-US" sz="1200" dirty="0"/>
-                        <a:t>센서</a:t>
-                      </a:r>
-                    </a:p>
-                  </a:txBody>
-                  <a:tcPr/>
-                </a:tc>
-                <a:tc>
-                  <a:txBody>
-                    <a:bodyPr/>
-                    <a:lstStyle/>
-                    <a:p>
-                      <a:pPr algn="ctr" latinLnBrk="1"/>
-                      <a:r>
-                        <a:rPr lang="ko-KR" altLang="en-US" sz="1200" dirty="0"/>
-                        <a:t>최대 샘플링 속도</a:t>
-                      </a:r>
-                      <a:r>
-                        <a:rPr lang="en-US" altLang="ko-KR" sz="1200" dirty="0"/>
-                        <a:t>(ODR)</a:t>
-                      </a:r>
-                    </a:p>
-                    <a:p>
-                      <a:pPr algn="ctr" latinLnBrk="1"/>
-                      <a:r>
-                        <a:rPr lang="en-US" altLang="ko-KR" sz="1200" dirty="0"/>
-                        <a:t>(Output Data Rate)</a:t>
-                      </a:r>
-                      <a:endParaRPr lang="ko-KR" altLang="en-US" sz="1200" dirty="0"/>
-                    </a:p>
-                  </a:txBody>
-                  <a:tcPr/>
-                </a:tc>
-                <a:extLst>
-                  <a:ext uri="{0D108BD9-81ED-4DB2-BD59-A6C34878D82A}">
-                    <a16:rowId xmlns:a16="http://schemas.microsoft.com/office/drawing/2014/main" val="1226529205"/>
-                  </a:ext>
-                </a:extLst>
-              </a:tr>
-              <a:tr h="370840">
-                <a:tc>
-                  <a:txBody>
-                    <a:bodyPr/>
-                    <a:lstStyle/>
-                    <a:p>
-                      <a:pPr algn="ctr" latinLnBrk="1"/>
-                      <a:r>
-                        <a:rPr lang="en-US" altLang="ko-KR" sz="1200" dirty="0"/>
-                        <a:t>MPU–6000</a:t>
-                      </a:r>
-                      <a:endParaRPr lang="ko-KR" altLang="en-US" sz="1200" dirty="0"/>
-                    </a:p>
-                  </a:txBody>
-                  <a:tcPr/>
-                </a:tc>
-                <a:tc>
-                  <a:txBody>
-                    <a:bodyPr/>
-                    <a:lstStyle/>
-                    <a:p>
-                      <a:pPr algn="ctr" latinLnBrk="1"/>
-                      <a:r>
-                        <a:rPr lang="en-US" altLang="ko-KR" sz="1200" dirty="0"/>
-                        <a:t>8 kHz</a:t>
-                      </a:r>
-                      <a:endParaRPr lang="ko-KR" altLang="en-US" sz="1200" dirty="0"/>
-                    </a:p>
-                  </a:txBody>
-                  <a:tcPr/>
-                </a:tc>
-                <a:extLst>
-                  <a:ext uri="{0D108BD9-81ED-4DB2-BD59-A6C34878D82A}">
-                    <a16:rowId xmlns:a16="http://schemas.microsoft.com/office/drawing/2014/main" val="994232211"/>
-                  </a:ext>
-                </a:extLst>
-              </a:tr>
-              <a:tr h="370840">
-                <a:tc>
-                  <a:txBody>
-                    <a:bodyPr/>
-                    <a:lstStyle/>
-                    <a:p>
-                      <a:pPr algn="ctr" latinLnBrk="1"/>
-                      <a:r>
-                        <a:rPr lang="en-US" altLang="ko-KR" sz="1200" dirty="0"/>
-                        <a:t>ICM-42688p</a:t>
-                      </a:r>
-                      <a:endParaRPr lang="ko-KR" altLang="en-US" sz="1200" dirty="0"/>
-                    </a:p>
-                  </a:txBody>
-                  <a:tcPr/>
-                </a:tc>
-                <a:tc>
-                  <a:txBody>
-                    <a:bodyPr/>
-                    <a:lstStyle/>
-                    <a:p>
-                      <a:pPr algn="ctr" latinLnBrk="1"/>
-                      <a:r>
-                        <a:rPr lang="en-US" altLang="ko-KR" sz="1200" dirty="0"/>
-                        <a:t>32 kHz</a:t>
-                      </a:r>
-                      <a:endParaRPr lang="ko-KR" altLang="en-US" sz="1200" dirty="0"/>
-                    </a:p>
-                  </a:txBody>
-                  <a:tcPr/>
-                </a:tc>
-                <a:extLst>
-                  <a:ext uri="{0D108BD9-81ED-4DB2-BD59-A6C34878D82A}">
-                    <a16:rowId xmlns:a16="http://schemas.microsoft.com/office/drawing/2014/main" val="2016892214"/>
-                  </a:ext>
-                </a:extLst>
-              </a:tr>
-              <a:tr h="370840">
-                <a:tc>
-                  <a:txBody>
-                    <a:bodyPr/>
-                    <a:lstStyle/>
-                    <a:p>
-                      <a:pPr algn="ctr" latinLnBrk="1"/>
-                      <a:r>
-                        <a:rPr lang="en-US" altLang="ko-KR" sz="1200" dirty="0"/>
-                        <a:t>ICM-20689</a:t>
-                      </a:r>
-                      <a:endParaRPr lang="ko-KR" altLang="en-US" sz="1200" dirty="0"/>
-                    </a:p>
-                  </a:txBody>
-                  <a:tcPr/>
-                </a:tc>
-                <a:tc>
-                  <a:txBody>
-                    <a:bodyPr/>
-                    <a:lstStyle/>
-                    <a:p>
-                      <a:pPr algn="ctr" latinLnBrk="1"/>
-                      <a:r>
-                        <a:rPr lang="en-US" altLang="ko-KR" sz="1200" dirty="0"/>
-                        <a:t>8 kHz</a:t>
-                      </a:r>
-                      <a:endParaRPr lang="ko-KR" altLang="en-US" sz="1200" dirty="0"/>
-                    </a:p>
-                  </a:txBody>
-                  <a:tcPr/>
-                </a:tc>
-                <a:extLst>
-                  <a:ext uri="{0D108BD9-81ED-4DB2-BD59-A6C34878D82A}">
-                    <a16:rowId xmlns:a16="http://schemas.microsoft.com/office/drawing/2014/main" val="1808698105"/>
-                  </a:ext>
-                </a:extLst>
-              </a:tr>
-            </a:tbl>
-          </a:graphicData>
-        </a:graphic>
-      </p:graphicFrame>
-      <p:sp>
-        <p:nvSpPr>
-          <p:cNvPr id="42" name="TextBox 41">
-            <a:extLst>
-              <a:ext uri="{FF2B5EF4-FFF2-40B4-BE49-F238E27FC236}">
-                <a16:creationId xmlns:a16="http://schemas.microsoft.com/office/drawing/2014/main" id="{77C9845F-9314-AB77-4D8A-AB6F0A4E3FDA}"/>
-              </a:ext>
-            </a:extLst>
-          </p:cNvPr>
-          <p:cNvSpPr txBox="1"/>
-          <p:nvPr/>
-        </p:nvSpPr>
-        <p:spPr>
-          <a:xfrm>
-            <a:off x="459475" y="3672628"/>
-            <a:ext cx="4423675" cy="338554"/>
-          </a:xfrm>
-          <a:prstGeom prst="rect">
-            <a:avLst/>
-          </a:prstGeom>
-          <a:noFill/>
-        </p:spPr>
-        <p:txBody>
-          <a:bodyPr wrap="square" rtlCol="0">
-            <a:spAutoFit/>
-          </a:bodyPr>
-          <a:lstStyle/>
-          <a:p>
-            <a:r>
-              <a:rPr lang="en-US" altLang="ko-KR" sz="1600" dirty="0"/>
-              <a:t>IMU </a:t>
-            </a:r>
-            <a:r>
-              <a:rPr lang="ko-KR" altLang="en-US" sz="1600" dirty="0"/>
-              <a:t>센서 최대 </a:t>
-            </a:r>
-            <a:r>
-              <a:rPr lang="en-US" altLang="ko-KR" sz="1600" dirty="0"/>
-              <a:t>ODR </a:t>
-            </a:r>
-            <a:r>
-              <a:rPr lang="ko-KR" altLang="en-US" sz="1600" dirty="0"/>
-              <a:t>비교</a:t>
-            </a:r>
-            <a:endParaRPr lang="ko-KR" altLang="en-US" sz="1600" dirty="0">
-              <a:effectLst/>
-            </a:endParaRPr>
-          </a:p>
-        </p:txBody>
-      </p:sp>
-      <p:sp>
-        <p:nvSpPr>
-          <p:cNvPr id="45" name="TextBox 44">
-            <a:extLst>
-              <a:ext uri="{FF2B5EF4-FFF2-40B4-BE49-F238E27FC236}">
-                <a16:creationId xmlns:a16="http://schemas.microsoft.com/office/drawing/2014/main" id="{D14C01FF-CB3D-2773-AC17-ADC91AD7B90B}"/>
-              </a:ext>
-            </a:extLst>
-          </p:cNvPr>
-          <p:cNvSpPr txBox="1"/>
-          <p:nvPr/>
-        </p:nvSpPr>
-        <p:spPr>
-          <a:xfrm>
-            <a:off x="459475" y="5937419"/>
-            <a:ext cx="11330939" cy="461665"/>
-          </a:xfrm>
-          <a:prstGeom prst="rect">
-            <a:avLst/>
-          </a:prstGeom>
-          <a:noFill/>
-        </p:spPr>
-        <p:txBody>
-          <a:bodyPr wrap="square" rtlCol="0">
-            <a:spAutoFit/>
-          </a:bodyPr>
-          <a:lstStyle/>
-          <a:p>
-            <a:r>
-              <a:rPr lang="en-US" altLang="ko-KR" sz="1200" dirty="0"/>
-              <a:t>* </a:t>
-            </a:r>
-            <a:r>
-              <a:rPr lang="ko-KR" altLang="en-US" sz="1200" dirty="0"/>
-              <a:t>시뮬레이터에서 실기체와 동일한 동적 특성을 재현하려면 최소 </a:t>
-            </a:r>
-            <a:r>
-              <a:rPr lang="en-US" altLang="ko-KR" sz="1200" dirty="0"/>
-              <a:t>1 kHz </a:t>
-            </a:r>
-            <a:r>
-              <a:rPr lang="ko-KR" altLang="en-US" sz="1200" dirty="0"/>
-              <a:t>이상의 </a:t>
-            </a:r>
-            <a:r>
-              <a:rPr lang="en-US" altLang="ko-KR" sz="1200" dirty="0"/>
-              <a:t>IMU ODR </a:t>
-            </a:r>
-            <a:r>
-              <a:rPr lang="ko-KR" altLang="en-US" sz="1200" dirty="0"/>
-              <a:t>및 제어 루프 주기를 지원해야 하며</a:t>
-            </a:r>
-            <a:r>
-              <a:rPr lang="en-US" altLang="ko-KR" sz="1200" dirty="0"/>
-              <a:t>, </a:t>
-            </a:r>
-            <a:r>
-              <a:rPr lang="ko-KR" altLang="en-US" sz="1200" dirty="0"/>
-              <a:t>고성능 재현을 위해서는 </a:t>
-            </a:r>
-            <a:r>
-              <a:rPr lang="en-US" altLang="ko-KR" sz="1200" dirty="0"/>
-              <a:t>8 kHz </a:t>
-            </a:r>
-            <a:r>
-              <a:rPr lang="ko-KR" altLang="en-US" sz="1200" dirty="0"/>
-              <a:t>이상이 바람직하다</a:t>
-            </a:r>
-            <a:r>
-              <a:rPr lang="en-US" altLang="ko-KR" sz="1200" dirty="0"/>
-              <a:t>.</a:t>
-            </a:r>
-          </a:p>
-        </p:txBody>
-      </p:sp>
-      <p:sp>
-        <p:nvSpPr>
-          <p:cNvPr id="2" name="TextBox 1">
-            <a:extLst>
-              <a:ext uri="{FF2B5EF4-FFF2-40B4-BE49-F238E27FC236}">
-                <a16:creationId xmlns:a16="http://schemas.microsoft.com/office/drawing/2014/main" id="{7847334D-8D6C-0BBA-0A70-ADEB9A79A7CF}"/>
-              </a:ext>
-            </a:extLst>
-          </p:cNvPr>
-          <p:cNvSpPr txBox="1"/>
-          <p:nvPr/>
-        </p:nvSpPr>
-        <p:spPr>
-          <a:xfrm>
-            <a:off x="5631021" y="3663942"/>
-            <a:ext cx="5847847" cy="338554"/>
-          </a:xfrm>
-          <a:prstGeom prst="rect">
-            <a:avLst/>
-          </a:prstGeom>
-          <a:noFill/>
-        </p:spPr>
-        <p:txBody>
-          <a:bodyPr wrap="square" rtlCol="0">
-            <a:spAutoFit/>
-          </a:bodyPr>
-          <a:lstStyle/>
-          <a:p>
-            <a:r>
-              <a:rPr lang="en-US" altLang="ko-KR" sz="1600" dirty="0"/>
-              <a:t>FC(Flight Controller) Firmware</a:t>
-            </a:r>
-            <a:r>
-              <a:rPr lang="ko-KR" altLang="en-US" sz="1600" dirty="0"/>
-              <a:t>별 </a:t>
-            </a:r>
-            <a:r>
-              <a:rPr lang="en-US" altLang="ko-KR" sz="1600" dirty="0"/>
-              <a:t>IMU </a:t>
-            </a:r>
-            <a:r>
-              <a:rPr lang="ko-KR" altLang="en-US" sz="1600" dirty="0"/>
-              <a:t>샘플링 속도</a:t>
-            </a:r>
-            <a:endParaRPr lang="ko-KR" altLang="en-US" sz="1600" dirty="0">
-              <a:effectLst/>
-            </a:endParaRPr>
-          </a:p>
-        </p:txBody>
-      </p:sp>
-      <p:graphicFrame>
-        <p:nvGraphicFramePr>
-          <p:cNvPr id="7" name="표 6">
-            <a:extLst>
-              <a:ext uri="{FF2B5EF4-FFF2-40B4-BE49-F238E27FC236}">
-                <a16:creationId xmlns:a16="http://schemas.microsoft.com/office/drawing/2014/main" id="{7957626F-0D6B-DD64-055A-B5ABE26F6672}"/>
-              </a:ext>
-            </a:extLst>
-          </p:cNvPr>
-          <p:cNvGraphicFramePr>
-            <a:graphicFrameLocks noGrp="1"/>
-          </p:cNvGraphicFramePr>
-          <p:nvPr>
-            <p:extLst>
-              <p:ext uri="{D42A27DB-BD31-4B8C-83A1-F6EECF244321}">
-                <p14:modId xmlns:p14="http://schemas.microsoft.com/office/powerpoint/2010/main" val="252722111"/>
-              </p:ext>
-            </p:extLst>
-          </p:nvPr>
-        </p:nvGraphicFramePr>
-        <p:xfrm>
-          <a:off x="5631021" y="4000697"/>
-          <a:ext cx="5847847" cy="1483360"/>
-        </p:xfrm>
-        <a:graphic>
-          <a:graphicData uri="http://schemas.openxmlformats.org/drawingml/2006/table">
-            <a:tbl>
-              <a:tblPr firstRow="1" bandRow="1">
-                <a:tableStyleId>{5C22544A-7EE6-4342-B048-85BDC9FD1C3A}</a:tableStyleId>
-              </a:tblPr>
-              <a:tblGrid>
-                <a:gridCol w="1783845">
+                <a:gridCol w="1625535">
                   <a:extLst>
                     <a:ext uri="{9D8B030D-6E8A-4147-A177-3AD203B41FA5}">
                       <a16:colId xmlns:a16="http://schemas.microsoft.com/office/drawing/2014/main" val="2050726570"/>
                     </a:ext>
                   </a:extLst>
                 </a:gridCol>
-                <a:gridCol w="1987550">
+                <a:gridCol w="2340528">
                   <a:extLst>
                     <a:ext uri="{9D8B030D-6E8A-4147-A177-3AD203B41FA5}">
                       <a16:colId xmlns:a16="http://schemas.microsoft.com/office/drawing/2014/main" val="3019296922"/>
                     </a:ext>
                   </a:extLst>
                 </a:gridCol>
-                <a:gridCol w="2076452">
+                <a:gridCol w="2793534">
                   <a:extLst>
                     <a:ext uri="{9D8B030D-6E8A-4147-A177-3AD203B41FA5}">
                       <a16:colId xmlns:a16="http://schemas.microsoft.com/office/drawing/2014/main" val="3608366936"/>
+                    </a:ext>
+                  </a:extLst>
+                </a:gridCol>
+                <a:gridCol w="4291901">
+                  <a:extLst>
+                    <a:ext uri="{9D8B030D-6E8A-4147-A177-3AD203B41FA5}">
+                      <a16:colId xmlns:a16="http://schemas.microsoft.com/office/drawing/2014/main" val="2226588460"/>
                     </a:ext>
                   </a:extLst>
                 </a:gridCol>
@@ -6341,7 +7718,21 @@
                       </a:r>
                       <a:r>
                         <a:rPr lang="ko-KR" altLang="en-US" sz="1200" dirty="0"/>
-                        <a:t>센서 루프 속도</a:t>
+                        <a:t>센서 루프</a:t>
+                      </a:r>
+                    </a:p>
+                  </a:txBody>
+                  <a:tcPr/>
+                </a:tc>
+                <a:tc>
+                  <a:txBody>
+                    <a:bodyPr/>
+                    <a:lstStyle/>
+                    <a:p>
+                      <a:pPr algn="ctr" latinLnBrk="1"/>
+                      <a:r>
+                        <a:rPr lang="ko-KR" altLang="en-US" sz="1200" dirty="0"/>
+                        <a:t>제어 루프</a:t>
                       </a:r>
                     </a:p>
                   </a:txBody>
@@ -6391,7 +7782,7 @@
                       <a:pPr algn="ctr" latinLnBrk="1"/>
                       <a:r>
                         <a:rPr lang="en-US" altLang="ko-KR" sz="1200" dirty="0"/>
-                        <a:t>1 kHz ~ 8 kHz</a:t>
+                        <a:t>1 ~ 8 kHz</a:t>
                       </a:r>
                       <a:endParaRPr lang="ko-KR" altLang="en-US" sz="1200" dirty="0"/>
                     </a:p>
@@ -6406,11 +7797,50 @@
                       <a:pPr algn="ctr" latinLnBrk="1"/>
                       <a:r>
                         <a:rPr lang="en-US" altLang="ko-KR" sz="1200" b="0" dirty="0"/>
+                        <a:t>400 Hz</a:t>
+                      </a:r>
+                      <a:endParaRPr lang="ko-KR" altLang="en-US" sz="1200" b="0" dirty="0"/>
+                    </a:p>
+                  </a:txBody>
+                  <a:tcPr/>
+                </a:tc>
+                <a:tc>
+                  <a:txBody>
+                    <a:bodyPr/>
+                    <a:lstStyle/>
+                    <a:p>
+                      <a:pPr marL="0" marR="0" lvl="0" indent="0" algn="ctr" defTabSz="914400" rtl="0" eaLnBrk="1" fontAlgn="auto" latinLnBrk="1" hangingPunct="1">
+                        <a:lnSpc>
+                          <a:spcPct val="100000"/>
+                        </a:lnSpc>
+                        <a:spcBef>
+                          <a:spcPts val="0"/>
+                        </a:spcBef>
+                        <a:spcAft>
+                          <a:spcPts val="0"/>
+                        </a:spcAft>
+                        <a:buClrTx/>
+                        <a:buSzTx/>
+                        <a:buFontTx/>
+                        <a:buNone/>
+                        <a:tabLst/>
+                        <a:defRPr/>
+                      </a:pPr>
+                      <a:r>
+                        <a:rPr lang="en-US" altLang="ko-KR" sz="1200" b="0" dirty="0"/>
                         <a:t>INS_GYRO_RATE </a:t>
                       </a:r>
                       <a:r>
                         <a:rPr lang="en-US" altLang="ko-KR" sz="800" b="1" dirty="0"/>
-                        <a:t>[1]</a:t>
+                        <a:t>[1] , </a:t>
+                      </a:r>
+                      <a:r>
+                        <a:rPr lang="en-US" altLang="ko-KR" sz="1200" dirty="0"/>
+                        <a:t>SCHED_LOOP_RATE </a:t>
+                      </a:r>
+                      <a:r>
+                        <a:rPr lang="en-US" altLang="ko-KR" sz="800" dirty="0"/>
+                        <a:t>[2]</a:t>
                       </a:r>
                       <a:endParaRPr lang="ko-KR" altLang="en-US" sz="800" b="1" dirty="0"/>
                     </a:p>
@@ -6486,10 +7916,36 @@
                           <a:ea typeface="+mn-ea"/>
                           <a:cs typeface="+mn-cs"/>
                         </a:rPr>
-                        <a:t>IMU_GYRO_RATEMAX </a:t>
+                        <a:t>100 Hz ~ 2000 Hz</a:t>
                       </a:r>
+                    </a:p>
+                  </a:txBody>
+                  <a:tcPr/>
+                </a:tc>
+                <a:tc>
+                  <a:txBody>
+                    <a:bodyPr/>
+                    <a:lstStyle/>
+                    <a:p>
+                      <a:pPr marL="0" marR="0" lvl="0" indent="0" algn="ctr" defTabSz="914400" rtl="0" eaLnBrk="1" fontAlgn="auto" latinLnBrk="1" hangingPunct="1">
+                        <a:lnSpc>
+                          <a:spcPct val="100000"/>
+                        </a:lnSpc>
+                        <a:spcBef>
+                          <a:spcPts val="0"/>
+                        </a:spcBef>
+                        <a:spcAft>
+                          <a:spcPts val="0"/>
+                        </a:spcAft>
+                        <a:buClrTx/>
+                        <a:buSzTx/>
+                        <a:buFontTx/>
+                        <a:buNone/>
+                        <a:tabLst/>
+                        <a:defRPr/>
+                      </a:pPr>
                       <a:r>
-                        <a:rPr lang="en-US" altLang="ko-KR" sz="800" b="1" i="0" kern="1200" dirty="0">
+                        <a:rPr lang="en-US" altLang="ko-KR" sz="1200" b="0" i="0" kern="1200" dirty="0">
                           <a:solidFill>
                             <a:schemeClr val="dk1"/>
                           </a:solidFill>
@@ -6498,8 +7954,48 @@
                           <a:ea typeface="+mn-ea"/>
                           <a:cs typeface="+mn-cs"/>
                         </a:rPr>
-                        <a:t>[2]</a:t>
+                        <a:t>IMU_GYRO_RATEMAX </a:t>
                       </a:r>
+                      <a:r>
+                        <a:rPr lang="en-US" altLang="ko-KR" sz="800" b="0" i="0" kern="1200" dirty="0">
+                          <a:solidFill>
+                            <a:schemeClr val="dk1"/>
+                          </a:solidFill>
+                          <a:effectLst/>
+                          <a:latin typeface="+mn-lt"/>
+                          <a:ea typeface="+mn-ea"/>
+                          <a:cs typeface="+mn-cs"/>
+                        </a:rPr>
+                        <a:t>[3]</a:t>
+                      </a:r>
+                    </a:p>
+                    <a:p>
+                      <a:pPr marL="0" marR="0" lvl="0" indent="0" algn="ctr" defTabSz="914400" rtl="0" eaLnBrk="1" fontAlgn="auto" latinLnBrk="1" hangingPunct="1">
+                        <a:lnSpc>
+                          <a:spcPct val="100000"/>
+                        </a:lnSpc>
+                        <a:spcBef>
+                          <a:spcPts val="0"/>
+                        </a:spcBef>
+                        <a:spcAft>
+                          <a:spcPts val="0"/>
+                        </a:spcAft>
+                        <a:buClrTx/>
+                        <a:buSzTx/>
+                        <a:buFontTx/>
+                        <a:buNone/>
+                        <a:tabLst/>
+                        <a:defRPr/>
+                      </a:pPr>
+                      <a:endParaRPr lang="en-US" altLang="ko-KR" sz="800" b="1" i="0" kern="1200" dirty="0">
+                        <a:solidFill>
+                          <a:schemeClr val="dk1"/>
+                        </a:solidFill>
+                        <a:effectLst/>
+                        <a:latin typeface="+mn-lt"/>
+                        <a:ea typeface="+mn-ea"/>
+                        <a:cs typeface="+mn-cs"/>
+                      </a:endParaRPr>
                     </a:p>
                   </a:txBody>
                   <a:tcPr/>
@@ -6534,7 +8030,7 @@
                       <a:pPr algn="ctr" latinLnBrk="1"/>
                       <a:r>
                         <a:rPr lang="en-US" altLang="ko-KR" sz="1200" dirty="0"/>
-                        <a:t>8 ~ 32 kHz</a:t>
+                        <a:t>2 ~ 8 kHz</a:t>
                       </a:r>
                       <a:endParaRPr lang="ko-KR" altLang="en-US" sz="1200" dirty="0"/>
                     </a:p>
@@ -6547,7 +8043,30 @@
                     <a:lstStyle/>
                     <a:p>
                       <a:pPr algn="ctr" latinLnBrk="1"/>
-                      <a:endParaRPr lang="ko-KR" altLang="en-US" sz="1200" dirty="0"/>
+                      <a:r>
+                        <a:rPr lang="en-US" altLang="ko-KR" sz="1200" b="0" dirty="0"/>
+                        <a:t>1 ~ 4 kHz</a:t>
+                      </a:r>
+                      <a:endParaRPr lang="ko-KR" altLang="en-US" sz="1200" b="0" dirty="0"/>
+                    </a:p>
+                  </a:txBody>
+                  <a:tcPr/>
+                </a:tc>
+                <a:tc>
+                  <a:txBody>
+                    <a:bodyPr/>
+                    <a:lstStyle/>
+                    <a:p>
+                      <a:pPr algn="ctr" latinLnBrk="1"/>
+                      <a:r>
+                        <a:rPr lang="en-US" altLang="ko-KR" sz="1200" dirty="0"/>
+                        <a:t>Gyro update frequency, PID loop frequency </a:t>
+                      </a:r>
+                      <a:r>
+                        <a:rPr lang="en-US" altLang="ko-KR" sz="800" dirty="0"/>
+                        <a:t>[4]</a:t>
+                      </a:r>
+                      <a:endParaRPr lang="ko-KR" altLang="en-US" sz="800" dirty="0"/>
                     </a:p>
                   </a:txBody>
                   <a:tcPr/>
@@ -6576,8 +8095,8 @@
         </p:nvSpPr>
         <p:spPr>
           <a:xfrm>
-            <a:off x="359246" y="6443459"/>
-            <a:ext cx="11172354" cy="338554"/>
+            <a:off x="359246" y="6168251"/>
+            <a:ext cx="11172354" cy="584775"/>
           </a:xfrm>
           <a:prstGeom prst="rect">
             <a:avLst/>
@@ -6614,6 +8133,22 @@
               <a:rPr lang="en-US" altLang="ko-KR" sz="800" b="1" dirty="0">
                 <a:hlinkClick r:id="rId4"/>
               </a:rPr>
+              <a:t>https://ardupilot.org/dev/docs/code-overview-scheduling-your-new-code-to-run-intermittently.html?utm_source=chatgpt.com#scheduling-code-to-run-intermittently</a:t>
+            </a:r>
+            <a:r>
+              <a:rPr lang="en-US" altLang="ko-KR" sz="800" b="1" dirty="0"/>
+              <a:t> ]</a:t>
+            </a:r>
+          </a:p>
+          <a:p>
+            <a:r>
+              <a:rPr lang="en-US" altLang="ko-KR" sz="800" b="1" dirty="0"/>
+              <a:t>3 [Source: </a:t>
+            </a:r>
+            <a:r>
+              <a:rPr lang="en-US" altLang="ko-KR" sz="800" b="1" dirty="0">
+                <a:hlinkClick r:id="rId5"/>
+              </a:rPr>
               <a:t>https://docs.px4.io/main/en/advanced_config/parameter_reference#IMU_GYRO_RATEMAX</a:t>
             </a:r>
             <a:r>
@@ -6631,6 +8166,22 @@
             <a:r>
               <a:rPr lang="en-US" altLang="ko-KR" sz="800" b="1" dirty="0"/>
               <a:t>]</a:t>
+            </a:r>
+          </a:p>
+          <a:p>
+            <a:r>
+              <a:rPr lang="en-US" altLang="ko-KR" sz="800" b="1" dirty="0"/>
+              <a:t>4 [Source: </a:t>
+            </a:r>
+            <a:r>
+              <a:rPr lang="en-US" altLang="ko-KR" sz="800" b="1" dirty="0">
+                <a:hlinkClick r:id="rId6"/>
+              </a:rPr>
+              <a:t>https://www.betaflight.com/docs/wiki/configurator/configuration-tab</a:t>
+            </a:r>
+            <a:r>
+              <a:rPr lang="en-US" altLang="ko-KR" sz="800" b="1" dirty="0"/>
+              <a:t> ]</a:t>
             </a:r>
             <a:endParaRPr lang="ko-KR" altLang="en-US" sz="800" b="1" dirty="0"/>
           </a:p>
@@ -7727,7 +9278,7 @@
             </a:r>
             <a:r>
               <a:rPr lang="en-US" altLang="ko-KR" sz="1600" dirty="0"/>
-              <a:t>(1~32 kHz) vs </a:t>
+              <a:t>(1~8 kHz) vs </a:t>
             </a:r>
             <a:r>
               <a:rPr lang="ko-KR" altLang="en-US" sz="1600" dirty="0"/>
@@ -7840,6 +9391,74 @@
           </a:p>
           <a:p>
             <a:endParaRPr lang="ko-KR" altLang="en-US" sz="1600" dirty="0"/>
+          </a:p>
+        </p:txBody>
+      </p:sp>
+      <p:sp>
+        <p:nvSpPr>
+          <p:cNvPr id="4" name="TextBox 3">
+            <a:extLst>
+              <a:ext uri="{FF2B5EF4-FFF2-40B4-BE49-F238E27FC236}">
+                <a16:creationId xmlns:a16="http://schemas.microsoft.com/office/drawing/2014/main" id="{7F1DAEF0-2163-0BB0-8A6E-DE78084F9699}"/>
+              </a:ext>
+            </a:extLst>
+          </p:cNvPr>
+          <p:cNvSpPr txBox="1"/>
+          <p:nvPr/>
+        </p:nvSpPr>
+        <p:spPr>
+          <a:xfrm>
+            <a:off x="602779" y="4537801"/>
+            <a:ext cx="10986442" cy="646331"/>
+          </a:xfrm>
+          <a:prstGeom prst="rect">
+            <a:avLst/>
+          </a:prstGeom>
+          <a:noFill/>
+        </p:spPr>
+        <p:txBody>
+          <a:bodyPr wrap="square">
+            <a:spAutoFit/>
+          </a:bodyPr>
+          <a:lstStyle/>
+          <a:p>
+            <a:r>
+              <a:rPr lang="ko-KR" altLang="en-US" dirty="0"/>
+              <a:t>기존 </a:t>
+            </a:r>
+            <a:r>
+              <a:rPr lang="ko-KR" altLang="en-US" dirty="0" err="1"/>
+              <a:t>드론</a:t>
+            </a:r>
+            <a:r>
+              <a:rPr lang="ko-KR" altLang="en-US" dirty="0"/>
+              <a:t> 시뮬레이터는 </a:t>
+            </a:r>
+            <a:r>
+              <a:rPr lang="en-US" altLang="ko-KR" dirty="0"/>
+              <a:t>IMU raw </a:t>
+            </a:r>
+            <a:r>
+              <a:rPr lang="ko-KR" altLang="en-US" dirty="0"/>
+              <a:t>데이터를 주로 내부 상태 계산 및 전달 목적에 맞게 단순화하여 모사하므로</a:t>
+            </a:r>
+            <a:r>
+              <a:rPr lang="en-US" altLang="ko-KR" dirty="0"/>
+              <a:t>, </a:t>
+            </a:r>
+            <a:r>
+              <a:rPr lang="ko-KR" altLang="en-US" dirty="0" err="1"/>
+              <a:t>실기체</a:t>
+            </a:r>
+            <a:r>
+              <a:rPr lang="ko-KR" altLang="en-US" dirty="0"/>
+              <a:t> 수준의 고주파 제어 루프 특성을 재현하는 데 한계가 있다</a:t>
+            </a:r>
+            <a:r>
+              <a:rPr lang="en-US" altLang="ko-KR" dirty="0"/>
+              <a:t>.</a:t>
+            </a:r>
+            <a:endParaRPr lang="ko-KR" altLang="en-US" dirty="0"/>
           </a:p>
         </p:txBody>
       </p:sp>
@@ -7937,7 +9556,7 @@
         <p:spPr>
           <a:xfrm>
             <a:off x="583729" y="752149"/>
-            <a:ext cx="11176000" cy="3785652"/>
+            <a:ext cx="11176000" cy="5016758"/>
           </a:xfrm>
           <a:prstGeom prst="rect">
             <a:avLst/>
@@ -7956,17 +9575,8 @@
             </a:r>
             <a:r>
               <a:rPr lang="ko-KR" altLang="en-US" sz="1600" b="1" dirty="0"/>
-              <a:t>고주파 </a:t>
-            </a:r>
-            <a:r>
-              <a:rPr lang="en-US" altLang="ko-KR" sz="1600" b="1" dirty="0"/>
-              <a:t>IMU </a:t>
-            </a:r>
-            <a:r>
-              <a:rPr lang="ko-KR" altLang="en-US" sz="1600" b="1" dirty="0"/>
-              <a:t>센서 루프 재현</a:t>
-            </a:r>
-            <a:endParaRPr lang="en-US" altLang="ko-KR" sz="1600" b="1" dirty="0"/>
+              <a:t>기존 시뮬레이터 한계 검증</a:t>
+            </a:r>
           </a:p>
           <a:p>
             <a:r>
@@ -7974,12 +9584,24 @@
               <a:t> - </a:t>
             </a:r>
             <a:r>
-              <a:rPr lang="ko-KR" altLang="en-US" sz="1600" dirty="0" err="1"/>
-              <a:t>실기체</a:t>
+              <a:rPr lang="en-US" altLang="ko-KR" sz="1600" dirty="0" err="1"/>
+              <a:t>AirSim</a:t>
+            </a:r>
+            <a:r>
+              <a:rPr lang="en-US" altLang="ko-KR" sz="1600" dirty="0"/>
+              <a:t> </a:t>
             </a:r>
             <a:r>
               <a:rPr lang="ko-KR" altLang="en-US" sz="1600" dirty="0"/>
-              <a:t> </a:t>
+              <a:t>환경에서 </a:t>
+            </a:r>
+            <a:r>
+              <a:rPr lang="en-US" altLang="ko-KR" sz="1600" dirty="0"/>
+              <a:t>333 Hz</a:t>
+            </a:r>
+            <a:r>
+              <a:rPr lang="ko-KR" altLang="en-US" sz="1600" dirty="0"/>
+              <a:t>를 초과하는 </a:t>
             </a:r>
             <a:r>
               <a:rPr lang="en-US" altLang="ko-KR" sz="1600" dirty="0"/>
@@ -7987,15 +9609,55 @@
             </a:r>
             <a:r>
               <a:rPr lang="ko-KR" altLang="en-US" sz="1600" dirty="0"/>
-              <a:t>수준의 고주파</a:t>
-            </a:r>
+              <a:t>샘플링 시도</a:t>
+            </a:r>
+          </a:p>
+          <a:p>
             <a:r>
               <a:rPr lang="en-US" altLang="ko-KR" sz="1600" dirty="0"/>
-              <a:t>(8~32 kHz)</a:t>
+              <a:t> - RPC </a:t>
             </a:r>
             <a:r>
               <a:rPr lang="ko-KR" altLang="en-US" sz="1600" dirty="0"/>
-              <a:t> 출력 데이터 생성</a:t>
+              <a:t>기반 통신을 이용한 </a:t>
+            </a:r>
+            <a:r>
+              <a:rPr lang="en-US" altLang="ko-KR" sz="1600" dirty="0"/>
+              <a:t>1 kHz IMU </a:t>
+            </a:r>
+            <a:r>
+              <a:rPr lang="ko-KR" altLang="en-US" sz="1600" dirty="0"/>
+              <a:t>데이터 수집 가능성 평가</a:t>
+            </a:r>
+          </a:p>
+          <a:p>
+            <a:r>
+              <a:rPr lang="en-US" altLang="ko-KR" sz="1600" dirty="0"/>
+              <a:t> - </a:t>
+            </a:r>
+            <a:r>
+              <a:rPr lang="ko-KR" altLang="en-US" sz="1600" dirty="0"/>
+              <a:t>샘플 간 시간 간격 분석을 통한 지연</a:t>
+            </a:r>
+            <a:r>
+              <a:rPr lang="en-US" altLang="ko-KR" sz="1600" dirty="0"/>
+              <a:t>(latency) </a:t>
+            </a:r>
+            <a:r>
+              <a:rPr lang="ko-KR" altLang="en-US" sz="1600" dirty="0"/>
+              <a:t>및 </a:t>
+            </a:r>
+            <a:r>
+              <a:rPr lang="ko-KR" altLang="en-US" sz="1600" dirty="0" err="1"/>
+              <a:t>지터</a:t>
+            </a:r>
+            <a:r>
+              <a:rPr lang="en-US" altLang="ko-KR" sz="1600" dirty="0"/>
+              <a:t>(jitter) </a:t>
+            </a:r>
+            <a:r>
+              <a:rPr lang="ko-KR" altLang="en-US" sz="1600" dirty="0"/>
+              <a:t>특성 측정</a:t>
             </a:r>
           </a:p>
           <a:p>
@@ -8008,30 +9670,48 @@
             </a:r>
             <a:r>
               <a:rPr lang="ko-KR" altLang="en-US" sz="1600" b="1" dirty="0"/>
-              <a:t>고주파 제어 루프</a:t>
+              <a:t>공용 제어 구조 추상화</a:t>
+            </a:r>
+          </a:p>
+          <a:p>
+            <a:r>
+              <a:rPr lang="en-US" altLang="ko-KR" sz="1600" dirty="0"/>
+              <a:t> - RPC </a:t>
+            </a:r>
+            <a:r>
+              <a:rPr lang="ko-KR" altLang="en-US" sz="1600" dirty="0"/>
+              <a:t>및 </a:t>
+            </a:r>
+            <a:r>
+              <a:rPr lang="en-US" altLang="ko-KR" sz="1600" dirty="0"/>
+              <a:t>SHM </a:t>
+            </a:r>
+            <a:r>
+              <a:rPr lang="ko-KR" altLang="en-US" sz="1600" dirty="0"/>
+              <a:t>방식을 </a:t>
+            </a:r>
+            <a:r>
+              <a:rPr lang="ko-KR" altLang="en-US" sz="1600" b="1" dirty="0"/>
+              <a:t>동일 인터페이스로 사용 가능한 샘플링</a:t>
             </a:r>
             <a:r>
               <a:rPr lang="en-US" altLang="ko-KR" sz="1600" b="1" dirty="0"/>
-              <a:t>(Attitude Loop) </a:t>
+              <a:t>·</a:t>
             </a:r>
             <a:r>
               <a:rPr lang="ko-KR" altLang="en-US" sz="1600" b="1" dirty="0"/>
-              <a:t>실시간 처리</a:t>
-            </a:r>
-            <a:endParaRPr lang="en-US" altLang="ko-KR" sz="1600" b="1" dirty="0"/>
+              <a:t>제어 루프 추상 클래스 설계</a:t>
+            </a:r>
+            <a:endParaRPr lang="ko-KR" altLang="en-US" sz="1600" dirty="0"/>
           </a:p>
           <a:p>
             <a:r>
               <a:rPr lang="en-US" altLang="ko-KR" sz="1600" dirty="0"/>
-              <a:t>- </a:t>
-            </a:r>
-            <a:r>
-              <a:rPr lang="ko-KR" altLang="en-US" sz="1600" dirty="0" err="1"/>
-              <a:t>실기체</a:t>
+              <a:t> - </a:t>
             </a:r>
             <a:r>
               <a:rPr lang="ko-KR" altLang="en-US" sz="1600" dirty="0"/>
-              <a:t> </a:t>
+              <a:t>시뮬레이터와 실제 </a:t>
             </a:r>
             <a:r>
               <a:rPr lang="en-US" altLang="ko-KR" sz="1600" dirty="0"/>
@@ -8039,52 +9719,31 @@
             </a:r>
             <a:r>
               <a:rPr lang="ko-KR" altLang="en-US" sz="1600" dirty="0"/>
-              <a:t>수준의 </a:t>
-            </a:r>
+              <a:t>환경에 </a:t>
+            </a:r>
+            <a:r>
+              <a:rPr lang="ko-KR" altLang="en-US" sz="1600" b="1" dirty="0"/>
+              <a:t>동일 코드 구조 적용 가능성 확보</a:t>
+            </a:r>
+            <a:endParaRPr lang="ko-KR" altLang="en-US" sz="1600" dirty="0"/>
+          </a:p>
+          <a:p>
+            <a:endParaRPr lang="en-US" altLang="ko-KR" sz="1600" dirty="0"/>
+          </a:p>
+          <a:p>
+            <a:r>
+              <a:rPr lang="en-US" altLang="ko-KR" sz="1600" b="1" dirty="0"/>
+              <a:t>3.3 Shared Memory(SHM) </a:t>
+            </a:r>
+            <a:r>
+              <a:rPr lang="ko-KR" altLang="en-US" sz="1600" b="1" dirty="0"/>
+              <a:t>기반 고속 통신 구조 설계</a:t>
+            </a:r>
+          </a:p>
+          <a:p>
             <a:r>
               <a:rPr lang="en-US" altLang="ko-KR" sz="1600" dirty="0"/>
-              <a:t>1~8 kHz </a:t>
-            </a:r>
-            <a:r>
-              <a:rPr lang="ko-KR" altLang="en-US" sz="1600" dirty="0"/>
-              <a:t>제어 루프 구현</a:t>
-            </a:r>
-            <a:endParaRPr lang="en-US" altLang="ko-KR" sz="1600" dirty="0"/>
-          </a:p>
-          <a:p>
-            <a:endParaRPr lang="en-US" altLang="ko-KR" sz="1600" dirty="0"/>
-          </a:p>
-          <a:p>
-            <a:r>
-              <a:rPr lang="en-US" altLang="ko-KR" sz="1600" b="1" dirty="0"/>
-              <a:t>3.3 </a:t>
-            </a:r>
-            <a:r>
-              <a:rPr lang="ko-KR" altLang="en-US" sz="1600" b="1" dirty="0"/>
-              <a:t>지연</a:t>
-            </a:r>
-            <a:r>
-              <a:rPr lang="en-US" altLang="ko-KR" sz="1600" b="1" dirty="0"/>
-              <a:t>(latency), </a:t>
-            </a:r>
-            <a:r>
-              <a:rPr lang="ko-KR" altLang="en-US" sz="1600" b="1" dirty="0" err="1"/>
-              <a:t>지터</a:t>
-            </a:r>
-            <a:r>
-              <a:rPr lang="en-US" altLang="ko-KR" sz="1600" b="1" dirty="0"/>
-              <a:t>(jitter) </a:t>
-            </a:r>
-            <a:r>
-              <a:rPr lang="ko-KR" altLang="en-US" sz="1600" b="1" dirty="0"/>
-              <a:t>없는 실시간 구조 설계</a:t>
-            </a:r>
-            <a:endParaRPr lang="en-US" altLang="ko-KR" sz="1600" b="1" dirty="0"/>
-          </a:p>
-          <a:p>
-            <a:r>
-              <a:rPr lang="en-US" altLang="ko-KR" sz="1600" dirty="0"/>
-              <a:t>- </a:t>
+              <a:t> - </a:t>
             </a:r>
             <a:r>
               <a:rPr lang="ko-KR" altLang="en-US" sz="1600" dirty="0"/>
@@ -8092,19 +9751,54 @@
             </a:r>
             <a:r>
               <a:rPr lang="en-US" altLang="ko-KR" sz="1600" dirty="0"/>
-              <a:t>·RPC </a:t>
+              <a:t>/RPC</a:t>
             </a:r>
             <a:r>
               <a:rPr lang="ko-KR" altLang="en-US" sz="1600" dirty="0"/>
-              <a:t>기반 통신을 사용하지 않는 고정 주기 실행 엔진 구축</a:t>
-            </a:r>
-            <a:endParaRPr lang="en-US" altLang="ko-KR" sz="1600" dirty="0"/>
-          </a:p>
-          <a:p>
-            <a:pPr marL="285750" indent="-285750">
-              <a:buFontTx/>
-              <a:buChar char="-"/>
-            </a:pPr>
+              <a:t>를 사용하지 않는 </a:t>
+            </a:r>
+            <a:r>
+              <a:rPr lang="en-US" altLang="ko-KR" sz="1600" b="1" dirty="0"/>
+              <a:t>SHM </a:t>
+            </a:r>
+            <a:r>
+              <a:rPr lang="ko-KR" altLang="en-US" sz="1600" b="1" dirty="0"/>
+              <a:t>기반 센서</a:t>
+            </a:r>
+            <a:r>
+              <a:rPr lang="en-US" altLang="ko-KR" sz="1600" b="1" dirty="0"/>
+              <a:t>·</a:t>
+            </a:r>
+            <a:r>
+              <a:rPr lang="ko-KR" altLang="en-US" sz="1600" b="1" dirty="0"/>
+              <a:t>제어 데이터 교환 라이브러리 구현</a:t>
+            </a:r>
+            <a:endParaRPr lang="ko-KR" altLang="en-US" sz="1600" dirty="0"/>
+          </a:p>
+          <a:p>
+            <a:r>
+              <a:rPr lang="en-US" altLang="ko-KR" sz="1600" dirty="0"/>
+              <a:t> - </a:t>
+            </a:r>
+            <a:r>
+              <a:rPr lang="ko-KR" altLang="en-US" sz="1600" dirty="0"/>
+              <a:t>별도 프로세스에서 동작 가능한 </a:t>
+            </a:r>
+            <a:r>
+              <a:rPr lang="ko-KR" altLang="en-US" sz="1600" b="1" dirty="0"/>
+              <a:t>고정 주기</a:t>
+            </a:r>
+            <a:r>
+              <a:rPr lang="en-US" altLang="ko-KR" sz="1600" b="1" dirty="0"/>
+              <a:t>(real-time) </a:t>
+            </a:r>
+            <a:r>
+              <a:rPr lang="ko-KR" altLang="en-US" sz="1600" b="1" dirty="0"/>
+              <a:t>실행 구조 설계</a:t>
+            </a:r>
+            <a:endParaRPr lang="ko-KR" altLang="en-US" sz="1600" dirty="0"/>
+          </a:p>
+          <a:p>
             <a:endParaRPr lang="en-US" altLang="ko-KR" sz="1600" dirty="0"/>
           </a:p>
           <a:p>
@@ -8114,128 +9808,86 @@
             </a:r>
             <a:r>
               <a:rPr lang="ko-KR" altLang="en-US" sz="1600" b="1" dirty="0"/>
-              <a:t>제안된 시뮬레이터의 실시간</a:t>
-            </a:r>
+              <a:t>비행 제어 성능 비교 실험</a:t>
+            </a:r>
+            <a:endParaRPr lang="en-US" altLang="ko-KR" sz="1600" b="1" dirty="0"/>
+          </a:p>
+          <a:p>
+            <a:r>
+              <a:rPr lang="en-US" altLang="ko-KR" sz="1600" dirty="0"/>
+              <a:t> - </a:t>
+            </a:r>
+            <a:r>
+              <a:rPr lang="ko-KR" altLang="en-US" sz="1600" dirty="0"/>
+              <a:t>단순 </a:t>
+            </a:r>
+            <a:r>
+              <a:rPr lang="ko-KR" altLang="en-US" sz="1600" dirty="0" err="1"/>
+              <a:t>호버링</a:t>
+            </a:r>
+            <a:r>
+              <a:rPr lang="ko-KR" altLang="en-US" sz="1600" dirty="0"/>
+              <a:t> 조건에서</a:t>
+            </a:r>
+            <a:endParaRPr lang="en-US" altLang="ko-KR" sz="1600" dirty="0"/>
+          </a:p>
+          <a:p>
+            <a:r>
+              <a:rPr lang="en-US" altLang="ko-KR" sz="1600" dirty="0"/>
+              <a:t> - RPC </a:t>
+            </a:r>
+            <a:r>
+              <a:rPr lang="ko-KR" altLang="en-US" sz="1600" dirty="0"/>
+              <a:t>기반 제어</a:t>
+            </a:r>
+            <a:endParaRPr lang="en-US" altLang="ko-KR" sz="1600" dirty="0"/>
+          </a:p>
+          <a:p>
+            <a:r>
+              <a:rPr lang="en-US" altLang="ko-KR" sz="1600" dirty="0"/>
+              <a:t> - SHM </a:t>
+            </a:r>
+            <a:r>
+              <a:rPr lang="ko-KR" altLang="en-US" sz="1600" dirty="0"/>
+              <a:t>기반 제어</a:t>
+            </a:r>
+            <a:endParaRPr lang="en-US" altLang="ko-KR" sz="1600" dirty="0"/>
+          </a:p>
+          <a:p>
+            <a:br>
+              <a:rPr lang="ko-KR" altLang="en-US" sz="1600" b="1" dirty="0"/>
+            </a:br>
             <a:r>
               <a:rPr lang="en-US" altLang="ko-KR" sz="1600" b="1" dirty="0"/>
-              <a:t>·</a:t>
+              <a:t>3.5 </a:t>
             </a:r>
             <a:r>
               <a:rPr lang="ko-KR" altLang="en-US" sz="1600" b="1" dirty="0"/>
-              <a:t>고주파 성능 검증</a:t>
-            </a:r>
-            <a:endParaRPr lang="en-US" altLang="ko-KR" sz="1600" b="1" dirty="0"/>
+              <a:t>비행 안정성 및 응답 특성 비교</a:t>
+            </a:r>
           </a:p>
           <a:p>
             <a:r>
               <a:rPr lang="en-US" altLang="ko-KR" sz="1600" dirty="0"/>
-              <a:t>- </a:t>
+              <a:t> - IMU </a:t>
             </a:r>
             <a:r>
               <a:rPr lang="ko-KR" altLang="en-US" sz="1600" dirty="0"/>
-              <a:t>센서</a:t>
-            </a:r>
-            <a:r>
-              <a:rPr lang="en-US" altLang="ko-KR" sz="1600" dirty="0"/>
-              <a:t>/</a:t>
+              <a:t>바이어스 등 </a:t>
+            </a:r>
+            <a:r>
+              <a:rPr lang="ko-KR" altLang="en-US" sz="1600" dirty="0" err="1"/>
+              <a:t>외란</a:t>
             </a:r>
             <a:r>
               <a:rPr lang="ko-KR" altLang="en-US" sz="1600" dirty="0"/>
-              <a:t>제어 루프의 </a:t>
+              <a:t> 주입 시 </a:t>
             </a:r>
             <a:r>
               <a:rPr lang="ko-KR" altLang="en-US" sz="1600" b="1" dirty="0"/>
-              <a:t>시간 정확도</a:t>
-            </a:r>
-            <a:r>
-              <a:rPr lang="en-US" altLang="ko-KR" sz="1600" b="1" dirty="0"/>
-              <a:t>(Time Determinism) </a:t>
-            </a:r>
-            <a:r>
-              <a:rPr lang="ko-KR" altLang="en-US" sz="1600" b="1" dirty="0"/>
-              <a:t>측정</a:t>
-            </a:r>
-            <a:endParaRPr lang="en-US" altLang="ko-KR" sz="1600" b="1" dirty="0"/>
-          </a:p>
-          <a:p>
-            <a:r>
-              <a:rPr lang="en-US" altLang="ko-KR" sz="1600" b="1" dirty="0"/>
-              <a:t>- </a:t>
-            </a:r>
-            <a:r>
-              <a:rPr lang="ko-KR" altLang="en-US" sz="1600" b="1" dirty="0"/>
-              <a:t>지연</a:t>
-            </a:r>
-            <a:r>
-              <a:rPr lang="en-US" altLang="ko-KR" sz="1600" b="1" dirty="0"/>
-              <a:t>·</a:t>
-            </a:r>
-            <a:r>
-              <a:rPr lang="ko-KR" altLang="en-US" sz="1600" b="1" dirty="0" err="1"/>
-              <a:t>지터</a:t>
-            </a:r>
-            <a:r>
-              <a:rPr lang="ko-KR" altLang="en-US" sz="1600" b="1" dirty="0"/>
-              <a:t> 분석</a:t>
-            </a:r>
-            <a:r>
-              <a:rPr lang="ko-KR" altLang="en-US" sz="1600" dirty="0"/>
-              <a:t>을 통한 기존 시뮬레이터 대비 성능 비교</a:t>
-            </a:r>
-            <a:endParaRPr lang="en-US" altLang="ko-KR" sz="1600" dirty="0"/>
-          </a:p>
-          <a:p>
-            <a:endParaRPr lang="en-US" altLang="ko-KR" sz="1600" dirty="0"/>
-          </a:p>
-          <a:p>
-            <a:r>
-              <a:rPr lang="en-US" altLang="ko-KR" sz="1600" dirty="0"/>
-              <a:t>3.5 </a:t>
-            </a:r>
-            <a:r>
-              <a:rPr lang="ko-KR" altLang="en-US" sz="1600" b="1" dirty="0"/>
-              <a:t>비행 시나리오 기반 비행 안정성</a:t>
-            </a:r>
-            <a:r>
-              <a:rPr lang="en-US" altLang="ko-KR" sz="1600" b="1" dirty="0"/>
-              <a:t>(Flight Dynamics) </a:t>
-            </a:r>
-            <a:r>
-              <a:rPr lang="ko-KR" altLang="en-US" sz="1600" b="1" dirty="0"/>
-              <a:t>검증</a:t>
-            </a:r>
-            <a:br>
-              <a:rPr lang="ko-KR" altLang="en-US" sz="1600" dirty="0"/>
-            </a:br>
-            <a:r>
-              <a:rPr lang="en-US" altLang="ko-KR" sz="1600" dirty="0"/>
-              <a:t>– </a:t>
-            </a:r>
-            <a:r>
-              <a:rPr lang="ko-KR" altLang="en-US" sz="1600" dirty="0"/>
-              <a:t>호버링</a:t>
-            </a:r>
-            <a:r>
-              <a:rPr lang="en-US" altLang="ko-KR" sz="1600" dirty="0"/>
-              <a:t>, </a:t>
-            </a:r>
-            <a:r>
-              <a:rPr lang="ko-KR" altLang="en-US" sz="1600" dirty="0"/>
-              <a:t>스텝 응답</a:t>
-            </a:r>
-            <a:r>
-              <a:rPr lang="en-US" altLang="ko-KR" sz="1600" dirty="0"/>
-              <a:t>, yaw </a:t>
-            </a:r>
-            <a:r>
-              <a:rPr lang="ko-KR" altLang="en-US" sz="1600" dirty="0" err="1"/>
-              <a:t>스윕</a:t>
-            </a:r>
-            <a:r>
-              <a:rPr lang="ko-KR" altLang="en-US" sz="1600" dirty="0"/>
-              <a:t> 등 단순 시나리오를 통한 제안 구조의 비행 가능성 검증</a:t>
-            </a:r>
-            <a:endParaRPr lang="en-US" altLang="ko-KR" sz="1600" dirty="0"/>
+              <a:t>제어 성능 변화 비교</a:t>
+            </a:r>
+            <a:endParaRPr lang="ko-KR" altLang="en-US" sz="1600" dirty="0"/>
           </a:p>
         </p:txBody>
       </p:sp>
@@ -8243,6 +9895,261 @@
     <p:extLst>
       <p:ext uri="{BB962C8B-B14F-4D97-AF65-F5344CB8AC3E}">
         <p14:creationId xmlns:p14="http://schemas.microsoft.com/office/powerpoint/2010/main" val="410924809"/>
+      </p:ext>
+    </p:extLst>
+  </p:cSld>
+  <p:clrMapOvr>
+    <a:masterClrMapping/>
+  </p:clrMapOvr>
+</p:sld>
+</file>
+
+<file path=ppt/slides/slide9.xml><?xml version="1.0" encoding="utf-8"?>
+<p:sld xmlns:a="http://schemas.openxmlformats.org/drawingml/2006/main" xmlns:r="http://schemas.openxmlformats.org/officeDocument/2006/relationships" xmlns:p="http://schemas.openxmlformats.org/presentationml/2006/main">
+  <p:cSld>
+    <p:spTree>
+      <p:nvGrpSpPr>
+        <p:cNvPr id="1" name=""/>
+        <p:cNvGrpSpPr/>
+        <p:nvPr/>
+      </p:nvGrpSpPr>
+      <p:grpSpPr>
+        <a:xfrm>
+          <a:off x="0" y="0"/>
+          <a:ext cx="0" cy="0"/>
+          <a:chOff x="0" y="0"/>
+          <a:chExt cx="0" cy="0"/>
+        </a:xfrm>
+      </p:grpSpPr>
+      <p:sp>
+        <p:nvSpPr>
+          <p:cNvPr id="4" name="TextBox 3">
+            <a:extLst>
+              <a:ext uri="{FF2B5EF4-FFF2-40B4-BE49-F238E27FC236}">
+                <a16:creationId xmlns:a16="http://schemas.microsoft.com/office/drawing/2014/main" id="{87B5DBBD-EC60-C356-9910-97AC344701CB}"/>
+              </a:ext>
+            </a:extLst>
+          </p:cNvPr>
+          <p:cNvSpPr txBox="1"/>
+          <p:nvPr/>
+        </p:nvSpPr>
+        <p:spPr>
+          <a:xfrm>
+            <a:off x="406871" y="173267"/>
+            <a:ext cx="11077104" cy="369332"/>
+          </a:xfrm>
+          <a:prstGeom prst="rect">
+            <a:avLst/>
+          </a:prstGeom>
+          <a:noFill/>
+        </p:spPr>
+        <p:txBody>
+          <a:bodyPr wrap="square" rtlCol="0">
+            <a:spAutoFit/>
+          </a:bodyPr>
+          <a:lstStyle/>
+          <a:p>
+            <a:r>
+              <a:rPr lang="en-US" altLang="ko-KR" b="1" dirty="0">
+                <a:latin typeface="+mj-lt"/>
+              </a:rPr>
+              <a:t>4. </a:t>
+            </a:r>
+            <a:r>
+              <a:rPr lang="ko-KR" altLang="en-US" b="1" dirty="0">
+                <a:latin typeface="+mj-lt"/>
+              </a:rPr>
+              <a:t>시뮬레이터 설계 </a:t>
+            </a:r>
+            <a:r>
+              <a:rPr lang="en-US" altLang="ko-KR" b="1" dirty="0">
+                <a:latin typeface="+mj-lt"/>
+              </a:rPr>
+              <a:t>– </a:t>
+            </a:r>
+            <a:r>
+              <a:rPr lang="ko-KR" altLang="en-US" b="1" dirty="0">
+                <a:latin typeface="+mj-lt"/>
+              </a:rPr>
+              <a:t>기존 </a:t>
+            </a:r>
+            <a:r>
+              <a:rPr lang="en-US" altLang="ko-KR" b="1" dirty="0">
+                <a:latin typeface="+mj-lt"/>
+              </a:rPr>
+              <a:t>RPC </a:t>
+            </a:r>
+            <a:r>
+              <a:rPr lang="ko-KR" altLang="en-US" b="1" dirty="0">
+                <a:latin typeface="+mj-lt"/>
+              </a:rPr>
+              <a:t>방식 성능 실험</a:t>
+            </a:r>
+          </a:p>
+        </p:txBody>
+      </p:sp>
+      <p:sp>
+        <p:nvSpPr>
+          <p:cNvPr id="5" name="TextBox 4">
+            <a:extLst>
+              <a:ext uri="{FF2B5EF4-FFF2-40B4-BE49-F238E27FC236}">
+                <a16:creationId xmlns:a16="http://schemas.microsoft.com/office/drawing/2014/main" id="{916B54A5-AF30-C348-0220-7C50418AA7E2}"/>
+              </a:ext>
+            </a:extLst>
+          </p:cNvPr>
+          <p:cNvSpPr txBox="1"/>
+          <p:nvPr/>
+        </p:nvSpPr>
+        <p:spPr>
+          <a:xfrm>
+            <a:off x="406870" y="696286"/>
+            <a:ext cx="11547441" cy="1569660"/>
+          </a:xfrm>
+          <a:prstGeom prst="rect">
+            <a:avLst/>
+          </a:prstGeom>
+          <a:noFill/>
+        </p:spPr>
+        <p:txBody>
+          <a:bodyPr wrap="square" rtlCol="0">
+            <a:spAutoFit/>
+          </a:bodyPr>
+          <a:lstStyle/>
+          <a:p>
+            <a:r>
+              <a:rPr lang="en-US" altLang="ko-KR" sz="1400" b="1" dirty="0"/>
+              <a:t>4.1 </a:t>
+            </a:r>
+            <a:r>
+              <a:rPr lang="ko-KR" altLang="en-US" sz="1400" b="1" dirty="0"/>
+              <a:t>실험 목적</a:t>
+            </a:r>
+          </a:p>
+          <a:p>
+            <a:r>
+              <a:rPr lang="ko-KR" altLang="en-US" sz="1600" dirty="0"/>
+              <a:t>기존 </a:t>
+            </a:r>
+            <a:r>
+              <a:rPr lang="ko-KR" altLang="en-US" sz="1600" dirty="0" err="1"/>
+              <a:t>드론</a:t>
+            </a:r>
+            <a:r>
+              <a:rPr lang="ko-KR" altLang="en-US" sz="1600" dirty="0"/>
+              <a:t> 시뮬레이터</a:t>
+            </a:r>
+            <a:r>
+              <a:rPr lang="en-US" altLang="ko-KR" sz="1600" dirty="0"/>
+              <a:t>(</a:t>
+            </a:r>
+            <a:r>
+              <a:rPr lang="en-US" altLang="ko-KR" sz="1600" dirty="0" err="1"/>
+              <a:t>AirSim</a:t>
+            </a:r>
+            <a:r>
+              <a:rPr lang="en-US" altLang="ko-KR" sz="1600" dirty="0"/>
+              <a:t>)</a:t>
+            </a:r>
+            <a:r>
+              <a:rPr lang="ko-KR" altLang="en-US" sz="1600" dirty="0"/>
+              <a:t>의 </a:t>
+            </a:r>
+            <a:r>
+              <a:rPr lang="en-US" altLang="ko-KR" sz="1600" b="1" dirty="0"/>
+              <a:t>RPC </a:t>
+            </a:r>
+            <a:r>
+              <a:rPr lang="ko-KR" altLang="en-US" sz="1600" b="1" dirty="0"/>
+              <a:t>기반 </a:t>
+            </a:r>
+            <a:r>
+              <a:rPr lang="en-US" altLang="ko-KR" sz="1600" b="1" dirty="0"/>
+              <a:t>IMU </a:t>
+            </a:r>
+            <a:r>
+              <a:rPr lang="ko-KR" altLang="en-US" sz="1600" b="1" dirty="0"/>
+              <a:t>데이터 수집 구조가</a:t>
+            </a:r>
+            <a:endParaRPr lang="ko-KR" altLang="en-US" sz="1600" dirty="0"/>
+          </a:p>
+          <a:p>
+            <a:pPr lvl="1"/>
+            <a:r>
+              <a:rPr lang="ko-KR" altLang="en-US" sz="1600" dirty="0"/>
+              <a:t>고주파</a:t>
+            </a:r>
+            <a:r>
+              <a:rPr lang="en-US" altLang="ko-KR" sz="1600" dirty="0"/>
+              <a:t>(≥1 kHz) </a:t>
+            </a:r>
+            <a:r>
+              <a:rPr lang="ko-KR" altLang="en-US" sz="1600" dirty="0"/>
+              <a:t>센서 루프에 적합한지</a:t>
+            </a:r>
+          </a:p>
+          <a:p>
+            <a:pPr lvl="1"/>
+            <a:r>
+              <a:rPr lang="ko-KR" altLang="en-US" sz="1600" dirty="0"/>
+              <a:t>지연</a:t>
+            </a:r>
+            <a:r>
+              <a:rPr lang="en-US" altLang="ko-KR" sz="1600" dirty="0"/>
+              <a:t>(latency) </a:t>
+            </a:r>
+            <a:r>
+              <a:rPr lang="ko-KR" altLang="en-US" sz="1600" dirty="0"/>
+              <a:t>및 </a:t>
+            </a:r>
+            <a:r>
+              <a:rPr lang="ko-KR" altLang="en-US" sz="1600" dirty="0" err="1"/>
+              <a:t>지터</a:t>
+            </a:r>
+            <a:r>
+              <a:rPr lang="en-US" altLang="ko-KR" sz="1600" dirty="0"/>
+              <a:t>(jitter) </a:t>
+            </a:r>
+            <a:r>
+              <a:rPr lang="ko-KR" altLang="en-US" sz="1600" dirty="0"/>
+              <a:t>특성이 </a:t>
+            </a:r>
+            <a:r>
+              <a:rPr lang="ko-KR" altLang="en-US" sz="1600" dirty="0" err="1"/>
+              <a:t>어떠한지</a:t>
+            </a:r>
+            <a:endParaRPr lang="ko-KR" altLang="en-US" sz="1600" dirty="0"/>
+          </a:p>
+          <a:p>
+            <a:r>
+              <a:rPr lang="ko-KR" altLang="en-US" sz="1600" dirty="0"/>
+              <a:t>이후 제안하는 </a:t>
+            </a:r>
+            <a:r>
+              <a:rPr lang="en-US" altLang="ko-KR" sz="1600" b="1" dirty="0"/>
+              <a:t>SHM </a:t>
+            </a:r>
+            <a:r>
+              <a:rPr lang="ko-KR" altLang="en-US" sz="1600" b="1" dirty="0"/>
+              <a:t>기반 구조와의 비교 기준</a:t>
+            </a:r>
+            <a:r>
+              <a:rPr lang="en-US" altLang="ko-KR" sz="1600" b="1" dirty="0"/>
+              <a:t>(baseline)</a:t>
+            </a:r>
+            <a:r>
+              <a:rPr lang="ko-KR" altLang="en-US" sz="1600" dirty="0"/>
+              <a:t> 확보</a:t>
+            </a:r>
+          </a:p>
+          <a:p>
+            <a:endParaRPr lang="ko-KR" altLang="en-US" dirty="0"/>
+          </a:p>
+        </p:txBody>
+      </p:sp>
+    </p:spTree>
+    <p:extLst>
+      <p:ext uri="{BB962C8B-B14F-4D97-AF65-F5344CB8AC3E}">
+        <p14:creationId xmlns:p14="http://schemas.microsoft.com/office/powerpoint/2010/main" val="3085466784"/>
       </p:ext>
     </p:extLst>
   </p:cSld>

--- a/x_memory/docs2/논문연구I-발표자료.pptx
+++ b/x_memory/docs2/논문연구I-발표자료.pptx
@@ -5,7 +5,7 @@
     <p:sldMasterId id="2147483648" r:id="rId1"/>
   </p:sldMasterIdLst>
   <p:notesMasterIdLst>
-    <p:notesMasterId r:id="rId11"/>
+    <p:notesMasterId r:id="rId13"/>
   </p:notesMasterIdLst>
   <p:sldIdLst>
     <p:sldId id="259" r:id="rId2"/>
@@ -17,6 +17,8 @@
     <p:sldId id="258" r:id="rId8"/>
     <p:sldId id="261" r:id="rId9"/>
     <p:sldId id="264" r:id="rId10"/>
+    <p:sldId id="265" r:id="rId11"/>
+    <p:sldId id="266" r:id="rId12"/>
   </p:sldIdLst>
   <p:sldSz cx="12192000" cy="6858000"/>
   <p:notesSz cx="6858000" cy="9144000"/>
@@ -205,7 +207,7 @@
           <a:p>
             <a:fld id="{1FB9BF83-B5BE-4DD4-A332-58395F2573B7}" type="datetimeFigureOut">
               <a:rPr lang="ko-KR" altLang="en-US" smtClean="0"/>
-              <a:t>2025-12-14</a:t>
+              <a:t>2025-12-15</a:t>
             </a:fld>
             <a:endParaRPr lang="ko-KR" altLang="en-US"/>
           </a:p>
@@ -580,6 +582,114 @@
 </p:notes>
 </file>
 
+<file path=ppt/notesSlides/notesSlide10.xml><?xml version="1.0" encoding="utf-8"?>
+<p:notes xmlns:a="http://schemas.openxmlformats.org/drawingml/2006/main" xmlns:r="http://schemas.openxmlformats.org/officeDocument/2006/relationships" xmlns:p="http://schemas.openxmlformats.org/presentationml/2006/main">
+  <p:cSld>
+    <p:spTree>
+      <p:nvGrpSpPr>
+        <p:cNvPr id="1" name="">
+          <a:extLst>
+            <a:ext uri="{FF2B5EF4-FFF2-40B4-BE49-F238E27FC236}">
+              <a16:creationId xmlns:a16="http://schemas.microsoft.com/office/drawing/2014/main" id="{C37C9B54-B724-A905-32F4-12D2C31A924A}"/>
+            </a:ext>
+          </a:extLst>
+        </p:cNvPr>
+        <p:cNvGrpSpPr/>
+        <p:nvPr/>
+      </p:nvGrpSpPr>
+      <p:grpSpPr>
+        <a:xfrm>
+          <a:off x="0" y="0"/>
+          <a:ext cx="0" cy="0"/>
+          <a:chOff x="0" y="0"/>
+          <a:chExt cx="0" cy="0"/>
+        </a:xfrm>
+      </p:grpSpPr>
+      <p:sp>
+        <p:nvSpPr>
+          <p:cNvPr id="2" name="슬라이드 이미지 개체 틀 1">
+            <a:extLst>
+              <a:ext uri="{FF2B5EF4-FFF2-40B4-BE49-F238E27FC236}">
+                <a16:creationId xmlns:a16="http://schemas.microsoft.com/office/drawing/2014/main" id="{C829D45E-B09D-1C98-2A0D-884CF8C0284B}"/>
+              </a:ext>
+            </a:extLst>
+          </p:cNvPr>
+          <p:cNvSpPr>
+            <a:spLocks noGrp="1" noRot="1" noChangeAspect="1"/>
+          </p:cNvSpPr>
+          <p:nvPr>
+            <p:ph type="sldImg"/>
+          </p:nvPr>
+        </p:nvSpPr>
+        <p:spPr/>
+      </p:sp>
+      <p:sp>
+        <p:nvSpPr>
+          <p:cNvPr id="3" name="슬라이드 노트 개체 틀 2">
+            <a:extLst>
+              <a:ext uri="{FF2B5EF4-FFF2-40B4-BE49-F238E27FC236}">
+                <a16:creationId xmlns:a16="http://schemas.microsoft.com/office/drawing/2014/main" id="{025CEA20-973E-4A6B-EA66-67CC591ADC8F}"/>
+              </a:ext>
+            </a:extLst>
+          </p:cNvPr>
+          <p:cNvSpPr>
+            <a:spLocks noGrp="1"/>
+          </p:cNvSpPr>
+          <p:nvPr>
+            <p:ph type="body" idx="1"/>
+          </p:nvPr>
+        </p:nvSpPr>
+        <p:spPr/>
+        <p:txBody>
+          <a:bodyPr/>
+          <a:lstStyle/>
+          <a:p>
+            <a:endParaRPr lang="ko-KR" altLang="en-US" dirty="0"/>
+          </a:p>
+        </p:txBody>
+      </p:sp>
+      <p:sp>
+        <p:nvSpPr>
+          <p:cNvPr id="4" name="슬라이드 번호 개체 틀 3">
+            <a:extLst>
+              <a:ext uri="{FF2B5EF4-FFF2-40B4-BE49-F238E27FC236}">
+                <a16:creationId xmlns:a16="http://schemas.microsoft.com/office/drawing/2014/main" id="{5B420E1D-C4D9-A11C-AD0D-5A7E70352D1A}"/>
+              </a:ext>
+            </a:extLst>
+          </p:cNvPr>
+          <p:cNvSpPr>
+            <a:spLocks noGrp="1"/>
+          </p:cNvSpPr>
+          <p:nvPr>
+            <p:ph type="sldNum" sz="quarter" idx="5"/>
+          </p:nvPr>
+        </p:nvSpPr>
+        <p:spPr/>
+        <p:txBody>
+          <a:bodyPr/>
+          <a:lstStyle/>
+          <a:p>
+            <a:fld id="{0098AE32-E7AE-48A5-9392-CCB4D2CF538A}" type="slidenum">
+              <a:rPr lang="ko-KR" altLang="en-US" smtClean="0"/>
+              <a:t>11</a:t>
+            </a:fld>
+            <a:endParaRPr lang="ko-KR" altLang="en-US"/>
+          </a:p>
+        </p:txBody>
+      </p:sp>
+    </p:spTree>
+    <p:extLst>
+      <p:ext uri="{BB962C8B-B14F-4D97-AF65-F5344CB8AC3E}">
+        <p14:creationId xmlns:p14="http://schemas.microsoft.com/office/powerpoint/2010/main" val="3378559727"/>
+      </p:ext>
+    </p:extLst>
+  </p:cSld>
+  <p:clrMapOvr>
+    <a:masterClrMapping/>
+  </p:clrMapOvr>
+</p:notes>
+</file>
+
 <file path=ppt/notesSlides/notesSlide2.xml><?xml version="1.0" encoding="utf-8"?>
 <p:notes xmlns:a="http://schemas.openxmlformats.org/drawingml/2006/main" xmlns:r="http://schemas.openxmlformats.org/officeDocument/2006/relationships" xmlns:p="http://schemas.openxmlformats.org/presentationml/2006/main">
   <p:cSld>
@@ -2499,6 +2609,114 @@
     <p:extLst>
       <p:ext uri="{BB962C8B-B14F-4D97-AF65-F5344CB8AC3E}">
         <p14:creationId xmlns:p14="http://schemas.microsoft.com/office/powerpoint/2010/main" val="817678727"/>
+      </p:ext>
+    </p:extLst>
+  </p:cSld>
+  <p:clrMapOvr>
+    <a:masterClrMapping/>
+  </p:clrMapOvr>
+</p:notes>
+</file>
+
+<file path=ppt/notesSlides/notesSlide9.xml><?xml version="1.0" encoding="utf-8"?>
+<p:notes xmlns:a="http://schemas.openxmlformats.org/drawingml/2006/main" xmlns:r="http://schemas.openxmlformats.org/officeDocument/2006/relationships" xmlns:p="http://schemas.openxmlformats.org/presentationml/2006/main">
+  <p:cSld>
+    <p:spTree>
+      <p:nvGrpSpPr>
+        <p:cNvPr id="1" name="">
+          <a:extLst>
+            <a:ext uri="{FF2B5EF4-FFF2-40B4-BE49-F238E27FC236}">
+              <a16:creationId xmlns:a16="http://schemas.microsoft.com/office/drawing/2014/main" id="{20E23D2D-4567-45D2-0E90-50D68335BA9E}"/>
+            </a:ext>
+          </a:extLst>
+        </p:cNvPr>
+        <p:cNvGrpSpPr/>
+        <p:nvPr/>
+      </p:nvGrpSpPr>
+      <p:grpSpPr>
+        <a:xfrm>
+          <a:off x="0" y="0"/>
+          <a:ext cx="0" cy="0"/>
+          <a:chOff x="0" y="0"/>
+          <a:chExt cx="0" cy="0"/>
+        </a:xfrm>
+      </p:grpSpPr>
+      <p:sp>
+        <p:nvSpPr>
+          <p:cNvPr id="2" name="슬라이드 이미지 개체 틀 1">
+            <a:extLst>
+              <a:ext uri="{FF2B5EF4-FFF2-40B4-BE49-F238E27FC236}">
+                <a16:creationId xmlns:a16="http://schemas.microsoft.com/office/drawing/2014/main" id="{088768AB-4DCC-1620-1809-004977B749A2}"/>
+              </a:ext>
+            </a:extLst>
+          </p:cNvPr>
+          <p:cNvSpPr>
+            <a:spLocks noGrp="1" noRot="1" noChangeAspect="1"/>
+          </p:cNvSpPr>
+          <p:nvPr>
+            <p:ph type="sldImg"/>
+          </p:nvPr>
+        </p:nvSpPr>
+        <p:spPr/>
+      </p:sp>
+      <p:sp>
+        <p:nvSpPr>
+          <p:cNvPr id="3" name="슬라이드 노트 개체 틀 2">
+            <a:extLst>
+              <a:ext uri="{FF2B5EF4-FFF2-40B4-BE49-F238E27FC236}">
+                <a16:creationId xmlns:a16="http://schemas.microsoft.com/office/drawing/2014/main" id="{C382AE34-65F2-1709-DEFD-E408F5079A66}"/>
+              </a:ext>
+            </a:extLst>
+          </p:cNvPr>
+          <p:cNvSpPr>
+            <a:spLocks noGrp="1"/>
+          </p:cNvSpPr>
+          <p:nvPr>
+            <p:ph type="body" idx="1"/>
+          </p:nvPr>
+        </p:nvSpPr>
+        <p:spPr/>
+        <p:txBody>
+          <a:bodyPr/>
+          <a:lstStyle/>
+          <a:p>
+            <a:endParaRPr lang="ko-KR" altLang="en-US" dirty="0"/>
+          </a:p>
+        </p:txBody>
+      </p:sp>
+      <p:sp>
+        <p:nvSpPr>
+          <p:cNvPr id="4" name="슬라이드 번호 개체 틀 3">
+            <a:extLst>
+              <a:ext uri="{FF2B5EF4-FFF2-40B4-BE49-F238E27FC236}">
+                <a16:creationId xmlns:a16="http://schemas.microsoft.com/office/drawing/2014/main" id="{91C5DA1D-ECAB-88CE-8923-F19EBB542B10}"/>
+              </a:ext>
+            </a:extLst>
+          </p:cNvPr>
+          <p:cNvSpPr>
+            <a:spLocks noGrp="1"/>
+          </p:cNvSpPr>
+          <p:nvPr>
+            <p:ph type="sldNum" sz="quarter" idx="5"/>
+          </p:nvPr>
+        </p:nvSpPr>
+        <p:spPr/>
+        <p:txBody>
+          <a:bodyPr/>
+          <a:lstStyle/>
+          <a:p>
+            <a:fld id="{0098AE32-E7AE-48A5-9392-CCB4D2CF538A}" type="slidenum">
+              <a:rPr lang="ko-KR" altLang="en-US" smtClean="0"/>
+              <a:t>10</a:t>
+            </a:fld>
+            <a:endParaRPr lang="ko-KR" altLang="en-US"/>
+          </a:p>
+        </p:txBody>
+      </p:sp>
+    </p:spTree>
+    <p:extLst>
+      <p:ext uri="{BB962C8B-B14F-4D97-AF65-F5344CB8AC3E}">
+        <p14:creationId xmlns:p14="http://schemas.microsoft.com/office/powerpoint/2010/main" val="1219964238"/>
       </p:ext>
     </p:extLst>
   </p:cSld>
@@ -2655,7 +2873,7 @@
           <a:p>
             <a:fld id="{36209A1A-9265-4240-B6C3-FDC5AC5FF33D}" type="datetimeFigureOut">
               <a:rPr lang="ko-KR" altLang="en-US" smtClean="0"/>
-              <a:t>2025-12-14</a:t>
+              <a:t>2025-12-15</a:t>
             </a:fld>
             <a:endParaRPr lang="ko-KR" altLang="en-US"/>
           </a:p>
@@ -2853,7 +3071,7 @@
           <a:p>
             <a:fld id="{36209A1A-9265-4240-B6C3-FDC5AC5FF33D}" type="datetimeFigureOut">
               <a:rPr lang="ko-KR" altLang="en-US" smtClean="0"/>
-              <a:t>2025-12-14</a:t>
+              <a:t>2025-12-15</a:t>
             </a:fld>
             <a:endParaRPr lang="ko-KR" altLang="en-US"/>
           </a:p>
@@ -3061,7 +3279,7 @@
           <a:p>
             <a:fld id="{36209A1A-9265-4240-B6C3-FDC5AC5FF33D}" type="datetimeFigureOut">
               <a:rPr lang="ko-KR" altLang="en-US" smtClean="0"/>
-              <a:t>2025-12-14</a:t>
+              <a:t>2025-12-15</a:t>
             </a:fld>
             <a:endParaRPr lang="ko-KR" altLang="en-US"/>
           </a:p>
@@ -3259,7 +3477,7 @@
           <a:p>
             <a:fld id="{36209A1A-9265-4240-B6C3-FDC5AC5FF33D}" type="datetimeFigureOut">
               <a:rPr lang="ko-KR" altLang="en-US" smtClean="0"/>
-              <a:t>2025-12-14</a:t>
+              <a:t>2025-12-15</a:t>
             </a:fld>
             <a:endParaRPr lang="ko-KR" altLang="en-US"/>
           </a:p>
@@ -3534,7 +3752,7 @@
           <a:p>
             <a:fld id="{36209A1A-9265-4240-B6C3-FDC5AC5FF33D}" type="datetimeFigureOut">
               <a:rPr lang="ko-KR" altLang="en-US" smtClean="0"/>
-              <a:t>2025-12-14</a:t>
+              <a:t>2025-12-15</a:t>
             </a:fld>
             <a:endParaRPr lang="ko-KR" altLang="en-US"/>
           </a:p>
@@ -3799,7 +4017,7 @@
           <a:p>
             <a:fld id="{36209A1A-9265-4240-B6C3-FDC5AC5FF33D}" type="datetimeFigureOut">
               <a:rPr lang="ko-KR" altLang="en-US" smtClean="0"/>
-              <a:t>2025-12-14</a:t>
+              <a:t>2025-12-15</a:t>
             </a:fld>
             <a:endParaRPr lang="ko-KR" altLang="en-US"/>
           </a:p>
@@ -4211,7 +4429,7 @@
           <a:p>
             <a:fld id="{36209A1A-9265-4240-B6C3-FDC5AC5FF33D}" type="datetimeFigureOut">
               <a:rPr lang="ko-KR" altLang="en-US" smtClean="0"/>
-              <a:t>2025-12-14</a:t>
+              <a:t>2025-12-15</a:t>
             </a:fld>
             <a:endParaRPr lang="ko-KR" altLang="en-US"/>
           </a:p>
@@ -4352,7 +4570,7 @@
           <a:p>
             <a:fld id="{36209A1A-9265-4240-B6C3-FDC5AC5FF33D}" type="datetimeFigureOut">
               <a:rPr lang="ko-KR" altLang="en-US" smtClean="0"/>
-              <a:t>2025-12-14</a:t>
+              <a:t>2025-12-15</a:t>
             </a:fld>
             <a:endParaRPr lang="ko-KR" altLang="en-US"/>
           </a:p>
@@ -4465,7 +4683,7 @@
           <a:p>
             <a:fld id="{36209A1A-9265-4240-B6C3-FDC5AC5FF33D}" type="datetimeFigureOut">
               <a:rPr lang="ko-KR" altLang="en-US" smtClean="0"/>
-              <a:t>2025-12-14</a:t>
+              <a:t>2025-12-15</a:t>
             </a:fld>
             <a:endParaRPr lang="ko-KR" altLang="en-US"/>
           </a:p>
@@ -4776,7 +4994,7 @@
           <a:p>
             <a:fld id="{36209A1A-9265-4240-B6C3-FDC5AC5FF33D}" type="datetimeFigureOut">
               <a:rPr lang="ko-KR" altLang="en-US" smtClean="0"/>
-              <a:t>2025-12-14</a:t>
+              <a:t>2025-12-15</a:t>
             </a:fld>
             <a:endParaRPr lang="ko-KR" altLang="en-US"/>
           </a:p>
@@ -5064,7 +5282,7 @@
           <a:p>
             <a:fld id="{36209A1A-9265-4240-B6C3-FDC5AC5FF33D}" type="datetimeFigureOut">
               <a:rPr lang="ko-KR" altLang="en-US" smtClean="0"/>
-              <a:t>2025-12-14</a:t>
+              <a:t>2025-12-15</a:t>
             </a:fld>
             <a:endParaRPr lang="ko-KR" altLang="en-US"/>
           </a:p>
@@ -5305,7 +5523,7 @@
           <a:p>
             <a:fld id="{36209A1A-9265-4240-B6C3-FDC5AC5FF33D}" type="datetimeFigureOut">
               <a:rPr lang="ko-KR" altLang="en-US" smtClean="0"/>
-              <a:t>2025-12-14</a:t>
+              <a:t>2025-12-15</a:t>
             </a:fld>
             <a:endParaRPr lang="ko-KR" altLang="en-US"/>
           </a:p>
@@ -5824,6 +6042,2033 @@
     <p:extLst>
       <p:ext uri="{BB962C8B-B14F-4D97-AF65-F5344CB8AC3E}">
         <p14:creationId xmlns:p14="http://schemas.microsoft.com/office/powerpoint/2010/main" val="2224488682"/>
+      </p:ext>
+    </p:extLst>
+  </p:cSld>
+  <p:clrMapOvr>
+    <a:masterClrMapping/>
+  </p:clrMapOvr>
+</p:sld>
+</file>
+
+<file path=ppt/slides/slide10.xml><?xml version="1.0" encoding="utf-8"?>
+<p:sld xmlns:a="http://schemas.openxmlformats.org/drawingml/2006/main" xmlns:r="http://schemas.openxmlformats.org/officeDocument/2006/relationships" xmlns:p="http://schemas.openxmlformats.org/presentationml/2006/main">
+  <p:cSld>
+    <p:spTree>
+      <p:nvGrpSpPr>
+        <p:cNvPr id="1" name="">
+          <a:extLst>
+            <a:ext uri="{FF2B5EF4-FFF2-40B4-BE49-F238E27FC236}">
+              <a16:creationId xmlns:a16="http://schemas.microsoft.com/office/drawing/2014/main" id="{3D7633F6-779D-6534-9B44-0163D687D2C0}"/>
+            </a:ext>
+          </a:extLst>
+        </p:cNvPr>
+        <p:cNvGrpSpPr/>
+        <p:nvPr/>
+      </p:nvGrpSpPr>
+      <p:grpSpPr>
+        <a:xfrm>
+          <a:off x="0" y="0"/>
+          <a:ext cx="0" cy="0"/>
+          <a:chOff x="0" y="0"/>
+          <a:chExt cx="0" cy="0"/>
+        </a:xfrm>
+      </p:grpSpPr>
+      <p:sp>
+        <p:nvSpPr>
+          <p:cNvPr id="67" name="사각형: 둥근 모서리 66">
+            <a:extLst>
+              <a:ext uri="{FF2B5EF4-FFF2-40B4-BE49-F238E27FC236}">
+                <a16:creationId xmlns:a16="http://schemas.microsoft.com/office/drawing/2014/main" id="{E71FB7AA-CFBE-8BA0-BE37-8FC0937A0322}"/>
+              </a:ext>
+            </a:extLst>
+          </p:cNvPr>
+          <p:cNvSpPr/>
+          <p:nvPr/>
+        </p:nvSpPr>
+        <p:spPr>
+          <a:xfrm>
+            <a:off x="2854295" y="1600863"/>
+            <a:ext cx="9041450" cy="3569343"/>
+          </a:xfrm>
+          <a:prstGeom prst="roundRect">
+            <a:avLst/>
+          </a:prstGeom>
+          <a:solidFill>
+            <a:schemeClr val="tx2">
+              <a:lumMod val="90000"/>
+            </a:schemeClr>
+          </a:solidFill>
+          <a:ln w="38100"/>
+        </p:spPr>
+        <p:style>
+          <a:lnRef idx="2">
+            <a:schemeClr val="accent1">
+              <a:shade val="15000"/>
+            </a:schemeClr>
+          </a:lnRef>
+          <a:fillRef idx="1">
+            <a:schemeClr val="accent1"/>
+          </a:fillRef>
+          <a:effectRef idx="0">
+            <a:schemeClr val="accent1"/>
+          </a:effectRef>
+          <a:fontRef idx="minor">
+            <a:schemeClr val="lt1"/>
+          </a:fontRef>
+        </p:style>
+        <p:txBody>
+          <a:bodyPr rtlCol="0" anchor="ctr"/>
+          <a:lstStyle/>
+          <a:p>
+            <a:pPr algn="ctr"/>
+            <a:r>
+              <a:rPr lang="en-US" altLang="ko-KR" b="1" dirty="0">
+                <a:solidFill>
+                  <a:schemeClr val="bg1"/>
+                </a:solidFill>
+              </a:rPr>
+              <a:t>Abstract layers</a:t>
+            </a:r>
+            <a:endParaRPr lang="en-US" altLang="ko-KR" b="1" dirty="0"/>
+          </a:p>
+          <a:p>
+            <a:pPr algn="ctr"/>
+            <a:endParaRPr lang="en-US" altLang="ko-KR" dirty="0"/>
+          </a:p>
+          <a:p>
+            <a:pPr algn="ctr"/>
+            <a:endParaRPr lang="en-US" altLang="ko-KR" dirty="0"/>
+          </a:p>
+          <a:p>
+            <a:pPr algn="ctr"/>
+            <a:endParaRPr lang="en-US" altLang="ko-KR" dirty="0"/>
+          </a:p>
+          <a:p>
+            <a:pPr algn="ctr"/>
+            <a:endParaRPr lang="en-US" altLang="ko-KR" dirty="0"/>
+          </a:p>
+          <a:p>
+            <a:pPr algn="ctr"/>
+            <a:endParaRPr lang="en-US" altLang="ko-KR" dirty="0"/>
+          </a:p>
+          <a:p>
+            <a:pPr algn="ctr"/>
+            <a:endParaRPr lang="en-US" altLang="ko-KR" dirty="0"/>
+          </a:p>
+          <a:p>
+            <a:pPr algn="ctr"/>
+            <a:endParaRPr lang="en-US" altLang="ko-KR" dirty="0"/>
+          </a:p>
+          <a:p>
+            <a:pPr algn="ctr"/>
+            <a:endParaRPr lang="en-US" altLang="ko-KR" dirty="0"/>
+          </a:p>
+          <a:p>
+            <a:pPr algn="ctr"/>
+            <a:endParaRPr lang="en-US" altLang="ko-KR" dirty="0"/>
+          </a:p>
+          <a:p>
+            <a:pPr algn="ctr"/>
+            <a:endParaRPr lang="en-US" altLang="ko-KR" dirty="0"/>
+          </a:p>
+          <a:p>
+            <a:pPr algn="ctr"/>
+            <a:endParaRPr lang="en-US" altLang="ko-KR" dirty="0"/>
+          </a:p>
+        </p:txBody>
+      </p:sp>
+      <p:sp>
+        <p:nvSpPr>
+          <p:cNvPr id="44" name="사각형: 둥근 모서리 43">
+            <a:extLst>
+              <a:ext uri="{FF2B5EF4-FFF2-40B4-BE49-F238E27FC236}">
+                <a16:creationId xmlns:a16="http://schemas.microsoft.com/office/drawing/2014/main" id="{5DC29660-196D-87EA-CD66-C2097DA1475E}"/>
+              </a:ext>
+            </a:extLst>
+          </p:cNvPr>
+          <p:cNvSpPr/>
+          <p:nvPr/>
+        </p:nvSpPr>
+        <p:spPr>
+          <a:xfrm>
+            <a:off x="3042286" y="2153540"/>
+            <a:ext cx="2469735" cy="2746407"/>
+          </a:xfrm>
+          <a:prstGeom prst="roundRect">
+            <a:avLst/>
+          </a:prstGeom>
+          <a:ln w="38100"/>
+        </p:spPr>
+        <p:style>
+          <a:lnRef idx="2">
+            <a:schemeClr val="accent1">
+              <a:shade val="15000"/>
+            </a:schemeClr>
+          </a:lnRef>
+          <a:fillRef idx="1">
+            <a:schemeClr val="accent1"/>
+          </a:fillRef>
+          <a:effectRef idx="0">
+            <a:schemeClr val="accent1"/>
+          </a:effectRef>
+          <a:fontRef idx="minor">
+            <a:schemeClr val="lt1"/>
+          </a:fontRef>
+        </p:style>
+        <p:txBody>
+          <a:bodyPr rtlCol="0" anchor="ctr"/>
+          <a:lstStyle/>
+          <a:p>
+            <a:pPr algn="ctr"/>
+            <a:r>
+              <a:rPr lang="en-US" altLang="ko-KR" dirty="0"/>
+              <a:t>IMU</a:t>
+            </a:r>
+          </a:p>
+          <a:p>
+            <a:pPr algn="ctr"/>
+            <a:endParaRPr lang="en-US" altLang="ko-KR" dirty="0"/>
+          </a:p>
+          <a:p>
+            <a:pPr algn="ctr"/>
+            <a:endParaRPr lang="en-US" altLang="ko-KR" dirty="0"/>
+          </a:p>
+          <a:p>
+            <a:pPr algn="ctr"/>
+            <a:endParaRPr lang="en-US" altLang="ko-KR" dirty="0"/>
+          </a:p>
+          <a:p>
+            <a:pPr algn="ctr"/>
+            <a:endParaRPr lang="en-US" altLang="ko-KR" dirty="0"/>
+          </a:p>
+          <a:p>
+            <a:pPr algn="ctr"/>
+            <a:endParaRPr lang="en-US" altLang="ko-KR" dirty="0"/>
+          </a:p>
+          <a:p>
+            <a:pPr algn="ctr"/>
+            <a:endParaRPr lang="en-US" altLang="ko-KR" dirty="0"/>
+          </a:p>
+          <a:p>
+            <a:pPr algn="ctr"/>
+            <a:endParaRPr lang="en-US" altLang="ko-KR" dirty="0"/>
+          </a:p>
+          <a:p>
+            <a:pPr algn="ctr"/>
+            <a:endParaRPr lang="ko-KR" altLang="en-US" dirty="0"/>
+          </a:p>
+        </p:txBody>
+      </p:sp>
+      <p:cxnSp>
+        <p:nvCxnSpPr>
+          <p:cNvPr id="99" name="직선 화살표 연결선 98">
+            <a:extLst>
+              <a:ext uri="{FF2B5EF4-FFF2-40B4-BE49-F238E27FC236}">
+                <a16:creationId xmlns:a16="http://schemas.microsoft.com/office/drawing/2014/main" id="{52F5EEF7-551D-7B61-0729-0CA3C3AF14E5}"/>
+              </a:ext>
+            </a:extLst>
+          </p:cNvPr>
+          <p:cNvCxnSpPr>
+            <a:cxnSpLocks/>
+          </p:cNvCxnSpPr>
+          <p:nvPr/>
+        </p:nvCxnSpPr>
+        <p:spPr>
+          <a:xfrm>
+            <a:off x="3848439" y="3037210"/>
+            <a:ext cx="0" cy="1212020"/>
+          </a:xfrm>
+          <a:prstGeom prst="straightConnector1">
+            <a:avLst/>
+          </a:prstGeom>
+          <a:ln w="38100">
+            <a:solidFill>
+              <a:schemeClr val="tx1"/>
+            </a:solidFill>
+            <a:tailEnd type="triangle"/>
+          </a:ln>
+        </p:spPr>
+        <p:style>
+          <a:lnRef idx="1">
+            <a:schemeClr val="accent1"/>
+          </a:lnRef>
+          <a:fillRef idx="0">
+            <a:schemeClr val="accent1"/>
+          </a:fillRef>
+          <a:effectRef idx="0">
+            <a:schemeClr val="accent1"/>
+          </a:effectRef>
+          <a:fontRef idx="minor">
+            <a:schemeClr val="tx1"/>
+          </a:fontRef>
+        </p:style>
+      </p:cxnSp>
+      <p:sp>
+        <p:nvSpPr>
+          <p:cNvPr id="60" name="사각형: 둥근 모서리 59">
+            <a:extLst>
+              <a:ext uri="{FF2B5EF4-FFF2-40B4-BE49-F238E27FC236}">
+                <a16:creationId xmlns:a16="http://schemas.microsoft.com/office/drawing/2014/main" id="{B649003D-95CF-4053-C1D4-BB775C14F2DE}"/>
+              </a:ext>
+            </a:extLst>
+          </p:cNvPr>
+          <p:cNvSpPr/>
+          <p:nvPr/>
+        </p:nvSpPr>
+        <p:spPr>
+          <a:xfrm>
+            <a:off x="9229442" y="2590444"/>
+            <a:ext cx="2469735" cy="2309501"/>
+          </a:xfrm>
+          <a:prstGeom prst="roundRect">
+            <a:avLst/>
+          </a:prstGeom>
+          <a:ln w="38100"/>
+        </p:spPr>
+        <p:style>
+          <a:lnRef idx="2">
+            <a:schemeClr val="accent1">
+              <a:shade val="15000"/>
+            </a:schemeClr>
+          </a:lnRef>
+          <a:fillRef idx="1">
+            <a:schemeClr val="accent1"/>
+          </a:fillRef>
+          <a:effectRef idx="0">
+            <a:schemeClr val="accent1"/>
+          </a:effectRef>
+          <a:fontRef idx="minor">
+            <a:schemeClr val="lt1"/>
+          </a:fontRef>
+        </p:style>
+        <p:txBody>
+          <a:bodyPr rtlCol="0" anchor="ctr"/>
+          <a:lstStyle/>
+          <a:p>
+            <a:pPr algn="ctr"/>
+            <a:r>
+              <a:rPr lang="en-US" altLang="ko-KR" dirty="0"/>
+              <a:t>Attitude</a:t>
+            </a:r>
+          </a:p>
+          <a:p>
+            <a:pPr algn="ctr"/>
+            <a:endParaRPr lang="en-US" altLang="ko-KR" dirty="0"/>
+          </a:p>
+          <a:p>
+            <a:pPr algn="ctr"/>
+            <a:endParaRPr lang="en-US" altLang="ko-KR" dirty="0"/>
+          </a:p>
+          <a:p>
+            <a:pPr algn="ctr"/>
+            <a:endParaRPr lang="en-US" altLang="ko-KR" dirty="0"/>
+          </a:p>
+          <a:p>
+            <a:pPr algn="ctr"/>
+            <a:endParaRPr lang="en-US" altLang="ko-KR" dirty="0"/>
+          </a:p>
+          <a:p>
+            <a:pPr algn="ctr"/>
+            <a:endParaRPr lang="en-US" altLang="ko-KR" dirty="0"/>
+          </a:p>
+          <a:p>
+            <a:pPr algn="ctr"/>
+            <a:endParaRPr lang="ko-KR" altLang="en-US" dirty="0"/>
+          </a:p>
+        </p:txBody>
+      </p:sp>
+      <p:cxnSp>
+        <p:nvCxnSpPr>
+          <p:cNvPr id="88" name="연결선: 꺾임 87">
+            <a:extLst>
+              <a:ext uri="{FF2B5EF4-FFF2-40B4-BE49-F238E27FC236}">
+                <a16:creationId xmlns:a16="http://schemas.microsoft.com/office/drawing/2014/main" id="{F203E6DF-5304-A3DF-0E51-BDBCF508881C}"/>
+              </a:ext>
+            </a:extLst>
+          </p:cNvPr>
+          <p:cNvCxnSpPr>
+            <a:cxnSpLocks/>
+            <a:stCxn id="82" idx="3"/>
+            <a:endCxn id="61" idx="1"/>
+          </p:cNvCxnSpPr>
+          <p:nvPr/>
+        </p:nvCxnSpPr>
+        <p:spPr>
+          <a:xfrm>
+            <a:off x="2234045" y="3930162"/>
+            <a:ext cx="7264589" cy="504037"/>
+          </a:xfrm>
+          <a:prstGeom prst="bentConnector3">
+            <a:avLst>
+              <a:gd name="adj1" fmla="val 4710"/>
+            </a:avLst>
+          </a:prstGeom>
+          <a:ln w="63500">
+            <a:solidFill>
+              <a:srgbClr val="00B050"/>
+            </a:solidFill>
+            <a:tailEnd type="triangle"/>
+          </a:ln>
+        </p:spPr>
+        <p:style>
+          <a:lnRef idx="1">
+            <a:schemeClr val="accent1"/>
+          </a:lnRef>
+          <a:fillRef idx="0">
+            <a:schemeClr val="accent1"/>
+          </a:fillRef>
+          <a:effectRef idx="0">
+            <a:schemeClr val="accent1"/>
+          </a:effectRef>
+          <a:fontRef idx="minor">
+            <a:schemeClr val="tx1"/>
+          </a:fontRef>
+        </p:style>
+      </p:cxnSp>
+      <p:sp>
+        <p:nvSpPr>
+          <p:cNvPr id="25" name="사각형: 둥근 모서리 24">
+            <a:extLst>
+              <a:ext uri="{FF2B5EF4-FFF2-40B4-BE49-F238E27FC236}">
+                <a16:creationId xmlns:a16="http://schemas.microsoft.com/office/drawing/2014/main" id="{5E2CB091-EF89-1C41-A4C4-D8108197BECB}"/>
+              </a:ext>
+            </a:extLst>
+          </p:cNvPr>
+          <p:cNvSpPr/>
+          <p:nvPr/>
+        </p:nvSpPr>
+        <p:spPr>
+          <a:xfrm>
+            <a:off x="6135864" y="2590444"/>
+            <a:ext cx="2469735" cy="2309501"/>
+          </a:xfrm>
+          <a:prstGeom prst="roundRect">
+            <a:avLst/>
+          </a:prstGeom>
+          <a:ln w="38100"/>
+        </p:spPr>
+        <p:style>
+          <a:lnRef idx="2">
+            <a:schemeClr val="accent1">
+              <a:shade val="15000"/>
+            </a:schemeClr>
+          </a:lnRef>
+          <a:fillRef idx="1">
+            <a:schemeClr val="accent1"/>
+          </a:fillRef>
+          <a:effectRef idx="0">
+            <a:schemeClr val="accent1"/>
+          </a:effectRef>
+          <a:fontRef idx="minor">
+            <a:schemeClr val="lt1"/>
+          </a:fontRef>
+        </p:style>
+        <p:txBody>
+          <a:bodyPr rtlCol="0" anchor="ctr"/>
+          <a:lstStyle/>
+          <a:p>
+            <a:pPr algn="ctr"/>
+            <a:r>
+              <a:rPr lang="en-US" altLang="ko-KR" dirty="0"/>
+              <a:t>Drivers</a:t>
+            </a:r>
+          </a:p>
+          <a:p>
+            <a:pPr algn="ctr"/>
+            <a:endParaRPr lang="en-US" altLang="ko-KR" dirty="0"/>
+          </a:p>
+          <a:p>
+            <a:pPr algn="ctr"/>
+            <a:endParaRPr lang="en-US" altLang="ko-KR" dirty="0"/>
+          </a:p>
+          <a:p>
+            <a:pPr algn="ctr"/>
+            <a:endParaRPr lang="en-US" altLang="ko-KR" dirty="0"/>
+          </a:p>
+          <a:p>
+            <a:pPr algn="ctr"/>
+            <a:endParaRPr lang="en-US" altLang="ko-KR" dirty="0"/>
+          </a:p>
+          <a:p>
+            <a:pPr algn="ctr"/>
+            <a:endParaRPr lang="en-US" altLang="ko-KR" dirty="0"/>
+          </a:p>
+          <a:p>
+            <a:pPr algn="ctr"/>
+            <a:endParaRPr lang="ko-KR" altLang="en-US" dirty="0"/>
+          </a:p>
+        </p:txBody>
+      </p:sp>
+      <p:sp>
+        <p:nvSpPr>
+          <p:cNvPr id="47" name="사각형: 둥근 모서리 46">
+            <a:extLst>
+              <a:ext uri="{FF2B5EF4-FFF2-40B4-BE49-F238E27FC236}">
+                <a16:creationId xmlns:a16="http://schemas.microsoft.com/office/drawing/2014/main" id="{64440E42-286C-EFA9-DBFA-EF3F166BE4D9}"/>
+              </a:ext>
+            </a:extLst>
+          </p:cNvPr>
+          <p:cNvSpPr/>
+          <p:nvPr/>
+        </p:nvSpPr>
+        <p:spPr>
+          <a:xfrm>
+            <a:off x="3311478" y="4263285"/>
+            <a:ext cx="1931350" cy="341832"/>
+          </a:xfrm>
+          <a:prstGeom prst="roundRect">
+            <a:avLst/>
+          </a:prstGeom>
+          <a:solidFill>
+            <a:schemeClr val="accent2"/>
+          </a:solidFill>
+          <a:ln w="38100"/>
+        </p:spPr>
+        <p:style>
+          <a:lnRef idx="2">
+            <a:schemeClr val="accent1">
+              <a:shade val="15000"/>
+            </a:schemeClr>
+          </a:lnRef>
+          <a:fillRef idx="1">
+            <a:schemeClr val="accent1"/>
+          </a:fillRef>
+          <a:effectRef idx="0">
+            <a:schemeClr val="accent1"/>
+          </a:effectRef>
+          <a:fontRef idx="minor">
+            <a:schemeClr val="lt1"/>
+          </a:fontRef>
+        </p:style>
+        <p:txBody>
+          <a:bodyPr rtlCol="0" anchor="ctr"/>
+          <a:lstStyle/>
+          <a:p>
+            <a:pPr algn="ctr"/>
+            <a:r>
+              <a:rPr lang="en-US" altLang="ko-KR" dirty="0"/>
+              <a:t>IMU_IF</a:t>
+            </a:r>
+            <a:endParaRPr lang="ko-KR" altLang="en-US" dirty="0"/>
+          </a:p>
+        </p:txBody>
+      </p:sp>
+      <p:sp>
+        <p:nvSpPr>
+          <p:cNvPr id="4" name="TextBox 3">
+            <a:extLst>
+              <a:ext uri="{FF2B5EF4-FFF2-40B4-BE49-F238E27FC236}">
+                <a16:creationId xmlns:a16="http://schemas.microsoft.com/office/drawing/2014/main" id="{22D97185-ACA7-2833-1D38-65113700F3A3}"/>
+              </a:ext>
+            </a:extLst>
+          </p:cNvPr>
+          <p:cNvSpPr txBox="1"/>
+          <p:nvPr/>
+        </p:nvSpPr>
+        <p:spPr>
+          <a:xfrm>
+            <a:off x="406871" y="173267"/>
+            <a:ext cx="11582878" cy="1107996"/>
+          </a:xfrm>
+          <a:prstGeom prst="rect">
+            <a:avLst/>
+          </a:prstGeom>
+          <a:noFill/>
+        </p:spPr>
+        <p:txBody>
+          <a:bodyPr wrap="square" rtlCol="0">
+            <a:spAutoFit/>
+          </a:bodyPr>
+          <a:lstStyle/>
+          <a:p>
+            <a:r>
+              <a:rPr lang="en-US" altLang="ko-KR" b="1" dirty="0">
+                <a:latin typeface="+mj-lt"/>
+              </a:rPr>
+              <a:t>4. </a:t>
+            </a:r>
+            <a:r>
+              <a:rPr lang="ko-KR" altLang="en-US" b="1" dirty="0">
+                <a:latin typeface="+mj-lt"/>
+              </a:rPr>
+              <a:t>시뮬레이터 설계 </a:t>
+            </a:r>
+            <a:r>
+              <a:rPr lang="en-US" altLang="ko-KR" b="1" dirty="0">
+                <a:latin typeface="+mj-lt"/>
+              </a:rPr>
+              <a:t>– </a:t>
+            </a:r>
+            <a:r>
+              <a:rPr lang="ko-KR" altLang="en-US" b="1" dirty="0"/>
+              <a:t>공용 제어 구조 추상화</a:t>
+            </a:r>
+            <a:endParaRPr lang="en-US" altLang="ko-KR" b="1" dirty="0"/>
+          </a:p>
+          <a:p>
+            <a:r>
+              <a:rPr lang="en-US" altLang="ko-KR" sz="1600" dirty="0"/>
+              <a:t>  </a:t>
+            </a:r>
+          </a:p>
+          <a:p>
+            <a:r>
+              <a:rPr lang="en-US" altLang="ko-KR" sz="1600" dirty="0"/>
+              <a:t>IMU, </a:t>
+            </a:r>
+            <a:r>
+              <a:rPr lang="ko-KR" altLang="en-US" sz="1600" dirty="0"/>
+              <a:t>제어</a:t>
+            </a:r>
+            <a:r>
+              <a:rPr lang="en-US" altLang="ko-KR" sz="1600" dirty="0"/>
+              <a:t>, </a:t>
+            </a:r>
+            <a:r>
+              <a:rPr lang="ko-KR" altLang="en-US" sz="1600" dirty="0"/>
+              <a:t>통신 계층을 공통 인터페이스</a:t>
+            </a:r>
+            <a:r>
+              <a:rPr lang="en-US" altLang="ko-KR" sz="1600" dirty="0"/>
+              <a:t>(Interface) </a:t>
+            </a:r>
+            <a:r>
+              <a:rPr lang="ko-KR" altLang="en-US" sz="1600" dirty="0"/>
+              <a:t>기반으로 분리하여</a:t>
+            </a:r>
+            <a:r>
+              <a:rPr lang="en-US" altLang="ko-KR" sz="1600" dirty="0"/>
+              <a:t>, RPC, SHM </a:t>
+            </a:r>
+            <a:r>
+              <a:rPr lang="ko-KR" altLang="en-US" sz="1600" dirty="0"/>
+              <a:t>및 실제 </a:t>
+            </a:r>
+            <a:r>
+              <a:rPr lang="en-US" altLang="ko-KR" sz="1600" dirty="0"/>
+              <a:t>FC </a:t>
+            </a:r>
+            <a:r>
+              <a:rPr lang="ko-KR" altLang="en-US" sz="1600" dirty="0"/>
+              <a:t>환경에서도 동일한 상위 제어 루프 구조를 적용할 수 있는 공용 제어 아키텍처를 설계하였다</a:t>
+            </a:r>
+            <a:r>
+              <a:rPr lang="en-US" altLang="ko-KR" sz="1600" dirty="0"/>
+              <a:t>.</a:t>
+            </a:r>
+            <a:endParaRPr lang="ko-KR" altLang="en-US" sz="1600" b="1" dirty="0">
+              <a:latin typeface="+mj-lt"/>
+            </a:endParaRPr>
+          </a:p>
+        </p:txBody>
+      </p:sp>
+      <p:sp>
+        <p:nvSpPr>
+          <p:cNvPr id="28" name="사각형: 둥근 모서리 27">
+            <a:extLst>
+              <a:ext uri="{FF2B5EF4-FFF2-40B4-BE49-F238E27FC236}">
+                <a16:creationId xmlns:a16="http://schemas.microsoft.com/office/drawing/2014/main" id="{047D1BFB-9AB5-2654-044B-5873E704354C}"/>
+              </a:ext>
+            </a:extLst>
+          </p:cNvPr>
+          <p:cNvSpPr/>
+          <p:nvPr/>
+        </p:nvSpPr>
+        <p:spPr>
+          <a:xfrm>
+            <a:off x="6405056" y="4277333"/>
+            <a:ext cx="1931350" cy="341832"/>
+          </a:xfrm>
+          <a:prstGeom prst="roundRect">
+            <a:avLst/>
+          </a:prstGeom>
+          <a:solidFill>
+            <a:schemeClr val="accent2"/>
+          </a:solidFill>
+          <a:ln w="38100"/>
+        </p:spPr>
+        <p:style>
+          <a:lnRef idx="2">
+            <a:schemeClr val="accent1">
+              <a:shade val="15000"/>
+            </a:schemeClr>
+          </a:lnRef>
+          <a:fillRef idx="1">
+            <a:schemeClr val="accent1"/>
+          </a:fillRef>
+          <a:effectRef idx="0">
+            <a:schemeClr val="accent1"/>
+          </a:effectRef>
+          <a:fontRef idx="minor">
+            <a:schemeClr val="lt1"/>
+          </a:fontRef>
+        </p:style>
+        <p:txBody>
+          <a:bodyPr rtlCol="0" anchor="ctr"/>
+          <a:lstStyle/>
+          <a:p>
+            <a:pPr algn="ctr"/>
+            <a:r>
+              <a:rPr lang="en-US" altLang="ko-KR" dirty="0"/>
+              <a:t>RPC</a:t>
+            </a:r>
+            <a:endParaRPr lang="ko-KR" altLang="en-US" dirty="0"/>
+          </a:p>
+        </p:txBody>
+      </p:sp>
+      <p:sp>
+        <p:nvSpPr>
+          <p:cNvPr id="33" name="사각형: 둥근 모서리 32">
+            <a:extLst>
+              <a:ext uri="{FF2B5EF4-FFF2-40B4-BE49-F238E27FC236}">
+                <a16:creationId xmlns:a16="http://schemas.microsoft.com/office/drawing/2014/main" id="{DD75686D-5D1F-FC89-B7E8-4B97C7087BCF}"/>
+              </a:ext>
+            </a:extLst>
+          </p:cNvPr>
+          <p:cNvSpPr/>
+          <p:nvPr/>
+        </p:nvSpPr>
+        <p:spPr>
+          <a:xfrm>
+            <a:off x="6405056" y="3759244"/>
+            <a:ext cx="1931350" cy="341832"/>
+          </a:xfrm>
+          <a:prstGeom prst="roundRect">
+            <a:avLst/>
+          </a:prstGeom>
+          <a:solidFill>
+            <a:schemeClr val="accent2"/>
+          </a:solidFill>
+          <a:ln w="38100"/>
+        </p:spPr>
+        <p:style>
+          <a:lnRef idx="2">
+            <a:schemeClr val="accent1">
+              <a:shade val="15000"/>
+            </a:schemeClr>
+          </a:lnRef>
+          <a:fillRef idx="1">
+            <a:schemeClr val="accent1"/>
+          </a:fillRef>
+          <a:effectRef idx="0">
+            <a:schemeClr val="accent1"/>
+          </a:effectRef>
+          <a:fontRef idx="minor">
+            <a:schemeClr val="lt1"/>
+          </a:fontRef>
+        </p:style>
+        <p:txBody>
+          <a:bodyPr rtlCol="0" anchor="ctr"/>
+          <a:lstStyle/>
+          <a:p>
+            <a:pPr algn="ctr"/>
+            <a:r>
+              <a:rPr lang="en-US" altLang="ko-KR" dirty="0"/>
+              <a:t>SHM</a:t>
+            </a:r>
+            <a:endParaRPr lang="ko-KR" altLang="en-US" dirty="0"/>
+          </a:p>
+        </p:txBody>
+      </p:sp>
+      <p:cxnSp>
+        <p:nvCxnSpPr>
+          <p:cNvPr id="45" name="직선 화살표 연결선 44">
+            <a:extLst>
+              <a:ext uri="{FF2B5EF4-FFF2-40B4-BE49-F238E27FC236}">
+                <a16:creationId xmlns:a16="http://schemas.microsoft.com/office/drawing/2014/main" id="{C86CE5C2-BF7E-09C3-A98F-87E86B552A72}"/>
+              </a:ext>
+            </a:extLst>
+          </p:cNvPr>
+          <p:cNvCxnSpPr>
+            <a:cxnSpLocks/>
+            <a:stCxn id="97" idx="2"/>
+            <a:endCxn id="47" idx="0"/>
+          </p:cNvCxnSpPr>
+          <p:nvPr/>
+        </p:nvCxnSpPr>
+        <p:spPr>
+          <a:xfrm>
+            <a:off x="4277153" y="3565653"/>
+            <a:ext cx="0" cy="697632"/>
+          </a:xfrm>
+          <a:prstGeom prst="straightConnector1">
+            <a:avLst/>
+          </a:prstGeom>
+          <a:ln w="38100">
+            <a:solidFill>
+              <a:schemeClr val="tx1"/>
+            </a:solidFill>
+            <a:tailEnd type="triangle"/>
+          </a:ln>
+        </p:spPr>
+        <p:style>
+          <a:lnRef idx="1">
+            <a:schemeClr val="accent1"/>
+          </a:lnRef>
+          <a:fillRef idx="0">
+            <a:schemeClr val="accent1"/>
+          </a:fillRef>
+          <a:effectRef idx="0">
+            <a:schemeClr val="accent1"/>
+          </a:effectRef>
+          <a:fontRef idx="minor">
+            <a:schemeClr val="tx1"/>
+          </a:fontRef>
+        </p:style>
+      </p:cxnSp>
+      <p:sp>
+        <p:nvSpPr>
+          <p:cNvPr id="46" name="사각형: 둥근 모서리 45">
+            <a:extLst>
+              <a:ext uri="{FF2B5EF4-FFF2-40B4-BE49-F238E27FC236}">
+                <a16:creationId xmlns:a16="http://schemas.microsoft.com/office/drawing/2014/main" id="{B3B09173-56FE-BF8B-4C0C-E82A1B4D9B9C}"/>
+              </a:ext>
+            </a:extLst>
+          </p:cNvPr>
+          <p:cNvSpPr/>
+          <p:nvPr/>
+        </p:nvSpPr>
+        <p:spPr>
+          <a:xfrm>
+            <a:off x="3311478" y="3745196"/>
+            <a:ext cx="1931350" cy="341832"/>
+          </a:xfrm>
+          <a:prstGeom prst="roundRect">
+            <a:avLst/>
+          </a:prstGeom>
+          <a:solidFill>
+            <a:schemeClr val="accent2"/>
+          </a:solidFill>
+          <a:ln w="38100"/>
+        </p:spPr>
+        <p:style>
+          <a:lnRef idx="2">
+            <a:schemeClr val="accent1">
+              <a:shade val="15000"/>
+            </a:schemeClr>
+          </a:lnRef>
+          <a:fillRef idx="1">
+            <a:schemeClr val="accent1"/>
+          </a:fillRef>
+          <a:effectRef idx="0">
+            <a:schemeClr val="accent1"/>
+          </a:effectRef>
+          <a:fontRef idx="minor">
+            <a:schemeClr val="lt1"/>
+          </a:fontRef>
+        </p:style>
+        <p:txBody>
+          <a:bodyPr rtlCol="0" anchor="ctr"/>
+          <a:lstStyle/>
+          <a:p>
+            <a:pPr algn="ctr"/>
+            <a:r>
+              <a:rPr lang="en-US" altLang="ko-KR" dirty="0"/>
+              <a:t>SIM_RPC</a:t>
+            </a:r>
+            <a:endParaRPr lang="ko-KR" altLang="en-US" dirty="0"/>
+          </a:p>
+        </p:txBody>
+      </p:sp>
+      <p:cxnSp>
+        <p:nvCxnSpPr>
+          <p:cNvPr id="48" name="직선 화살표 연결선 47">
+            <a:extLst>
+              <a:ext uri="{FF2B5EF4-FFF2-40B4-BE49-F238E27FC236}">
+                <a16:creationId xmlns:a16="http://schemas.microsoft.com/office/drawing/2014/main" id="{6F5B0C5C-9FAF-B7D5-66FB-9F8D7771DA75}"/>
+              </a:ext>
+            </a:extLst>
+          </p:cNvPr>
+          <p:cNvCxnSpPr>
+            <a:cxnSpLocks/>
+          </p:cNvCxnSpPr>
+          <p:nvPr/>
+        </p:nvCxnSpPr>
+        <p:spPr>
+          <a:xfrm>
+            <a:off x="4704443" y="4101076"/>
+            <a:ext cx="0" cy="176257"/>
+          </a:xfrm>
+          <a:prstGeom prst="straightConnector1">
+            <a:avLst/>
+          </a:prstGeom>
+          <a:ln w="38100">
+            <a:solidFill>
+              <a:schemeClr val="tx1"/>
+            </a:solidFill>
+            <a:tailEnd type="triangle"/>
+          </a:ln>
+        </p:spPr>
+        <p:style>
+          <a:lnRef idx="1">
+            <a:schemeClr val="accent1"/>
+          </a:lnRef>
+          <a:fillRef idx="0">
+            <a:schemeClr val="accent1"/>
+          </a:fillRef>
+          <a:effectRef idx="0">
+            <a:schemeClr val="accent1"/>
+          </a:effectRef>
+          <a:fontRef idx="minor">
+            <a:schemeClr val="tx1"/>
+          </a:fontRef>
+        </p:style>
+      </p:cxnSp>
+      <p:sp>
+        <p:nvSpPr>
+          <p:cNvPr id="49" name="사각형: 둥근 모서리 48">
+            <a:extLst>
+              <a:ext uri="{FF2B5EF4-FFF2-40B4-BE49-F238E27FC236}">
+                <a16:creationId xmlns:a16="http://schemas.microsoft.com/office/drawing/2014/main" id="{C244C68D-974C-9B85-124E-385A83A6A548}"/>
+              </a:ext>
+            </a:extLst>
+          </p:cNvPr>
+          <p:cNvSpPr/>
+          <p:nvPr/>
+        </p:nvSpPr>
+        <p:spPr>
+          <a:xfrm>
+            <a:off x="3311478" y="2695378"/>
+            <a:ext cx="1931350" cy="341832"/>
+          </a:xfrm>
+          <a:prstGeom prst="roundRect">
+            <a:avLst/>
+          </a:prstGeom>
+          <a:solidFill>
+            <a:schemeClr val="accent2"/>
+          </a:solidFill>
+          <a:ln w="38100">
+            <a:solidFill>
+              <a:schemeClr val="accent1">
+                <a:shade val="15000"/>
+              </a:schemeClr>
+            </a:solidFill>
+            <a:prstDash val="dash"/>
+            <a:extLst>
+              <a:ext uri="{C807C97D-BFC1-408E-A445-0C87EB9F89A2}">
+                <ask:lineSketchStyleProps xmlns:ask="http://schemas.microsoft.com/office/drawing/2018/sketchyshapes" sd="1219033472">
+                  <a:custGeom>
+                    <a:avLst/>
+                    <a:gdLst>
+                      <a:gd name="csX0" fmla="*/ 0 w 1931350"/>
+                      <a:gd name="csY0" fmla="*/ 56973 h 341832"/>
+                      <a:gd name="csX1" fmla="*/ 56973 w 1931350"/>
+                      <a:gd name="csY1" fmla="*/ 0 h 341832"/>
+                      <a:gd name="csX2" fmla="*/ 529498 w 1931350"/>
+                      <a:gd name="csY2" fmla="*/ 0 h 341832"/>
+                      <a:gd name="csX3" fmla="*/ 947501 w 1931350"/>
+                      <a:gd name="csY3" fmla="*/ 0 h 341832"/>
+                      <a:gd name="csX4" fmla="*/ 1438200 w 1931350"/>
+                      <a:gd name="csY4" fmla="*/ 0 h 341832"/>
+                      <a:gd name="csX5" fmla="*/ 1874377 w 1931350"/>
+                      <a:gd name="csY5" fmla="*/ 0 h 341832"/>
+                      <a:gd name="csX6" fmla="*/ 1931350 w 1931350"/>
+                      <a:gd name="csY6" fmla="*/ 56973 h 341832"/>
+                      <a:gd name="csX7" fmla="*/ 1931350 w 1931350"/>
+                      <a:gd name="csY7" fmla="*/ 284859 h 341832"/>
+                      <a:gd name="csX8" fmla="*/ 1874377 w 1931350"/>
+                      <a:gd name="csY8" fmla="*/ 341832 h 341832"/>
+                      <a:gd name="csX9" fmla="*/ 1383678 w 1931350"/>
+                      <a:gd name="csY9" fmla="*/ 341832 h 341832"/>
+                      <a:gd name="csX10" fmla="*/ 911153 w 1931350"/>
+                      <a:gd name="csY10" fmla="*/ 341832 h 341832"/>
+                      <a:gd name="csX11" fmla="*/ 493150 w 1931350"/>
+                      <a:gd name="csY11" fmla="*/ 341832 h 341832"/>
+                      <a:gd name="csX12" fmla="*/ 56973 w 1931350"/>
+                      <a:gd name="csY12" fmla="*/ 341832 h 341832"/>
+                      <a:gd name="csX13" fmla="*/ 0 w 1931350"/>
+                      <a:gd name="csY13" fmla="*/ 284859 h 341832"/>
+                      <a:gd name="csX14" fmla="*/ 0 w 1931350"/>
+                      <a:gd name="csY14" fmla="*/ 56973 h 341832"/>
+                    </a:gdLst>
+                    <a:ahLst/>
+                    <a:cxnLst>
+                      <a:cxn ang="0">
+                        <a:pos x="csX0" y="csY0"/>
+                      </a:cxn>
+                      <a:cxn ang="0">
+                        <a:pos x="csX1" y="csY1"/>
+                      </a:cxn>
+                      <a:cxn ang="0">
+                        <a:pos x="csX2" y="csY2"/>
+                      </a:cxn>
+                      <a:cxn ang="0">
+                        <a:pos x="csX3" y="csY3"/>
+                      </a:cxn>
+                      <a:cxn ang="0">
+                        <a:pos x="csX4" y="csY4"/>
+                      </a:cxn>
+                      <a:cxn ang="0">
+                        <a:pos x="csX5" y="csY5"/>
+                      </a:cxn>
+                      <a:cxn ang="0">
+                        <a:pos x="csX6" y="csY6"/>
+                      </a:cxn>
+                      <a:cxn ang="0">
+                        <a:pos x="csX7" y="csY7"/>
+                      </a:cxn>
+                      <a:cxn ang="0">
+                        <a:pos x="csX8" y="csY8"/>
+                      </a:cxn>
+                      <a:cxn ang="0">
+                        <a:pos x="csX9" y="csY9"/>
+                      </a:cxn>
+                      <a:cxn ang="0">
+                        <a:pos x="csX10" y="csY10"/>
+                      </a:cxn>
+                      <a:cxn ang="0">
+                        <a:pos x="csX11" y="csY11"/>
+                      </a:cxn>
+                      <a:cxn ang="0">
+                        <a:pos x="csX12" y="csY12"/>
+                      </a:cxn>
+                      <a:cxn ang="0">
+                        <a:pos x="csX13" y="csY13"/>
+                      </a:cxn>
+                      <a:cxn ang="0">
+                        <a:pos x="csX14" y="csY14"/>
+                      </a:cxn>
+                    </a:cxnLst>
+                    <a:rect l="l" t="t" r="r" b="b"/>
+                    <a:pathLst>
+                      <a:path w="1931350" h="341832" fill="none" extrusionOk="0">
+                        <a:moveTo>
+                          <a:pt x="0" y="56973"/>
+                        </a:moveTo>
+                        <a:cubicBezTo>
+                          <a:pt x="-1717" y="22007"/>
+                          <a:pt x="25710" y="-2734"/>
+                          <a:pt x="56973" y="0"/>
+                        </a:cubicBezTo>
+                        <a:cubicBezTo>
+                          <a:pt x="184840" y="-19389"/>
+                          <a:pt x="410865" y="40804"/>
+                          <a:pt x="529498" y="0"/>
+                        </a:cubicBezTo>
+                        <a:cubicBezTo>
+                          <a:pt x="648132" y="-40804"/>
+                          <a:pt x="860269" y="1480"/>
+                          <a:pt x="947501" y="0"/>
+                        </a:cubicBezTo>
+                        <a:cubicBezTo>
+                          <a:pt x="1034733" y="-1480"/>
+                          <a:pt x="1295027" y="10000"/>
+                          <a:pt x="1438200" y="0"/>
+                        </a:cubicBezTo>
+                        <a:cubicBezTo>
+                          <a:pt x="1581373" y="-10000"/>
+                          <a:pt x="1697781" y="35646"/>
+                          <a:pt x="1874377" y="0"/>
+                        </a:cubicBezTo>
+                        <a:cubicBezTo>
+                          <a:pt x="1908240" y="4748"/>
+                          <a:pt x="1930091" y="26172"/>
+                          <a:pt x="1931350" y="56973"/>
+                        </a:cubicBezTo>
+                        <a:cubicBezTo>
+                          <a:pt x="1956304" y="150185"/>
+                          <a:pt x="1925760" y="184743"/>
+                          <a:pt x="1931350" y="284859"/>
+                        </a:cubicBezTo>
+                        <a:cubicBezTo>
+                          <a:pt x="1933893" y="308503"/>
+                          <a:pt x="1911539" y="347992"/>
+                          <a:pt x="1874377" y="341832"/>
+                        </a:cubicBezTo>
+                        <a:cubicBezTo>
+                          <a:pt x="1641242" y="348203"/>
+                          <a:pt x="1520448" y="335998"/>
+                          <a:pt x="1383678" y="341832"/>
+                        </a:cubicBezTo>
+                        <a:cubicBezTo>
+                          <a:pt x="1246908" y="347666"/>
+                          <a:pt x="1037202" y="321079"/>
+                          <a:pt x="911153" y="341832"/>
+                        </a:cubicBezTo>
+                        <a:cubicBezTo>
+                          <a:pt x="785104" y="362585"/>
+                          <a:pt x="589063" y="305269"/>
+                          <a:pt x="493150" y="341832"/>
+                        </a:cubicBezTo>
+                        <a:cubicBezTo>
+                          <a:pt x="397237" y="378395"/>
+                          <a:pt x="212888" y="312174"/>
+                          <a:pt x="56973" y="341832"/>
+                        </a:cubicBezTo>
+                        <a:cubicBezTo>
+                          <a:pt x="23580" y="343783"/>
+                          <a:pt x="-3456" y="323721"/>
+                          <a:pt x="0" y="284859"/>
+                        </a:cubicBezTo>
+                        <a:cubicBezTo>
+                          <a:pt x="-14446" y="202382"/>
+                          <a:pt x="17326" y="118655"/>
+                          <a:pt x="0" y="56973"/>
+                        </a:cubicBezTo>
+                        <a:close/>
+                      </a:path>
+                      <a:path w="1931350" h="341832" stroke="0" extrusionOk="0">
+                        <a:moveTo>
+                          <a:pt x="0" y="56973"/>
+                        </a:moveTo>
+                        <a:cubicBezTo>
+                          <a:pt x="-814" y="25006"/>
+                          <a:pt x="20344" y="1938"/>
+                          <a:pt x="56973" y="0"/>
+                        </a:cubicBezTo>
+                        <a:cubicBezTo>
+                          <a:pt x="195106" y="-5290"/>
+                          <a:pt x="428153" y="51682"/>
+                          <a:pt x="547672" y="0"/>
+                        </a:cubicBezTo>
+                        <a:cubicBezTo>
+                          <a:pt x="667191" y="-51682"/>
+                          <a:pt x="847411" y="5817"/>
+                          <a:pt x="983849" y="0"/>
+                        </a:cubicBezTo>
+                        <a:cubicBezTo>
+                          <a:pt x="1120287" y="-5817"/>
+                          <a:pt x="1223502" y="41322"/>
+                          <a:pt x="1401852" y="0"/>
+                        </a:cubicBezTo>
+                        <a:cubicBezTo>
+                          <a:pt x="1580202" y="-41322"/>
+                          <a:pt x="1679950" y="41150"/>
+                          <a:pt x="1874377" y="0"/>
+                        </a:cubicBezTo>
+                        <a:cubicBezTo>
+                          <a:pt x="1907039" y="-2463"/>
+                          <a:pt x="1926993" y="24841"/>
+                          <a:pt x="1931350" y="56973"/>
+                        </a:cubicBezTo>
+                        <a:cubicBezTo>
+                          <a:pt x="1947156" y="137635"/>
+                          <a:pt x="1930847" y="189241"/>
+                          <a:pt x="1931350" y="284859"/>
+                        </a:cubicBezTo>
+                        <a:cubicBezTo>
+                          <a:pt x="1930728" y="317353"/>
+                          <a:pt x="1904179" y="339903"/>
+                          <a:pt x="1874377" y="341832"/>
+                        </a:cubicBezTo>
+                        <a:cubicBezTo>
+                          <a:pt x="1671143" y="385102"/>
+                          <a:pt x="1660713" y="334111"/>
+                          <a:pt x="1456374" y="341832"/>
+                        </a:cubicBezTo>
+                        <a:cubicBezTo>
+                          <a:pt x="1252035" y="349553"/>
+                          <a:pt x="1174795" y="295410"/>
+                          <a:pt x="1002023" y="341832"/>
+                        </a:cubicBezTo>
+                        <a:cubicBezTo>
+                          <a:pt x="829251" y="388254"/>
+                          <a:pt x="733983" y="300783"/>
+                          <a:pt x="565846" y="341832"/>
+                        </a:cubicBezTo>
+                        <a:cubicBezTo>
+                          <a:pt x="397709" y="382881"/>
+                          <a:pt x="266747" y="319224"/>
+                          <a:pt x="56973" y="341832"/>
+                        </a:cubicBezTo>
+                        <a:cubicBezTo>
+                          <a:pt x="31084" y="334910"/>
+                          <a:pt x="-1907" y="315587"/>
+                          <a:pt x="0" y="284859"/>
+                        </a:cubicBezTo>
+                        <a:cubicBezTo>
+                          <a:pt x="-19796" y="224757"/>
+                          <a:pt x="9060" y="104382"/>
+                          <a:pt x="0" y="56973"/>
+                        </a:cubicBezTo>
+                        <a:close/>
+                      </a:path>
+                    </a:pathLst>
+                  </a:custGeom>
+                  <ask:type>
+                    <ask:lineSketchNone/>
+                  </ask:type>
+                </ask:lineSketchStyleProps>
+              </a:ext>
+            </a:extLst>
+          </a:ln>
+        </p:spPr>
+        <p:style>
+          <a:lnRef idx="2">
+            <a:schemeClr val="accent1">
+              <a:shade val="15000"/>
+            </a:schemeClr>
+          </a:lnRef>
+          <a:fillRef idx="1">
+            <a:schemeClr val="accent1"/>
+          </a:fillRef>
+          <a:effectRef idx="0">
+            <a:schemeClr val="accent1"/>
+          </a:effectRef>
+          <a:fontRef idx="minor">
+            <a:schemeClr val="lt1"/>
+          </a:fontRef>
+        </p:style>
+        <p:txBody>
+          <a:bodyPr rtlCol="0" anchor="ctr"/>
+          <a:lstStyle/>
+          <a:p>
+            <a:pPr algn="ctr"/>
+            <a:r>
+              <a:rPr lang="en-US" altLang="ko-KR" dirty="0"/>
+              <a:t>42688p</a:t>
+            </a:r>
+            <a:endParaRPr lang="ko-KR" altLang="en-US" dirty="0"/>
+          </a:p>
+        </p:txBody>
+      </p:sp>
+      <p:sp>
+        <p:nvSpPr>
+          <p:cNvPr id="61" name="사각형: 둥근 모서리 60">
+            <a:extLst>
+              <a:ext uri="{FF2B5EF4-FFF2-40B4-BE49-F238E27FC236}">
+                <a16:creationId xmlns:a16="http://schemas.microsoft.com/office/drawing/2014/main" id="{FAEE2830-6F51-D28E-9C18-276388A0F648}"/>
+              </a:ext>
+            </a:extLst>
+          </p:cNvPr>
+          <p:cNvSpPr/>
+          <p:nvPr/>
+        </p:nvSpPr>
+        <p:spPr>
+          <a:xfrm>
+            <a:off x="9498634" y="4263283"/>
+            <a:ext cx="1931350" cy="341832"/>
+          </a:xfrm>
+          <a:prstGeom prst="roundRect">
+            <a:avLst/>
+          </a:prstGeom>
+          <a:solidFill>
+            <a:schemeClr val="accent2"/>
+          </a:solidFill>
+          <a:ln w="38100"/>
+        </p:spPr>
+        <p:style>
+          <a:lnRef idx="2">
+            <a:schemeClr val="accent1">
+              <a:shade val="15000"/>
+            </a:schemeClr>
+          </a:lnRef>
+          <a:fillRef idx="1">
+            <a:schemeClr val="accent1"/>
+          </a:fillRef>
+          <a:effectRef idx="0">
+            <a:schemeClr val="accent1"/>
+          </a:effectRef>
+          <a:fontRef idx="minor">
+            <a:schemeClr val="lt1"/>
+          </a:fontRef>
+        </p:style>
+        <p:txBody>
+          <a:bodyPr rtlCol="0" anchor="ctr"/>
+          <a:lstStyle/>
+          <a:p>
+            <a:pPr algn="ctr"/>
+            <a:r>
+              <a:rPr lang="en-US" altLang="ko-KR" dirty="0"/>
+              <a:t>ATT_IF</a:t>
+            </a:r>
+            <a:endParaRPr lang="ko-KR" altLang="en-US" dirty="0"/>
+          </a:p>
+        </p:txBody>
+      </p:sp>
+      <p:cxnSp>
+        <p:nvCxnSpPr>
+          <p:cNvPr id="62" name="직선 화살표 연결선 61">
+            <a:extLst>
+              <a:ext uri="{FF2B5EF4-FFF2-40B4-BE49-F238E27FC236}">
+                <a16:creationId xmlns:a16="http://schemas.microsoft.com/office/drawing/2014/main" id="{88F8597C-786D-E6BC-9675-7E396BC2FBD6}"/>
+              </a:ext>
+            </a:extLst>
+          </p:cNvPr>
+          <p:cNvCxnSpPr>
+            <a:cxnSpLocks/>
+          </p:cNvCxnSpPr>
+          <p:nvPr/>
+        </p:nvCxnSpPr>
+        <p:spPr>
+          <a:xfrm>
+            <a:off x="10148114" y="3597042"/>
+            <a:ext cx="0" cy="666241"/>
+          </a:xfrm>
+          <a:prstGeom prst="straightConnector1">
+            <a:avLst/>
+          </a:prstGeom>
+          <a:ln w="38100">
+            <a:solidFill>
+              <a:schemeClr val="tx1"/>
+            </a:solidFill>
+            <a:tailEnd type="triangle"/>
+          </a:ln>
+        </p:spPr>
+        <p:style>
+          <a:lnRef idx="1">
+            <a:schemeClr val="accent1"/>
+          </a:lnRef>
+          <a:fillRef idx="0">
+            <a:schemeClr val="accent1"/>
+          </a:fillRef>
+          <a:effectRef idx="0">
+            <a:schemeClr val="accent1"/>
+          </a:effectRef>
+          <a:fontRef idx="minor">
+            <a:schemeClr val="tx1"/>
+          </a:fontRef>
+        </p:style>
+      </p:cxnSp>
+      <p:sp>
+        <p:nvSpPr>
+          <p:cNvPr id="63" name="사각형: 둥근 모서리 62">
+            <a:extLst>
+              <a:ext uri="{FF2B5EF4-FFF2-40B4-BE49-F238E27FC236}">
+                <a16:creationId xmlns:a16="http://schemas.microsoft.com/office/drawing/2014/main" id="{52879C51-4F73-18E3-1B13-5296FFB56CF6}"/>
+              </a:ext>
+            </a:extLst>
+          </p:cNvPr>
+          <p:cNvSpPr/>
+          <p:nvPr/>
+        </p:nvSpPr>
+        <p:spPr>
+          <a:xfrm>
+            <a:off x="9498634" y="3745194"/>
+            <a:ext cx="1931350" cy="341832"/>
+          </a:xfrm>
+          <a:prstGeom prst="roundRect">
+            <a:avLst/>
+          </a:prstGeom>
+          <a:solidFill>
+            <a:schemeClr val="accent2"/>
+          </a:solidFill>
+          <a:ln w="38100"/>
+        </p:spPr>
+        <p:style>
+          <a:lnRef idx="2">
+            <a:schemeClr val="accent1">
+              <a:shade val="15000"/>
+            </a:schemeClr>
+          </a:lnRef>
+          <a:fillRef idx="1">
+            <a:schemeClr val="accent1"/>
+          </a:fillRef>
+          <a:effectRef idx="0">
+            <a:schemeClr val="accent1"/>
+          </a:effectRef>
+          <a:fontRef idx="minor">
+            <a:schemeClr val="lt1"/>
+          </a:fontRef>
+        </p:style>
+        <p:txBody>
+          <a:bodyPr rtlCol="0" anchor="ctr"/>
+          <a:lstStyle/>
+          <a:p>
+            <a:pPr algn="ctr"/>
+            <a:r>
+              <a:rPr lang="en-US" altLang="ko-KR" dirty="0"/>
+              <a:t>Mahony</a:t>
+            </a:r>
+            <a:endParaRPr lang="ko-KR" altLang="en-US" dirty="0"/>
+          </a:p>
+        </p:txBody>
+      </p:sp>
+      <p:cxnSp>
+        <p:nvCxnSpPr>
+          <p:cNvPr id="64" name="직선 화살표 연결선 63">
+            <a:extLst>
+              <a:ext uri="{FF2B5EF4-FFF2-40B4-BE49-F238E27FC236}">
+                <a16:creationId xmlns:a16="http://schemas.microsoft.com/office/drawing/2014/main" id="{0207AA0F-799F-D4B7-5BAD-2E05B06624CB}"/>
+              </a:ext>
+            </a:extLst>
+          </p:cNvPr>
+          <p:cNvCxnSpPr>
+            <a:cxnSpLocks/>
+          </p:cNvCxnSpPr>
+          <p:nvPr/>
+        </p:nvCxnSpPr>
+        <p:spPr>
+          <a:xfrm>
+            <a:off x="10771958" y="4087026"/>
+            <a:ext cx="0" cy="176257"/>
+          </a:xfrm>
+          <a:prstGeom prst="straightConnector1">
+            <a:avLst/>
+          </a:prstGeom>
+          <a:ln w="38100">
+            <a:solidFill>
+              <a:schemeClr val="tx1"/>
+            </a:solidFill>
+            <a:tailEnd type="triangle"/>
+          </a:ln>
+        </p:spPr>
+        <p:style>
+          <a:lnRef idx="1">
+            <a:schemeClr val="accent1"/>
+          </a:lnRef>
+          <a:fillRef idx="0">
+            <a:schemeClr val="accent1"/>
+          </a:fillRef>
+          <a:effectRef idx="0">
+            <a:schemeClr val="accent1"/>
+          </a:effectRef>
+          <a:fontRef idx="minor">
+            <a:schemeClr val="tx1"/>
+          </a:fontRef>
+        </p:style>
+      </p:cxnSp>
+      <p:sp>
+        <p:nvSpPr>
+          <p:cNvPr id="65" name="사각형: 둥근 모서리 64">
+            <a:extLst>
+              <a:ext uri="{FF2B5EF4-FFF2-40B4-BE49-F238E27FC236}">
+                <a16:creationId xmlns:a16="http://schemas.microsoft.com/office/drawing/2014/main" id="{AE0A0554-9445-4FDF-7965-29EF874C4518}"/>
+              </a:ext>
+            </a:extLst>
+          </p:cNvPr>
+          <p:cNvSpPr/>
+          <p:nvPr/>
+        </p:nvSpPr>
+        <p:spPr>
+          <a:xfrm>
+            <a:off x="9498634" y="3255210"/>
+            <a:ext cx="1931350" cy="341832"/>
+          </a:xfrm>
+          <a:prstGeom prst="roundRect">
+            <a:avLst/>
+          </a:prstGeom>
+          <a:solidFill>
+            <a:schemeClr val="accent2"/>
+          </a:solidFill>
+          <a:ln w="38100">
+            <a:prstDash val="dash"/>
+          </a:ln>
+        </p:spPr>
+        <p:style>
+          <a:lnRef idx="2">
+            <a:schemeClr val="accent1">
+              <a:shade val="15000"/>
+            </a:schemeClr>
+          </a:lnRef>
+          <a:fillRef idx="1">
+            <a:schemeClr val="accent1"/>
+          </a:fillRef>
+          <a:effectRef idx="0">
+            <a:schemeClr val="accent1"/>
+          </a:effectRef>
+          <a:fontRef idx="minor">
+            <a:schemeClr val="lt1"/>
+          </a:fontRef>
+        </p:style>
+        <p:txBody>
+          <a:bodyPr rtlCol="0" anchor="ctr"/>
+          <a:lstStyle/>
+          <a:p>
+            <a:pPr algn="ctr"/>
+            <a:r>
+              <a:rPr lang="en-US" altLang="ko-KR" dirty="0"/>
+              <a:t>EKF3</a:t>
+            </a:r>
+            <a:endParaRPr lang="ko-KR" altLang="en-US" dirty="0"/>
+          </a:p>
+        </p:txBody>
+      </p:sp>
+      <p:cxnSp>
+        <p:nvCxnSpPr>
+          <p:cNvPr id="71" name="직선 화살표 연결선 70">
+            <a:extLst>
+              <a:ext uri="{FF2B5EF4-FFF2-40B4-BE49-F238E27FC236}">
+                <a16:creationId xmlns:a16="http://schemas.microsoft.com/office/drawing/2014/main" id="{B3D86595-3CD5-E8FD-849E-496F311AD1EB}"/>
+              </a:ext>
+            </a:extLst>
+          </p:cNvPr>
+          <p:cNvCxnSpPr>
+            <a:cxnSpLocks/>
+            <a:stCxn id="46" idx="3"/>
+            <a:endCxn id="28" idx="1"/>
+          </p:cNvCxnSpPr>
+          <p:nvPr/>
+        </p:nvCxnSpPr>
+        <p:spPr>
+          <a:xfrm>
+            <a:off x="5242828" y="3916112"/>
+            <a:ext cx="1162228" cy="532137"/>
+          </a:xfrm>
+          <a:prstGeom prst="straightConnector1">
+            <a:avLst/>
+          </a:prstGeom>
+          <a:ln w="63500">
+            <a:solidFill>
+              <a:schemeClr val="tx1"/>
+            </a:solidFill>
+            <a:tailEnd type="triangle"/>
+          </a:ln>
+        </p:spPr>
+        <p:style>
+          <a:lnRef idx="1">
+            <a:schemeClr val="accent1"/>
+          </a:lnRef>
+          <a:fillRef idx="0">
+            <a:schemeClr val="accent1"/>
+          </a:fillRef>
+          <a:effectRef idx="0">
+            <a:schemeClr val="accent1"/>
+          </a:effectRef>
+          <a:fontRef idx="minor">
+            <a:schemeClr val="tx1"/>
+          </a:fontRef>
+        </p:style>
+      </p:cxnSp>
+      <p:sp>
+        <p:nvSpPr>
+          <p:cNvPr id="75" name="사각형: 둥근 모서리 74">
+            <a:extLst>
+              <a:ext uri="{FF2B5EF4-FFF2-40B4-BE49-F238E27FC236}">
+                <a16:creationId xmlns:a16="http://schemas.microsoft.com/office/drawing/2014/main" id="{8479241D-46FC-9F42-C8A3-2C515CBDF3F6}"/>
+              </a:ext>
+            </a:extLst>
+          </p:cNvPr>
+          <p:cNvSpPr/>
+          <p:nvPr/>
+        </p:nvSpPr>
+        <p:spPr>
+          <a:xfrm>
+            <a:off x="6405056" y="3250852"/>
+            <a:ext cx="1931350" cy="341832"/>
+          </a:xfrm>
+          <a:prstGeom prst="roundRect">
+            <a:avLst/>
+          </a:prstGeom>
+          <a:solidFill>
+            <a:schemeClr val="accent2"/>
+          </a:solidFill>
+          <a:ln w="38100">
+            <a:prstDash val="dash"/>
+          </a:ln>
+        </p:spPr>
+        <p:style>
+          <a:lnRef idx="2">
+            <a:schemeClr val="accent1">
+              <a:shade val="15000"/>
+            </a:schemeClr>
+          </a:lnRef>
+          <a:fillRef idx="1">
+            <a:schemeClr val="accent1"/>
+          </a:fillRef>
+          <a:effectRef idx="0">
+            <a:schemeClr val="accent1"/>
+          </a:effectRef>
+          <a:fontRef idx="minor">
+            <a:schemeClr val="lt1"/>
+          </a:fontRef>
+        </p:style>
+        <p:txBody>
+          <a:bodyPr rtlCol="0" anchor="ctr"/>
+          <a:lstStyle/>
+          <a:p>
+            <a:pPr algn="ctr"/>
+            <a:r>
+              <a:rPr lang="en-US" altLang="ko-KR" dirty="0"/>
+              <a:t>SPI</a:t>
+            </a:r>
+            <a:endParaRPr lang="ko-KR" altLang="en-US" dirty="0"/>
+          </a:p>
+        </p:txBody>
+      </p:sp>
+      <p:cxnSp>
+        <p:nvCxnSpPr>
+          <p:cNvPr id="76" name="직선 화살표 연결선 75">
+            <a:extLst>
+              <a:ext uri="{FF2B5EF4-FFF2-40B4-BE49-F238E27FC236}">
+                <a16:creationId xmlns:a16="http://schemas.microsoft.com/office/drawing/2014/main" id="{B3DA7D84-4322-AF4A-5B38-25C125503CA9}"/>
+              </a:ext>
+            </a:extLst>
+          </p:cNvPr>
+          <p:cNvCxnSpPr>
+            <a:cxnSpLocks/>
+            <a:stCxn id="49" idx="3"/>
+            <a:endCxn id="75" idx="1"/>
+          </p:cNvCxnSpPr>
+          <p:nvPr/>
+        </p:nvCxnSpPr>
+        <p:spPr>
+          <a:xfrm>
+            <a:off x="5242828" y="2866294"/>
+            <a:ext cx="1162228" cy="555474"/>
+          </a:xfrm>
+          <a:prstGeom prst="straightConnector1">
+            <a:avLst/>
+          </a:prstGeom>
+          <a:ln w="63500">
+            <a:solidFill>
+              <a:schemeClr val="tx1"/>
+            </a:solidFill>
+            <a:tailEnd type="triangle"/>
+          </a:ln>
+        </p:spPr>
+        <p:style>
+          <a:lnRef idx="1">
+            <a:schemeClr val="accent1"/>
+          </a:lnRef>
+          <a:fillRef idx="0">
+            <a:schemeClr val="accent1"/>
+          </a:fillRef>
+          <a:effectRef idx="0">
+            <a:schemeClr val="accent1"/>
+          </a:effectRef>
+          <a:fontRef idx="minor">
+            <a:schemeClr val="tx1"/>
+          </a:fontRef>
+        </p:style>
+      </p:cxnSp>
+      <p:cxnSp>
+        <p:nvCxnSpPr>
+          <p:cNvPr id="79" name="직선 화살표 연결선 78">
+            <a:extLst>
+              <a:ext uri="{FF2B5EF4-FFF2-40B4-BE49-F238E27FC236}">
+                <a16:creationId xmlns:a16="http://schemas.microsoft.com/office/drawing/2014/main" id="{44A35B74-9C03-3664-21B8-F36DFB812CED}"/>
+              </a:ext>
+            </a:extLst>
+          </p:cNvPr>
+          <p:cNvCxnSpPr>
+            <a:cxnSpLocks/>
+            <a:stCxn id="97" idx="3"/>
+            <a:endCxn id="33" idx="1"/>
+          </p:cNvCxnSpPr>
+          <p:nvPr/>
+        </p:nvCxnSpPr>
+        <p:spPr>
+          <a:xfrm>
+            <a:off x="5242828" y="3394737"/>
+            <a:ext cx="1162228" cy="535423"/>
+          </a:xfrm>
+          <a:prstGeom prst="straightConnector1">
+            <a:avLst/>
+          </a:prstGeom>
+          <a:ln w="63500">
+            <a:solidFill>
+              <a:schemeClr val="tx1"/>
+            </a:solidFill>
+            <a:tailEnd type="triangle"/>
+          </a:ln>
+        </p:spPr>
+        <p:style>
+          <a:lnRef idx="1">
+            <a:schemeClr val="accent1"/>
+          </a:lnRef>
+          <a:fillRef idx="0">
+            <a:schemeClr val="accent1"/>
+          </a:fillRef>
+          <a:effectRef idx="0">
+            <a:schemeClr val="accent1"/>
+          </a:effectRef>
+          <a:fontRef idx="minor">
+            <a:schemeClr val="tx1"/>
+          </a:fontRef>
+        </p:style>
+      </p:cxnSp>
+      <p:sp>
+        <p:nvSpPr>
+          <p:cNvPr id="82" name="사각형: 둥근 모서리 81">
+            <a:extLst>
+              <a:ext uri="{FF2B5EF4-FFF2-40B4-BE49-F238E27FC236}">
+                <a16:creationId xmlns:a16="http://schemas.microsoft.com/office/drawing/2014/main" id="{8B4FF71A-59F0-598B-5681-354E3F89731B}"/>
+              </a:ext>
+            </a:extLst>
+          </p:cNvPr>
+          <p:cNvSpPr/>
+          <p:nvPr/>
+        </p:nvSpPr>
+        <p:spPr>
+          <a:xfrm>
+            <a:off x="492823" y="3340668"/>
+            <a:ext cx="1741222" cy="1178988"/>
+          </a:xfrm>
+          <a:prstGeom prst="roundRect">
+            <a:avLst/>
+          </a:prstGeom>
+          <a:ln w="38100"/>
+        </p:spPr>
+        <p:style>
+          <a:lnRef idx="2">
+            <a:schemeClr val="accent1">
+              <a:shade val="15000"/>
+            </a:schemeClr>
+          </a:lnRef>
+          <a:fillRef idx="1">
+            <a:schemeClr val="accent1"/>
+          </a:fillRef>
+          <a:effectRef idx="0">
+            <a:schemeClr val="accent1"/>
+          </a:effectRef>
+          <a:fontRef idx="minor">
+            <a:schemeClr val="lt1"/>
+          </a:fontRef>
+        </p:style>
+        <p:txBody>
+          <a:bodyPr rtlCol="0" anchor="ctr"/>
+          <a:lstStyle/>
+          <a:p>
+            <a:pPr algn="ctr"/>
+            <a:r>
+              <a:rPr lang="en-US" altLang="ko-KR" dirty="0"/>
+              <a:t>App loop</a:t>
+            </a:r>
+            <a:endParaRPr lang="ko-KR" altLang="en-US" dirty="0"/>
+          </a:p>
+        </p:txBody>
+      </p:sp>
+      <p:cxnSp>
+        <p:nvCxnSpPr>
+          <p:cNvPr id="87" name="연결선: 꺾임 86">
+            <a:extLst>
+              <a:ext uri="{FF2B5EF4-FFF2-40B4-BE49-F238E27FC236}">
+                <a16:creationId xmlns:a16="http://schemas.microsoft.com/office/drawing/2014/main" id="{4750B28B-4A30-57EA-BE6F-29E249C30A07}"/>
+              </a:ext>
+            </a:extLst>
+          </p:cNvPr>
+          <p:cNvCxnSpPr>
+            <a:stCxn id="82" idx="3"/>
+            <a:endCxn id="47" idx="1"/>
+          </p:cNvCxnSpPr>
+          <p:nvPr/>
+        </p:nvCxnSpPr>
+        <p:spPr>
+          <a:xfrm>
+            <a:off x="2234045" y="3930162"/>
+            <a:ext cx="1077433" cy="504039"/>
+          </a:xfrm>
+          <a:prstGeom prst="bentConnector3">
+            <a:avLst>
+              <a:gd name="adj1" fmla="val 32551"/>
+            </a:avLst>
+          </a:prstGeom>
+          <a:ln w="63500">
+            <a:solidFill>
+              <a:srgbClr val="00B050"/>
+            </a:solidFill>
+            <a:tailEnd type="triangle"/>
+          </a:ln>
+        </p:spPr>
+        <p:style>
+          <a:lnRef idx="1">
+            <a:schemeClr val="accent1"/>
+          </a:lnRef>
+          <a:fillRef idx="0">
+            <a:schemeClr val="accent1"/>
+          </a:fillRef>
+          <a:effectRef idx="0">
+            <a:schemeClr val="accent1"/>
+          </a:effectRef>
+          <a:fontRef idx="minor">
+            <a:schemeClr val="tx1"/>
+          </a:fontRef>
+        </p:style>
+      </p:cxnSp>
+      <p:sp>
+        <p:nvSpPr>
+          <p:cNvPr id="97" name="사각형: 둥근 모서리 96">
+            <a:extLst>
+              <a:ext uri="{FF2B5EF4-FFF2-40B4-BE49-F238E27FC236}">
+                <a16:creationId xmlns:a16="http://schemas.microsoft.com/office/drawing/2014/main" id="{E1E14249-905C-5282-35CB-8D791661D7A0}"/>
+              </a:ext>
+            </a:extLst>
+          </p:cNvPr>
+          <p:cNvSpPr/>
+          <p:nvPr/>
+        </p:nvSpPr>
+        <p:spPr>
+          <a:xfrm>
+            <a:off x="3311478" y="3223821"/>
+            <a:ext cx="1931350" cy="341832"/>
+          </a:xfrm>
+          <a:prstGeom prst="roundRect">
+            <a:avLst/>
+          </a:prstGeom>
+          <a:solidFill>
+            <a:schemeClr val="accent2"/>
+          </a:solidFill>
+          <a:ln w="38100"/>
+        </p:spPr>
+        <p:style>
+          <a:lnRef idx="2">
+            <a:schemeClr val="accent1">
+              <a:shade val="15000"/>
+            </a:schemeClr>
+          </a:lnRef>
+          <a:fillRef idx="1">
+            <a:schemeClr val="accent1"/>
+          </a:fillRef>
+          <a:effectRef idx="0">
+            <a:schemeClr val="accent1"/>
+          </a:effectRef>
+          <a:fontRef idx="minor">
+            <a:schemeClr val="lt1"/>
+          </a:fontRef>
+        </p:style>
+        <p:txBody>
+          <a:bodyPr rtlCol="0" anchor="ctr"/>
+          <a:lstStyle/>
+          <a:p>
+            <a:pPr algn="ctr"/>
+            <a:r>
+              <a:rPr lang="en-US" altLang="ko-KR" dirty="0"/>
+              <a:t>SIM_SHM</a:t>
+            </a:r>
+            <a:endParaRPr lang="ko-KR" altLang="en-US" dirty="0"/>
+          </a:p>
+        </p:txBody>
+      </p:sp>
+      <p:sp>
+        <p:nvSpPr>
+          <p:cNvPr id="105" name="TextBox 104">
+            <a:extLst>
+              <a:ext uri="{FF2B5EF4-FFF2-40B4-BE49-F238E27FC236}">
+                <a16:creationId xmlns:a16="http://schemas.microsoft.com/office/drawing/2014/main" id="{F722DCFB-0E26-7AF9-5186-FF61DC268DE7}"/>
+              </a:ext>
+            </a:extLst>
+          </p:cNvPr>
+          <p:cNvSpPr txBox="1"/>
+          <p:nvPr/>
+        </p:nvSpPr>
+        <p:spPr>
+          <a:xfrm>
+            <a:off x="406871" y="5409508"/>
+            <a:ext cx="11582878" cy="1077218"/>
+          </a:xfrm>
+          <a:prstGeom prst="rect">
+            <a:avLst/>
+          </a:prstGeom>
+          <a:noFill/>
+        </p:spPr>
+        <p:txBody>
+          <a:bodyPr wrap="square">
+            <a:spAutoFit/>
+          </a:bodyPr>
+          <a:lstStyle/>
+          <a:p>
+            <a:r>
+              <a:rPr lang="ko-KR" altLang="en-US" sz="1600" dirty="0"/>
+              <a:t>상위 애플리케이션 루프</a:t>
+            </a:r>
+            <a:r>
+              <a:rPr lang="en-US" altLang="ko-KR" sz="1600" dirty="0"/>
+              <a:t>(App loop)</a:t>
+            </a:r>
+            <a:r>
+              <a:rPr lang="ko-KR" altLang="en-US" sz="1600" dirty="0"/>
+              <a:t>는 </a:t>
+            </a:r>
+            <a:r>
+              <a:rPr lang="en-US" altLang="ko-KR" sz="1600" dirty="0"/>
+              <a:t>IMU </a:t>
+            </a:r>
+            <a:r>
+              <a:rPr lang="ko-KR" altLang="en-US" sz="1600" dirty="0"/>
+              <a:t>및 </a:t>
+            </a:r>
+            <a:r>
+              <a:rPr lang="en-US" altLang="ko-KR" sz="1600" dirty="0"/>
+              <a:t>Attitude </a:t>
+            </a:r>
+            <a:r>
+              <a:rPr lang="ko-KR" altLang="en-US" sz="1600" dirty="0"/>
+              <a:t>계층의 공통 인터페이스</a:t>
+            </a:r>
+            <a:r>
+              <a:rPr lang="en-US" altLang="ko-KR" sz="1600" dirty="0"/>
+              <a:t>(IMU_IF, ATT_IF)</a:t>
+            </a:r>
+            <a:r>
+              <a:rPr lang="ko-KR" altLang="en-US" sz="1600" dirty="0"/>
+              <a:t>만을 호출하며</a:t>
+            </a:r>
+            <a:r>
+              <a:rPr lang="en-US" altLang="ko-KR" sz="1600" dirty="0"/>
+              <a:t>, </a:t>
+            </a:r>
+            <a:r>
+              <a:rPr lang="ko-KR" altLang="en-US" sz="1600" dirty="0"/>
+              <a:t>실제 구현은 내부적으로 교체 가능하도록 설계하였다</a:t>
+            </a:r>
+            <a:r>
+              <a:rPr lang="en-US" altLang="ko-KR" sz="1600" dirty="0"/>
+              <a:t>. </a:t>
+            </a:r>
+            <a:r>
+              <a:rPr lang="ko-KR" altLang="en-US" sz="1600" dirty="0"/>
+              <a:t>실 기체 환경에서는 </a:t>
+            </a:r>
+            <a:r>
+              <a:rPr lang="en-US" altLang="ko-KR" sz="1600" dirty="0"/>
+              <a:t>SPI </a:t>
+            </a:r>
+            <a:r>
+              <a:rPr lang="ko-KR" altLang="en-US" sz="1600" dirty="0"/>
+              <a:t>기반 </a:t>
+            </a:r>
+            <a:r>
+              <a:rPr lang="en-US" altLang="ko-KR" sz="1600" dirty="0"/>
+              <a:t>IMU </a:t>
+            </a:r>
+            <a:r>
+              <a:rPr lang="ko-KR" altLang="en-US" sz="1600" dirty="0"/>
+              <a:t>드라이버가 사용되며</a:t>
+            </a:r>
+            <a:r>
+              <a:rPr lang="en-US" altLang="ko-KR" sz="1600" dirty="0"/>
+              <a:t>, </a:t>
+            </a:r>
+            <a:r>
+              <a:rPr lang="ko-KR" altLang="en-US" sz="1600" dirty="0"/>
+              <a:t>시뮬레이터 환경에서는 </a:t>
+            </a:r>
+            <a:r>
+              <a:rPr lang="en-US" altLang="ko-KR" sz="1600" dirty="0"/>
+              <a:t>RPC </a:t>
+            </a:r>
+            <a:r>
+              <a:rPr lang="ko-KR" altLang="en-US" sz="1600" dirty="0"/>
+              <a:t>또는 </a:t>
+            </a:r>
+            <a:r>
+              <a:rPr lang="en-US" altLang="ko-KR" sz="1600" dirty="0"/>
+              <a:t>SHM </a:t>
+            </a:r>
+            <a:r>
+              <a:rPr lang="ko-KR" altLang="en-US" sz="1600" dirty="0"/>
+              <a:t>기반 가상 </a:t>
+            </a:r>
+            <a:r>
+              <a:rPr lang="en-US" altLang="ko-KR" sz="1600" dirty="0"/>
+              <a:t>IMU </a:t>
+            </a:r>
+            <a:r>
+              <a:rPr lang="ko-KR" altLang="en-US" sz="1600" dirty="0"/>
+              <a:t>구현이 선택적으로 적용된다</a:t>
+            </a:r>
+            <a:r>
+              <a:rPr lang="en-US" altLang="ko-KR" sz="1600" dirty="0"/>
+              <a:t>. </a:t>
+            </a:r>
+            <a:r>
+              <a:rPr lang="ko-KR" altLang="en-US" sz="1600" dirty="0"/>
+              <a:t>이러한 구조를 통해 통신 방식 및 실행 환경 변화에도 제어 루프의 구조와 동작을 동일하게 유지할 수 있다</a:t>
+            </a:r>
+            <a:r>
+              <a:rPr lang="en-US" altLang="ko-KR" sz="1600" dirty="0"/>
+              <a:t>.</a:t>
+            </a:r>
+            <a:endParaRPr lang="ko-KR" altLang="en-US" sz="1600" dirty="0"/>
+          </a:p>
+        </p:txBody>
+      </p:sp>
+    </p:spTree>
+    <p:extLst>
+      <p:ext uri="{BB962C8B-B14F-4D97-AF65-F5344CB8AC3E}">
+        <p14:creationId xmlns:p14="http://schemas.microsoft.com/office/powerpoint/2010/main" val="1186006806"/>
+      </p:ext>
+    </p:extLst>
+  </p:cSld>
+  <p:clrMapOvr>
+    <a:masterClrMapping/>
+  </p:clrMapOvr>
+</p:sld>
+</file>
+
+<file path=ppt/slides/slide11.xml><?xml version="1.0" encoding="utf-8"?>
+<p:sld xmlns:a="http://schemas.openxmlformats.org/drawingml/2006/main" xmlns:r="http://schemas.openxmlformats.org/officeDocument/2006/relationships" xmlns:p="http://schemas.openxmlformats.org/presentationml/2006/main">
+  <p:cSld>
+    <p:spTree>
+      <p:nvGrpSpPr>
+        <p:cNvPr id="1" name="">
+          <a:extLst>
+            <a:ext uri="{FF2B5EF4-FFF2-40B4-BE49-F238E27FC236}">
+              <a16:creationId xmlns:a16="http://schemas.microsoft.com/office/drawing/2014/main" id="{E75E8626-22D6-7C3F-72F7-17ACE98C5A6C}"/>
+            </a:ext>
+          </a:extLst>
+        </p:cNvPr>
+        <p:cNvGrpSpPr/>
+        <p:nvPr/>
+      </p:nvGrpSpPr>
+      <p:grpSpPr>
+        <a:xfrm>
+          <a:off x="0" y="0"/>
+          <a:ext cx="0" cy="0"/>
+          <a:chOff x="0" y="0"/>
+          <a:chExt cx="0" cy="0"/>
+        </a:xfrm>
+      </p:grpSpPr>
+      <p:sp>
+        <p:nvSpPr>
+          <p:cNvPr id="4" name="TextBox 3">
+            <a:extLst>
+              <a:ext uri="{FF2B5EF4-FFF2-40B4-BE49-F238E27FC236}">
+                <a16:creationId xmlns:a16="http://schemas.microsoft.com/office/drawing/2014/main" id="{1A1C0243-1A60-DB6B-A091-22FAFBFDB2C3}"/>
+              </a:ext>
+            </a:extLst>
+          </p:cNvPr>
+          <p:cNvSpPr txBox="1"/>
+          <p:nvPr/>
+        </p:nvSpPr>
+        <p:spPr>
+          <a:xfrm>
+            <a:off x="406871" y="173267"/>
+            <a:ext cx="11582878" cy="615553"/>
+          </a:xfrm>
+          <a:prstGeom prst="rect">
+            <a:avLst/>
+          </a:prstGeom>
+          <a:noFill/>
+        </p:spPr>
+        <p:txBody>
+          <a:bodyPr wrap="square" rtlCol="0">
+            <a:spAutoFit/>
+          </a:bodyPr>
+          <a:lstStyle/>
+          <a:p>
+            <a:r>
+              <a:rPr lang="en-US" altLang="ko-KR" b="1" dirty="0">
+                <a:latin typeface="+mj-lt"/>
+              </a:rPr>
+              <a:t>4. </a:t>
+            </a:r>
+            <a:r>
+              <a:rPr lang="ko-KR" altLang="en-US" b="1" dirty="0">
+                <a:latin typeface="+mj-lt"/>
+              </a:rPr>
+              <a:t>시뮬레이터 설계 </a:t>
+            </a:r>
+            <a:r>
+              <a:rPr lang="en-US" altLang="ko-KR" b="1" dirty="0">
+                <a:latin typeface="+mj-lt"/>
+              </a:rPr>
+              <a:t>– </a:t>
+            </a:r>
+            <a:r>
+              <a:rPr lang="en-US" altLang="ko-KR" b="1" dirty="0"/>
+              <a:t>Shared Memory(SHM) </a:t>
+            </a:r>
+            <a:r>
+              <a:rPr lang="ko-KR" altLang="en-US" b="1" dirty="0"/>
+              <a:t>기반 고속 통신 구조 설계</a:t>
+            </a:r>
+            <a:endParaRPr lang="en-US" altLang="ko-KR" b="1" dirty="0"/>
+          </a:p>
+          <a:p>
+            <a:r>
+              <a:rPr lang="en-US" altLang="ko-KR" sz="1600" dirty="0"/>
+              <a:t>  </a:t>
+            </a:r>
+          </a:p>
+        </p:txBody>
+      </p:sp>
+    </p:spTree>
+    <p:extLst>
+      <p:ext uri="{BB962C8B-B14F-4D97-AF65-F5344CB8AC3E}">
+        <p14:creationId xmlns:p14="http://schemas.microsoft.com/office/powerpoint/2010/main" val="1111353104"/>
       </p:ext>
     </p:extLst>
   </p:cSld>
@@ -9936,7 +12181,7 @@
         <p:spPr>
           <a:xfrm>
             <a:off x="406871" y="173267"/>
-            <a:ext cx="11077104" cy="369332"/>
+            <a:ext cx="11582878" cy="861774"/>
           </a:xfrm>
           <a:prstGeom prst="rect">
             <a:avLst/>
@@ -9968,32 +12213,217 @@
               <a:t>– </a:t>
             </a:r>
             <a:r>
-              <a:rPr lang="ko-KR" altLang="en-US" b="1" dirty="0">
-                <a:latin typeface="+mj-lt"/>
-              </a:rPr>
-              <a:t>기존 </a:t>
-            </a:r>
-            <a:r>
-              <a:rPr lang="en-US" altLang="ko-KR" b="1" dirty="0">
-                <a:latin typeface="+mj-lt"/>
-              </a:rPr>
+              <a:rPr lang="ko-KR" altLang="en-US" b="1" dirty="0"/>
+              <a:t>기존 시뮬레이터 한계 검증</a:t>
+            </a:r>
+            <a:endParaRPr lang="en-US" altLang="ko-KR" b="1" dirty="0"/>
+          </a:p>
+          <a:p>
+            <a:r>
+              <a:rPr lang="en-US" altLang="ko-KR" sz="1600" dirty="0"/>
+              <a:t>  </a:t>
+            </a:r>
+          </a:p>
+          <a:p>
+            <a:r>
+              <a:rPr lang="en-US" altLang="ko-KR" sz="1600" dirty="0"/>
               <a:t>RPC </a:t>
             </a:r>
             <a:r>
-              <a:rPr lang="ko-KR" altLang="en-US" b="1" dirty="0">
-                <a:latin typeface="+mj-lt"/>
-              </a:rPr>
-              <a:t>방식 성능 실험</a:t>
-            </a:r>
-          </a:p>
-        </p:txBody>
-      </p:sp>
-      <p:sp>
-        <p:nvSpPr>
-          <p:cNvPr id="5" name="TextBox 4">
-            <a:extLst>
-              <a:ext uri="{FF2B5EF4-FFF2-40B4-BE49-F238E27FC236}">
-                <a16:creationId xmlns:a16="http://schemas.microsoft.com/office/drawing/2014/main" id="{916B54A5-AF30-C348-0220-7C50418AA7E2}"/>
+              <a:rPr lang="ko-KR" altLang="en-US" sz="1600" dirty="0"/>
+              <a:t>기반 </a:t>
+            </a:r>
+            <a:r>
+              <a:rPr lang="en-US" altLang="ko-KR" sz="1600" dirty="0" err="1"/>
+              <a:t>AirSim</a:t>
+            </a:r>
+            <a:r>
+              <a:rPr lang="en-US" altLang="ko-KR" sz="1600" dirty="0"/>
+              <a:t> </a:t>
+            </a:r>
+            <a:r>
+              <a:rPr lang="ko-KR" altLang="en-US" sz="1600" dirty="0"/>
+              <a:t>환경에서 </a:t>
+            </a:r>
+            <a:r>
+              <a:rPr lang="en-US" altLang="ko-KR" sz="1600" dirty="0"/>
+              <a:t>1 kHz IMU </a:t>
+            </a:r>
+            <a:r>
+              <a:rPr lang="ko-KR" altLang="en-US" sz="1600" dirty="0"/>
+              <a:t>데이터 수집 시</a:t>
+            </a:r>
+            <a:r>
+              <a:rPr lang="en-US" altLang="ko-KR" sz="1600" dirty="0"/>
+              <a:t>, </a:t>
+            </a:r>
+            <a:r>
+              <a:rPr lang="ko-KR" altLang="en-US" sz="1600" dirty="0"/>
+              <a:t>샘플 주기의 정확성</a:t>
+            </a:r>
+            <a:r>
+              <a:rPr lang="en-US" altLang="ko-KR" sz="1600" dirty="0"/>
+              <a:t>·</a:t>
+            </a:r>
+            <a:r>
+              <a:rPr lang="ko-KR" altLang="en-US" sz="1600" dirty="0"/>
+              <a:t>지연</a:t>
+            </a:r>
+            <a:r>
+              <a:rPr lang="en-US" altLang="ko-KR" sz="1600" dirty="0"/>
+              <a:t>·</a:t>
+            </a:r>
+            <a:r>
+              <a:rPr lang="ko-KR" altLang="en-US" sz="1600" dirty="0" err="1"/>
+              <a:t>지터</a:t>
+            </a:r>
+            <a:r>
+              <a:rPr lang="ko-KR" altLang="en-US" sz="1600" dirty="0"/>
+              <a:t> 특성을 정량적으로 검증한다</a:t>
+            </a:r>
+            <a:r>
+              <a:rPr lang="en-US" altLang="ko-KR" sz="1600" dirty="0"/>
+              <a:t>.</a:t>
+            </a:r>
+            <a:endParaRPr lang="ko-KR" altLang="en-US" sz="1600" b="1" dirty="0">
+              <a:latin typeface="+mj-lt"/>
+            </a:endParaRPr>
+          </a:p>
+        </p:txBody>
+      </p:sp>
+      <p:sp>
+        <p:nvSpPr>
+          <p:cNvPr id="6" name="직사각형 5">
+            <a:extLst>
+              <a:ext uri="{FF2B5EF4-FFF2-40B4-BE49-F238E27FC236}">
+                <a16:creationId xmlns:a16="http://schemas.microsoft.com/office/drawing/2014/main" id="{D12DEAE2-5933-FE4B-9ADF-4C7EEB440AB8}"/>
+              </a:ext>
+            </a:extLst>
+          </p:cNvPr>
+          <p:cNvSpPr/>
+          <p:nvPr/>
+        </p:nvSpPr>
+        <p:spPr>
+          <a:xfrm>
+            <a:off x="658025" y="2127905"/>
+            <a:ext cx="1452786" cy="830998"/>
+          </a:xfrm>
+          <a:prstGeom prst="rect">
+            <a:avLst/>
+          </a:prstGeom>
+        </p:spPr>
+        <p:style>
+          <a:lnRef idx="2">
+            <a:schemeClr val="accent1">
+              <a:shade val="15000"/>
+            </a:schemeClr>
+          </a:lnRef>
+          <a:fillRef idx="1">
+            <a:schemeClr val="accent1"/>
+          </a:fillRef>
+          <a:effectRef idx="0">
+            <a:schemeClr val="accent1"/>
+          </a:effectRef>
+          <a:fontRef idx="minor">
+            <a:schemeClr val="lt1"/>
+          </a:fontRef>
+        </p:style>
+        <p:txBody>
+          <a:bodyPr rtlCol="0" anchor="ctr"/>
+          <a:lstStyle/>
+          <a:p>
+            <a:pPr algn="ctr"/>
+            <a:r>
+              <a:rPr lang="en-US" altLang="ko-KR" b="1" dirty="0" err="1"/>
+              <a:t>AirSim</a:t>
+            </a:r>
+            <a:endParaRPr lang="en-US" altLang="ko-KR" b="1" dirty="0"/>
+          </a:p>
+          <a:p>
+            <a:pPr algn="ctr"/>
+            <a:r>
+              <a:rPr lang="en-US" altLang="ko-KR" b="1" dirty="0"/>
+              <a:t>(IMU)</a:t>
+            </a:r>
+            <a:endParaRPr lang="ko-KR" altLang="en-US" b="1" dirty="0"/>
+          </a:p>
+        </p:txBody>
+      </p:sp>
+      <p:sp>
+        <p:nvSpPr>
+          <p:cNvPr id="7" name="직사각형 6">
+            <a:extLst>
+              <a:ext uri="{FF2B5EF4-FFF2-40B4-BE49-F238E27FC236}">
+                <a16:creationId xmlns:a16="http://schemas.microsoft.com/office/drawing/2014/main" id="{7F861B4E-3670-64FE-7763-5693466D1083}"/>
+              </a:ext>
+            </a:extLst>
+          </p:cNvPr>
+          <p:cNvSpPr/>
+          <p:nvPr/>
+        </p:nvSpPr>
+        <p:spPr>
+          <a:xfrm>
+            <a:off x="4676682" y="1286979"/>
+            <a:ext cx="6432852" cy="2037335"/>
+          </a:xfrm>
+          <a:prstGeom prst="rect">
+            <a:avLst/>
+          </a:prstGeom>
+        </p:spPr>
+        <p:style>
+          <a:lnRef idx="2">
+            <a:schemeClr val="accent1">
+              <a:shade val="15000"/>
+            </a:schemeClr>
+          </a:lnRef>
+          <a:fillRef idx="1">
+            <a:schemeClr val="accent1"/>
+          </a:fillRef>
+          <a:effectRef idx="0">
+            <a:schemeClr val="accent1"/>
+          </a:effectRef>
+          <a:fontRef idx="minor">
+            <a:schemeClr val="lt1"/>
+          </a:fontRef>
+        </p:style>
+        <p:txBody>
+          <a:bodyPr rtlCol="0" anchor="ctr"/>
+          <a:lstStyle/>
+          <a:p>
+            <a:pPr algn="ctr"/>
+            <a:r>
+              <a:rPr lang="en-US" altLang="ko-KR" b="1" dirty="0"/>
+              <a:t>SIL Application</a:t>
+            </a:r>
+          </a:p>
+          <a:p>
+            <a:pPr algn="ctr"/>
+            <a:endParaRPr lang="en-US" altLang="ko-KR" b="1" dirty="0"/>
+          </a:p>
+          <a:p>
+            <a:pPr algn="ctr"/>
+            <a:endParaRPr lang="en-US" altLang="ko-KR" b="1" dirty="0"/>
+          </a:p>
+          <a:p>
+            <a:pPr algn="ctr"/>
+            <a:endParaRPr lang="en-US" altLang="ko-KR" b="1" dirty="0"/>
+          </a:p>
+          <a:p>
+            <a:pPr algn="ctr"/>
+            <a:endParaRPr lang="en-US" altLang="ko-KR" b="1" dirty="0"/>
+          </a:p>
+          <a:p>
+            <a:pPr algn="ctr"/>
+            <a:endParaRPr lang="en-US" altLang="ko-KR" b="1" dirty="0"/>
+          </a:p>
+        </p:txBody>
+      </p:sp>
+      <p:sp>
+        <p:nvSpPr>
+          <p:cNvPr id="12" name="TextBox 11">
+            <a:extLst>
+              <a:ext uri="{FF2B5EF4-FFF2-40B4-BE49-F238E27FC236}">
+                <a16:creationId xmlns:a16="http://schemas.microsoft.com/office/drawing/2014/main" id="{50014038-7E5B-8034-0353-432DEDC1DD90}"/>
               </a:ext>
             </a:extLst>
           </p:cNvPr>
@@ -10002,8 +12432,8 @@
         </p:nvSpPr>
         <p:spPr>
           <a:xfrm>
-            <a:off x="406870" y="696286"/>
-            <a:ext cx="11547441" cy="1569660"/>
+            <a:off x="2798749" y="2128584"/>
+            <a:ext cx="1696339" cy="369332"/>
           </a:xfrm>
           <a:prstGeom prst="rect">
             <a:avLst/>
@@ -10016,133 +12446,441 @@
           </a:bodyPr>
           <a:lstStyle/>
           <a:p>
-            <a:r>
-              <a:rPr lang="en-US" altLang="ko-KR" sz="1400" b="1" dirty="0"/>
-              <a:t>4.1 </a:t>
-            </a:r>
-            <a:r>
-              <a:rPr lang="ko-KR" altLang="en-US" sz="1400" b="1" dirty="0"/>
-              <a:t>실험 목적</a:t>
-            </a:r>
-          </a:p>
-          <a:p>
+            <a:pPr algn="ctr"/>
+            <a:r>
+              <a:rPr lang="en-US" altLang="ko-KR" dirty="0"/>
+              <a:t>RPC 1000 Hz</a:t>
+            </a:r>
+            <a:endParaRPr lang="ko-KR" altLang="en-US" dirty="0"/>
+          </a:p>
+        </p:txBody>
+      </p:sp>
+      <p:sp>
+        <p:nvSpPr>
+          <p:cNvPr id="13" name="TextBox 12">
+            <a:extLst>
+              <a:ext uri="{FF2B5EF4-FFF2-40B4-BE49-F238E27FC236}">
+                <a16:creationId xmlns:a16="http://schemas.microsoft.com/office/drawing/2014/main" id="{36C32239-F942-8488-2ECC-47E7624E696C}"/>
+              </a:ext>
+            </a:extLst>
+          </p:cNvPr>
+          <p:cNvSpPr txBox="1"/>
+          <p:nvPr/>
+        </p:nvSpPr>
+        <p:spPr>
+          <a:xfrm>
+            <a:off x="2201609" y="2568445"/>
+            <a:ext cx="2835778" cy="369332"/>
+          </a:xfrm>
+          <a:prstGeom prst="rect">
+            <a:avLst/>
+          </a:prstGeom>
+          <a:noFill/>
+        </p:spPr>
+        <p:txBody>
+          <a:bodyPr wrap="square" rtlCol="0">
+            <a:spAutoFit/>
+          </a:bodyPr>
+          <a:lstStyle/>
+          <a:p>
+            <a:pPr algn="ctr"/>
+            <a:r>
+              <a:rPr lang="ko-KR" altLang="en-US" dirty="0"/>
+              <a:t>지연</a:t>
+            </a:r>
+            <a:r>
+              <a:rPr lang="en-US" altLang="ko-KR" dirty="0"/>
+              <a:t>, </a:t>
+            </a:r>
+            <a:r>
+              <a:rPr lang="ko-KR" altLang="en-US" dirty="0" err="1"/>
+              <a:t>지터</a:t>
+            </a:r>
+            <a:r>
+              <a:rPr lang="ko-KR" altLang="en-US" dirty="0"/>
+              <a:t> 검출</a:t>
+            </a:r>
+          </a:p>
+        </p:txBody>
+      </p:sp>
+      <p:sp>
+        <p:nvSpPr>
+          <p:cNvPr id="17" name="사각형: 둥근 모서리 16">
+            <a:extLst>
+              <a:ext uri="{FF2B5EF4-FFF2-40B4-BE49-F238E27FC236}">
+                <a16:creationId xmlns:a16="http://schemas.microsoft.com/office/drawing/2014/main" id="{09DBCC8E-B3E6-166B-2C0A-D37A6852813D}"/>
+              </a:ext>
+            </a:extLst>
+          </p:cNvPr>
+          <p:cNvSpPr/>
+          <p:nvPr/>
+        </p:nvSpPr>
+        <p:spPr>
+          <a:xfrm>
+            <a:off x="5128185" y="2126525"/>
+            <a:ext cx="2178470" cy="1009782"/>
+          </a:xfrm>
+          <a:prstGeom prst="roundRect">
+            <a:avLst/>
+          </a:prstGeom>
+          <a:solidFill>
+            <a:schemeClr val="tx2">
+              <a:lumMod val="25000"/>
+            </a:schemeClr>
+          </a:solidFill>
+        </p:spPr>
+        <p:style>
+          <a:lnRef idx="2">
+            <a:schemeClr val="accent1">
+              <a:shade val="15000"/>
+            </a:schemeClr>
+          </a:lnRef>
+          <a:fillRef idx="1">
+            <a:schemeClr val="accent1"/>
+          </a:fillRef>
+          <a:effectRef idx="0">
+            <a:schemeClr val="accent1"/>
+          </a:effectRef>
+          <a:fontRef idx="minor">
+            <a:schemeClr val="lt1"/>
+          </a:fontRef>
+        </p:style>
+        <p:txBody>
+          <a:bodyPr rtlCol="0" anchor="ctr"/>
+          <a:lstStyle/>
+          <a:p>
+            <a:pPr algn="ctr"/>
+            <a:r>
+              <a:rPr lang="en-US" altLang="ko-KR" b="1" dirty="0"/>
+              <a:t>Telemetry thread</a:t>
+            </a:r>
+          </a:p>
+          <a:p>
+            <a:r>
+              <a:rPr lang="en-US" altLang="ko-KR" dirty="0"/>
+              <a:t>- IMU Request</a:t>
+            </a:r>
+          </a:p>
+          <a:p>
+            <a:r>
+              <a:rPr lang="en-US" altLang="ko-KR" dirty="0"/>
+              <a:t>- Timestamping</a:t>
+            </a:r>
+            <a:endParaRPr lang="ko-KR" altLang="en-US" dirty="0"/>
+          </a:p>
+        </p:txBody>
+      </p:sp>
+      <p:sp>
+        <p:nvSpPr>
+          <p:cNvPr id="20" name="사각형: 둥근 모서리 19">
+            <a:extLst>
+              <a:ext uri="{FF2B5EF4-FFF2-40B4-BE49-F238E27FC236}">
+                <a16:creationId xmlns:a16="http://schemas.microsoft.com/office/drawing/2014/main" id="{FCF136CE-F4D9-DB77-C994-1BE56DAECFA3}"/>
+              </a:ext>
+            </a:extLst>
+          </p:cNvPr>
+          <p:cNvSpPr/>
+          <p:nvPr/>
+        </p:nvSpPr>
+        <p:spPr>
+          <a:xfrm>
+            <a:off x="8609881" y="2126525"/>
+            <a:ext cx="2178470" cy="1009782"/>
+          </a:xfrm>
+          <a:prstGeom prst="roundRect">
+            <a:avLst/>
+          </a:prstGeom>
+          <a:solidFill>
+            <a:schemeClr val="tx2">
+              <a:lumMod val="25000"/>
+            </a:schemeClr>
+          </a:solidFill>
+        </p:spPr>
+        <p:style>
+          <a:lnRef idx="2">
+            <a:schemeClr val="accent1">
+              <a:shade val="15000"/>
+            </a:schemeClr>
+          </a:lnRef>
+          <a:fillRef idx="1">
+            <a:schemeClr val="accent1"/>
+          </a:fillRef>
+          <a:effectRef idx="0">
+            <a:schemeClr val="accent1"/>
+          </a:effectRef>
+          <a:fontRef idx="minor">
+            <a:schemeClr val="lt1"/>
+          </a:fontRef>
+        </p:style>
+        <p:txBody>
+          <a:bodyPr rtlCol="0" anchor="ctr"/>
+          <a:lstStyle/>
+          <a:p>
+            <a:pPr algn="ctr"/>
+            <a:r>
+              <a:rPr lang="en-US" altLang="ko-KR" b="1" dirty="0"/>
+              <a:t>Monitor Thread</a:t>
+            </a:r>
+          </a:p>
+          <a:p>
+            <a:r>
+              <a:rPr lang="en-US" altLang="ko-KR" dirty="0"/>
+              <a:t> - Latency</a:t>
+            </a:r>
+          </a:p>
+          <a:p>
+            <a:r>
+              <a:rPr lang="ko-KR" altLang="en-US" dirty="0"/>
+              <a:t> </a:t>
+            </a:r>
+            <a:r>
+              <a:rPr lang="en-US" altLang="ko-KR" dirty="0"/>
+              <a:t>- jitter</a:t>
+            </a:r>
+            <a:endParaRPr lang="ko-KR" altLang="en-US" dirty="0"/>
+          </a:p>
+        </p:txBody>
+      </p:sp>
+      <p:sp>
+        <p:nvSpPr>
+          <p:cNvPr id="21" name="화살표: 왼쪽/오른쪽 20">
+            <a:extLst>
+              <a:ext uri="{FF2B5EF4-FFF2-40B4-BE49-F238E27FC236}">
+                <a16:creationId xmlns:a16="http://schemas.microsoft.com/office/drawing/2014/main" id="{F8E3969C-168E-E28F-11E2-87ED471DBCE7}"/>
+              </a:ext>
+            </a:extLst>
+          </p:cNvPr>
+          <p:cNvSpPr/>
+          <p:nvPr/>
+        </p:nvSpPr>
+        <p:spPr>
+          <a:xfrm>
+            <a:off x="7488249" y="2426655"/>
+            <a:ext cx="940038" cy="230736"/>
+          </a:xfrm>
+          <a:prstGeom prst="leftRightArrow">
+            <a:avLst/>
+          </a:prstGeom>
+          <a:solidFill>
+            <a:schemeClr val="tx1"/>
+          </a:solidFill>
+        </p:spPr>
+        <p:style>
+          <a:lnRef idx="2">
+            <a:schemeClr val="accent1">
+              <a:shade val="15000"/>
+            </a:schemeClr>
+          </a:lnRef>
+          <a:fillRef idx="1">
+            <a:schemeClr val="accent1"/>
+          </a:fillRef>
+          <a:effectRef idx="0">
+            <a:schemeClr val="accent1"/>
+          </a:effectRef>
+          <a:fontRef idx="minor">
+            <a:schemeClr val="lt1"/>
+          </a:fontRef>
+        </p:style>
+        <p:txBody>
+          <a:bodyPr rtlCol="0" anchor="ctr"/>
+          <a:lstStyle/>
+          <a:p>
+            <a:pPr algn="ctr"/>
+            <a:endParaRPr lang="ko-KR" altLang="en-US"/>
+          </a:p>
+        </p:txBody>
+      </p:sp>
+      <p:sp>
+        <p:nvSpPr>
+          <p:cNvPr id="24" name="화살표: 오른쪽 23">
+            <a:extLst>
+              <a:ext uri="{FF2B5EF4-FFF2-40B4-BE49-F238E27FC236}">
+                <a16:creationId xmlns:a16="http://schemas.microsoft.com/office/drawing/2014/main" id="{25559AF7-BAE3-0BF2-5B55-94B533D0CB5B}"/>
+              </a:ext>
+            </a:extLst>
+          </p:cNvPr>
+          <p:cNvSpPr/>
+          <p:nvPr/>
+        </p:nvSpPr>
+        <p:spPr>
+          <a:xfrm>
+            <a:off x="2245044" y="2426655"/>
+            <a:ext cx="2792343" cy="195283"/>
+          </a:xfrm>
+          <a:prstGeom prst="rightArrow">
+            <a:avLst/>
+          </a:prstGeom>
+          <a:solidFill>
+            <a:schemeClr val="tx1"/>
+          </a:solidFill>
+        </p:spPr>
+        <p:style>
+          <a:lnRef idx="2">
+            <a:schemeClr val="accent1">
+              <a:shade val="15000"/>
+            </a:schemeClr>
+          </a:lnRef>
+          <a:fillRef idx="1">
+            <a:schemeClr val="accent1"/>
+          </a:fillRef>
+          <a:effectRef idx="0">
+            <a:schemeClr val="accent1"/>
+          </a:effectRef>
+          <a:fontRef idx="minor">
+            <a:schemeClr val="lt1"/>
+          </a:fontRef>
+        </p:style>
+        <p:txBody>
+          <a:bodyPr rtlCol="0" anchor="ctr"/>
+          <a:lstStyle/>
+          <a:p>
+            <a:pPr algn="ctr"/>
+            <a:endParaRPr lang="ko-KR" altLang="en-US"/>
+          </a:p>
+        </p:txBody>
+      </p:sp>
+      <p:sp>
+        <p:nvSpPr>
+          <p:cNvPr id="26" name="TextBox 25">
+            <a:extLst>
+              <a:ext uri="{FF2B5EF4-FFF2-40B4-BE49-F238E27FC236}">
+                <a16:creationId xmlns:a16="http://schemas.microsoft.com/office/drawing/2014/main" id="{CFE52A30-513C-6847-D619-EA7B06038FB1}"/>
+              </a:ext>
+            </a:extLst>
+          </p:cNvPr>
+          <p:cNvSpPr txBox="1"/>
+          <p:nvPr/>
+        </p:nvSpPr>
+        <p:spPr>
+          <a:xfrm>
+            <a:off x="406870" y="3607029"/>
+            <a:ext cx="11582879" cy="584775"/>
+          </a:xfrm>
+          <a:prstGeom prst="rect">
+            <a:avLst/>
+          </a:prstGeom>
+          <a:noFill/>
+        </p:spPr>
+        <p:txBody>
+          <a:bodyPr wrap="square">
+            <a:spAutoFit/>
+          </a:bodyPr>
+          <a:lstStyle/>
+          <a:p>
+            <a:r>
+              <a:rPr lang="en-US" altLang="ko-KR" sz="1600" dirty="0"/>
+              <a:t>SIL </a:t>
+            </a:r>
             <a:r>
               <a:rPr lang="ko-KR" altLang="en-US" sz="1600" dirty="0"/>
-              <a:t>기존 </a:t>
-            </a:r>
-            <a:r>
-              <a:rPr lang="ko-KR" altLang="en-US" sz="1600" dirty="0" err="1"/>
-              <a:t>드론</a:t>
+              <a:t>애플리케이션은 </a:t>
+            </a:r>
+            <a:r>
+              <a:rPr lang="en-US" altLang="ko-KR" sz="1600" dirty="0"/>
+              <a:t>1 kHz </a:t>
             </a:r>
             <a:r>
               <a:rPr lang="ko-KR" altLang="en-US" sz="1600" dirty="0"/>
-              <a:t> 시뮬레이터</a:t>
+              <a:t>고정 주기로 </a:t>
             </a:r>
             <a:r>
               <a:rPr lang="en-US" altLang="ko-KR" sz="1600" dirty="0"/>
-              <a:t>(</a:t>
-            </a:r>
-            <a:r>
-              <a:rPr lang="en-US" altLang="ko-KR" sz="1600" dirty="0" err="1"/>
-              <a:t>AirSim</a:t>
+              <a:t>RPC </a:t>
+            </a:r>
+            <a:r>
+              <a:rPr lang="ko-KR" altLang="en-US" sz="1600" dirty="0"/>
+              <a:t>기반 </a:t>
             </a:r>
             <a:r>
               <a:rPr lang="en-US" altLang="ko-KR" sz="1600" dirty="0"/>
-              <a:t>)</a:t>
+              <a:t>IMU </a:t>
             </a:r>
             <a:r>
               <a:rPr lang="ko-KR" altLang="en-US" sz="1600" dirty="0"/>
-              <a:t>의 </a:t>
-            </a:r>
-            <a:r>
-              <a:rPr lang="en-US" altLang="ko-KR" sz="1600" b="1" dirty="0"/>
-              <a:t>RPC </a:t>
-            </a:r>
-            <a:r>
-              <a:rPr lang="ko-KR" altLang="en-US" sz="1600" b="1" dirty="0"/>
-              <a:t>기반 </a:t>
-            </a:r>
-            <a:r>
-              <a:rPr lang="en-US" altLang="ko-KR" sz="1600" b="1" dirty="0"/>
-              <a:t>IMU </a:t>
-            </a:r>
-            <a:r>
-              <a:rPr lang="ko-KR" altLang="en-US" sz="1600" b="1" dirty="0"/>
-              <a:t>데이터 수집 구조가</a:t>
-            </a:r>
-            <a:endParaRPr lang="ko-KR" altLang="en-US" sz="1600" dirty="0"/>
-          </a:p>
-          <a:p>
-            <a:pPr lvl="1"/>
+              <a:t>요청을 수행하며</a:t>
+            </a:r>
+            <a:r>
+              <a:rPr lang="en-US" altLang="ko-KR" sz="1600" dirty="0"/>
+              <a:t>, Telemetry–Monitor </a:t>
+            </a:r>
             <a:r>
               <a:rPr lang="ko-KR" altLang="en-US" sz="1600" dirty="0"/>
-              <a:t>고주파</a:t>
-            </a:r>
-            <a:r>
-              <a:rPr lang="en-US" altLang="ko-KR" sz="1600" dirty="0"/>
-              <a:t>(≥1 kHz) </a:t>
-            </a:r>
-            <a:r>
-              <a:rPr lang="ko-KR" altLang="en-US" sz="1600" dirty="0"/>
-              <a:t>센서 루프에 적합한지</a:t>
-            </a:r>
-          </a:p>
-          <a:p>
-            <a:pPr lvl="1"/>
-            <a:r>
-              <a:rPr lang="ko-KR" altLang="en-US" sz="1600" dirty="0"/>
-              <a:t>지연</a:t>
-            </a:r>
-            <a:r>
-              <a:rPr lang="en-US" altLang="ko-KR" sz="1600" dirty="0"/>
-              <a:t>(latency) </a:t>
-            </a:r>
-            <a:r>
-              <a:rPr lang="ko-KR" altLang="en-US" sz="1600" dirty="0"/>
-              <a:t>및 </a:t>
+              <a:t>스레드 분리를 통해 통신 경로에서 발생하는 지연 및 </a:t>
             </a:r>
             <a:r>
               <a:rPr lang="ko-KR" altLang="en-US" sz="1600" dirty="0" err="1"/>
               <a:t>지터</a:t>
             </a:r>
             <a:r>
+              <a:rPr lang="ko-KR" altLang="en-US" sz="1600" dirty="0"/>
+              <a:t> 특성을 정량적으로 측정한다</a:t>
+            </a:r>
+            <a:r>
               <a:rPr lang="en-US" altLang="ko-KR" sz="1600" dirty="0"/>
-              <a:t>(jitter) </a:t>
-            </a:r>
-            <a:r>
-              <a:rPr lang="ko-KR" altLang="en-US" sz="1600" dirty="0"/>
-              <a:t>특성이 </a:t>
-            </a:r>
-            <a:r>
-              <a:rPr lang="ko-KR" altLang="en-US" sz="1600" dirty="0" err="1"/>
-              <a:t>어떠한지</a:t>
+              <a:t>.</a:t>
             </a:r>
             <a:endParaRPr lang="ko-KR" altLang="en-US" sz="1600" dirty="0"/>
           </a:p>
-          <a:p>
-            <a:r>
-              <a:rPr lang="ko-KR" altLang="en-US" sz="1600" dirty="0"/>
-              <a:t>이후 제안하는 </a:t>
-            </a:r>
-            <a:r>
-              <a:rPr lang="en-US" altLang="ko-KR" sz="1600" b="1" dirty="0"/>
-              <a:t>SHM </a:t>
-            </a:r>
-            <a:r>
-              <a:rPr lang="ko-KR" altLang="en-US" sz="1600" b="1" dirty="0"/>
-              <a:t>기반 구조와의 비교 기준</a:t>
-            </a:r>
-            <a:r>
-              <a:rPr lang="en-US" altLang="ko-KR" sz="1600" b="1" dirty="0"/>
-              <a:t>(baseline)</a:t>
-            </a:r>
-            <a:r>
-              <a:rPr lang="ko-KR" altLang="en-US" sz="1600" dirty="0"/>
-              <a:t> 확보</a:t>
-            </a:r>
-          </a:p>
-          <a:p>
-            <a:endParaRPr lang="ko-KR" altLang="en-US" dirty="0"/>
+        </p:txBody>
+      </p:sp>
+      <p:sp>
+        <p:nvSpPr>
+          <p:cNvPr id="27" name="TextBox 26">
+            <a:extLst>
+              <a:ext uri="{FF2B5EF4-FFF2-40B4-BE49-F238E27FC236}">
+                <a16:creationId xmlns:a16="http://schemas.microsoft.com/office/drawing/2014/main" id="{581C63B4-69C3-4C1D-6A29-9E9742F5FF1E}"/>
+              </a:ext>
+            </a:extLst>
+          </p:cNvPr>
+          <p:cNvSpPr txBox="1"/>
+          <p:nvPr/>
+        </p:nvSpPr>
+        <p:spPr>
+          <a:xfrm>
+            <a:off x="406871" y="5024648"/>
+            <a:ext cx="11582878" cy="400110"/>
+          </a:xfrm>
+          <a:prstGeom prst="rect">
+            <a:avLst/>
+          </a:prstGeom>
+          <a:noFill/>
+        </p:spPr>
+        <p:txBody>
+          <a:bodyPr wrap="square">
+            <a:spAutoFit/>
+          </a:bodyPr>
+          <a:lstStyle/>
+          <a:p>
+            <a:pPr algn="ctr"/>
+            <a:r>
+              <a:rPr lang="en-US" altLang="ko-KR" sz="2000" dirty="0">
+                <a:solidFill>
+                  <a:srgbClr val="FFC000"/>
+                </a:solidFill>
+              </a:rPr>
+              <a:t>- </a:t>
+            </a:r>
+            <a:r>
+              <a:rPr lang="ko-KR" altLang="en-US" sz="2000" dirty="0">
+                <a:solidFill>
+                  <a:srgbClr val="FFC000"/>
+                </a:solidFill>
+              </a:rPr>
+              <a:t>실험 결과 </a:t>
+            </a:r>
+            <a:r>
+              <a:rPr lang="en-US" altLang="ko-KR" sz="2000" dirty="0">
+                <a:solidFill>
+                  <a:srgbClr val="FFC000"/>
+                </a:solidFill>
+              </a:rPr>
+              <a:t>-</a:t>
+            </a:r>
+            <a:endParaRPr lang="ko-KR" altLang="en-US" sz="2000" dirty="0">
+              <a:solidFill>
+                <a:srgbClr val="FFC000"/>
+              </a:solidFill>
+            </a:endParaRPr>
           </a:p>
         </p:txBody>
       </p:sp>

--- a/x_memory/docs2/논문연구I-발표자료.pptx
+++ b/x_memory/docs2/논문연구I-발표자료.pptx
@@ -5,7 +5,7 @@
     <p:sldMasterId id="2147483648" r:id="rId1"/>
   </p:sldMasterIdLst>
   <p:notesMasterIdLst>
-    <p:notesMasterId r:id="rId13"/>
+    <p:notesMasterId r:id="rId14"/>
   </p:notesMasterIdLst>
   <p:sldIdLst>
     <p:sldId id="259" r:id="rId2"/>
@@ -19,6 +19,7 @@
     <p:sldId id="264" r:id="rId10"/>
     <p:sldId id="265" r:id="rId11"/>
     <p:sldId id="266" r:id="rId12"/>
+    <p:sldId id="267" r:id="rId13"/>
   </p:sldIdLst>
   <p:sldSz cx="12192000" cy="6858000"/>
   <p:notesSz cx="6858000" cy="9144000"/>
@@ -644,6 +645,296 @@
           <a:bodyPr/>
           <a:lstStyle/>
           <a:p>
+            <a:r>
+              <a:rPr lang="ko-KR" altLang="en-US" dirty="0"/>
+              <a:t>상단의 </a:t>
+            </a:r>
+            <a:r>
+              <a:rPr lang="en-US" altLang="ko-KR" dirty="0" err="1"/>
+              <a:t>AirSim</a:t>
+            </a:r>
+            <a:r>
+              <a:rPr lang="ko-KR" altLang="en-US" dirty="0"/>
+              <a:t>은 물리 엔진 기반 시뮬레이터로</a:t>
+            </a:r>
+            <a:r>
+              <a:rPr lang="en-US" altLang="ko-KR" dirty="0"/>
+              <a:t>, IMU, </a:t>
+            </a:r>
+            <a:r>
+              <a:rPr lang="ko-KR" altLang="en-US" dirty="0"/>
+              <a:t>바로미터</a:t>
+            </a:r>
+            <a:r>
+              <a:rPr lang="en-US" altLang="ko-KR" dirty="0"/>
+              <a:t>, </a:t>
+            </a:r>
+            <a:r>
+              <a:rPr lang="ko-KR" altLang="en-US" dirty="0" err="1"/>
+              <a:t>자기계</a:t>
+            </a:r>
+            <a:r>
+              <a:rPr lang="ko-KR" altLang="en-US" dirty="0"/>
+              <a:t> 센서 데이터를 생성하고</a:t>
+            </a:r>
+            <a:r>
+              <a:rPr lang="en-US" altLang="ko-KR" dirty="0"/>
+              <a:t>, </a:t>
+            </a:r>
+            <a:r>
+              <a:rPr lang="ko-KR" altLang="en-US" dirty="0"/>
+              <a:t>동시에 </a:t>
+            </a:r>
+            <a:r>
+              <a:rPr lang="ko-KR" altLang="en-US" dirty="0" err="1"/>
+              <a:t>로터</a:t>
+            </a:r>
+            <a:r>
+              <a:rPr lang="ko-KR" altLang="en-US" dirty="0"/>
+              <a:t> </a:t>
+            </a:r>
+            <a:r>
+              <a:rPr lang="en-US" altLang="ko-KR" dirty="0"/>
+              <a:t>PWM </a:t>
+            </a:r>
+            <a:r>
+              <a:rPr lang="ko-KR" altLang="en-US" dirty="0"/>
+              <a:t>입력을 받아 기체 동역학을 갱신합니다</a:t>
+            </a:r>
+            <a:r>
+              <a:rPr lang="en-US" altLang="ko-KR" dirty="0"/>
+              <a:t>.</a:t>
+            </a:r>
+          </a:p>
+          <a:p>
+            <a:r>
+              <a:rPr lang="en-US" altLang="ko-KR" dirty="0" err="1"/>
+              <a:t>AirSim</a:t>
+            </a:r>
+            <a:r>
+              <a:rPr lang="ko-KR" altLang="en-US" dirty="0"/>
+              <a:t>과 </a:t>
+            </a:r>
+            <a:r>
+              <a:rPr lang="en-US" altLang="ko-KR" dirty="0"/>
+              <a:t>SIL </a:t>
+            </a:r>
+            <a:r>
+              <a:rPr lang="ko-KR" altLang="en-US" dirty="0"/>
+              <a:t>컨트롤러는 운영체제 수준의 </a:t>
+            </a:r>
+            <a:r>
+              <a:rPr lang="en-US" altLang="ko-KR" dirty="0"/>
+              <a:t>Shared Memory</a:t>
+            </a:r>
+            <a:r>
+              <a:rPr lang="ko-KR" altLang="en-US" dirty="0"/>
+              <a:t>를 통해 직접 데이터를 교환하며</a:t>
+            </a:r>
+            <a:r>
+              <a:rPr lang="en-US" altLang="ko-KR" dirty="0"/>
+              <a:t>, </a:t>
+            </a:r>
+            <a:r>
+              <a:rPr lang="ko-KR" altLang="en-US" dirty="0"/>
+              <a:t>네트워크나 </a:t>
+            </a:r>
+            <a:r>
+              <a:rPr lang="en-US" altLang="ko-KR" dirty="0"/>
+              <a:t>RPC </a:t>
+            </a:r>
+            <a:r>
+              <a:rPr lang="ko-KR" altLang="en-US" dirty="0"/>
+              <a:t>호출 없이 센서와 </a:t>
+            </a:r>
+            <a:r>
+              <a:rPr lang="ko-KR" altLang="en-US" dirty="0" err="1"/>
+              <a:t>액추에이터</a:t>
+            </a:r>
+            <a:r>
+              <a:rPr lang="ko-KR" altLang="en-US" dirty="0"/>
+              <a:t> 데이터를 주고받습니다</a:t>
+            </a:r>
+            <a:r>
+              <a:rPr lang="en-US" altLang="ko-KR" dirty="0"/>
+              <a:t>.</a:t>
+            </a:r>
+          </a:p>
+          <a:p>
+            <a:r>
+              <a:rPr lang="ko-KR" altLang="en-US" dirty="0"/>
+              <a:t>하단의 </a:t>
+            </a:r>
+            <a:r>
+              <a:rPr lang="en-US" altLang="ko-KR" dirty="0"/>
+              <a:t>SIL </a:t>
+            </a:r>
+            <a:r>
+              <a:rPr lang="ko-KR" altLang="en-US" dirty="0"/>
+              <a:t>컨트롤러에서는 시뮬레이터로부터 전달받은 </a:t>
+            </a:r>
+            <a:r>
+              <a:rPr lang="en-US" altLang="ko-KR" dirty="0"/>
+              <a:t>IMU, BARO, MAG </a:t>
+            </a:r>
+            <a:r>
+              <a:rPr lang="ko-KR" altLang="en-US" dirty="0"/>
+              <a:t>데이터를 입력으로 받아 자세 추정을 수행합니다</a:t>
+            </a:r>
+            <a:r>
+              <a:rPr lang="en-US" altLang="ko-KR" dirty="0"/>
+              <a:t>. </a:t>
+            </a:r>
+            <a:r>
+              <a:rPr lang="ko-KR" altLang="en-US" dirty="0"/>
+              <a:t>이 예시에서는 </a:t>
+            </a:r>
+            <a:r>
+              <a:rPr lang="en-US" altLang="ko-KR" dirty="0"/>
+              <a:t>Mahony </a:t>
+            </a:r>
+            <a:r>
+              <a:rPr lang="ko-KR" altLang="en-US" dirty="0"/>
+              <a:t>필터를 사용하며</a:t>
+            </a:r>
+            <a:r>
+              <a:rPr lang="en-US" altLang="ko-KR" dirty="0"/>
+              <a:t>, EMA </a:t>
+            </a:r>
+            <a:r>
+              <a:rPr lang="ko-KR" altLang="en-US" dirty="0"/>
+              <a:t>기반의 적응 </a:t>
+            </a:r>
+            <a:r>
+              <a:rPr lang="ko-KR" altLang="en-US" dirty="0" err="1"/>
+              <a:t>게인을</a:t>
+            </a:r>
+            <a:r>
+              <a:rPr lang="ko-KR" altLang="en-US" dirty="0"/>
+              <a:t> 적용하였습니다</a:t>
+            </a:r>
+            <a:r>
+              <a:rPr lang="en-US" altLang="ko-KR" dirty="0"/>
+              <a:t>.</a:t>
+            </a:r>
+          </a:p>
+          <a:p>
+            <a:r>
+              <a:rPr lang="ko-KR" altLang="en-US" dirty="0"/>
+              <a:t>이후 자세 오차에 대해 </a:t>
+            </a:r>
+            <a:r>
+              <a:rPr lang="en-US" altLang="ko-KR" dirty="0"/>
+              <a:t>Attitude P </a:t>
+            </a:r>
+            <a:r>
+              <a:rPr lang="ko-KR" altLang="en-US" dirty="0"/>
+              <a:t>제어를 수행하고</a:t>
+            </a:r>
+            <a:r>
+              <a:rPr lang="en-US" altLang="ko-KR" dirty="0"/>
+              <a:t>, </a:t>
+            </a:r>
+            <a:r>
+              <a:rPr lang="ko-KR" altLang="en-US" dirty="0"/>
+              <a:t>내부 루프에서는 </a:t>
+            </a:r>
+            <a:r>
+              <a:rPr lang="en-US" altLang="ko-KR" dirty="0"/>
+              <a:t>Rate PI+D </a:t>
+            </a:r>
+            <a:r>
+              <a:rPr lang="ko-KR" altLang="en-US" dirty="0"/>
+              <a:t>제어기를 통해 각속도를 제어합니다</a:t>
+            </a:r>
+            <a:r>
+              <a:rPr lang="en-US" altLang="ko-KR" dirty="0"/>
+              <a:t>. </a:t>
+            </a:r>
+            <a:r>
+              <a:rPr lang="ko-KR" altLang="en-US" dirty="0"/>
+              <a:t>이 제어 루프는 약 </a:t>
+            </a:r>
+            <a:r>
+              <a:rPr lang="en-US" altLang="ko-KR" dirty="0"/>
+              <a:t>400Hz</a:t>
+            </a:r>
+            <a:r>
+              <a:rPr lang="ko-KR" altLang="en-US" dirty="0"/>
+              <a:t>로 동작하며</a:t>
+            </a:r>
+            <a:r>
+              <a:rPr lang="en-US" altLang="ko-KR" dirty="0"/>
+              <a:t>, </a:t>
+            </a:r>
+            <a:r>
+              <a:rPr lang="ko-KR" altLang="en-US" dirty="0"/>
+              <a:t>최종 출력은 다시 </a:t>
+            </a:r>
+            <a:r>
+              <a:rPr lang="en-US" altLang="ko-KR" dirty="0"/>
+              <a:t>Shared Memory</a:t>
+            </a:r>
+            <a:r>
+              <a:rPr lang="ko-KR" altLang="en-US" dirty="0"/>
+              <a:t>를 통해 </a:t>
+            </a:r>
+            <a:r>
+              <a:rPr lang="en-US" altLang="ko-KR" dirty="0" err="1"/>
+              <a:t>AirSim</a:t>
+            </a:r>
+            <a:r>
+              <a:rPr lang="ko-KR" altLang="en-US" dirty="0"/>
+              <a:t>의 </a:t>
+            </a:r>
+            <a:r>
+              <a:rPr lang="ko-KR" altLang="en-US" dirty="0" err="1"/>
+              <a:t>로터</a:t>
+            </a:r>
+            <a:r>
+              <a:rPr lang="ko-KR" altLang="en-US" dirty="0"/>
+              <a:t> </a:t>
+            </a:r>
+            <a:r>
+              <a:rPr lang="en-US" altLang="ko-KR" dirty="0"/>
+              <a:t>PWM </a:t>
+            </a:r>
+            <a:r>
+              <a:rPr lang="ko-KR" altLang="en-US" dirty="0"/>
+              <a:t>입력으로 전달됩니다</a:t>
+            </a:r>
+            <a:r>
+              <a:rPr lang="en-US" altLang="ko-KR" dirty="0"/>
+              <a:t>.</a:t>
+            </a:r>
+          </a:p>
+          <a:p>
+            <a:r>
+              <a:rPr lang="ko-KR" altLang="en-US" dirty="0"/>
+              <a:t>이 구조를 통해 실제 비행 제어기와 유사한 고주파 폐루프를 시뮬레이터 상에서 구성할 수 있으며</a:t>
+            </a:r>
+            <a:r>
+              <a:rPr lang="en-US" altLang="ko-KR" dirty="0"/>
+              <a:t>, </a:t>
+            </a:r>
+            <a:r>
+              <a:rPr lang="ko-KR" altLang="en-US" dirty="0"/>
+              <a:t>통신 지연과 </a:t>
+            </a:r>
+            <a:r>
+              <a:rPr lang="ko-KR" altLang="en-US" dirty="0" err="1"/>
+              <a:t>지터를</a:t>
+            </a:r>
+            <a:r>
+              <a:rPr lang="ko-KR" altLang="en-US" dirty="0"/>
+              <a:t> 최소화한 제어 성능 평가가 가능합니다</a:t>
+            </a:r>
+            <a:r>
+              <a:rPr lang="en-US" altLang="ko-KR" dirty="0"/>
+              <a:t>.</a:t>
+            </a:r>
+          </a:p>
+          <a:p>
             <a:endParaRPr lang="ko-KR" altLang="en-US" dirty="0"/>
           </a:p>
         </p:txBody>
@@ -681,6 +972,114 @@
     <p:extLst>
       <p:ext uri="{BB962C8B-B14F-4D97-AF65-F5344CB8AC3E}">
         <p14:creationId xmlns:p14="http://schemas.microsoft.com/office/powerpoint/2010/main" val="3378559727"/>
+      </p:ext>
+    </p:extLst>
+  </p:cSld>
+  <p:clrMapOvr>
+    <a:masterClrMapping/>
+  </p:clrMapOvr>
+</p:notes>
+</file>
+
+<file path=ppt/notesSlides/notesSlide11.xml><?xml version="1.0" encoding="utf-8"?>
+<p:notes xmlns:a="http://schemas.openxmlformats.org/drawingml/2006/main" xmlns:r="http://schemas.openxmlformats.org/officeDocument/2006/relationships" xmlns:p="http://schemas.openxmlformats.org/presentationml/2006/main">
+  <p:cSld>
+    <p:spTree>
+      <p:nvGrpSpPr>
+        <p:cNvPr id="1" name="">
+          <a:extLst>
+            <a:ext uri="{FF2B5EF4-FFF2-40B4-BE49-F238E27FC236}">
+              <a16:creationId xmlns:a16="http://schemas.microsoft.com/office/drawing/2014/main" id="{33430AF4-C2B7-5171-0A6A-3C08394B1BC3}"/>
+            </a:ext>
+          </a:extLst>
+        </p:cNvPr>
+        <p:cNvGrpSpPr/>
+        <p:nvPr/>
+      </p:nvGrpSpPr>
+      <p:grpSpPr>
+        <a:xfrm>
+          <a:off x="0" y="0"/>
+          <a:ext cx="0" cy="0"/>
+          <a:chOff x="0" y="0"/>
+          <a:chExt cx="0" cy="0"/>
+        </a:xfrm>
+      </p:grpSpPr>
+      <p:sp>
+        <p:nvSpPr>
+          <p:cNvPr id="2" name="슬라이드 이미지 개체 틀 1">
+            <a:extLst>
+              <a:ext uri="{FF2B5EF4-FFF2-40B4-BE49-F238E27FC236}">
+                <a16:creationId xmlns:a16="http://schemas.microsoft.com/office/drawing/2014/main" id="{66164A4E-1252-5739-0454-9CE5E8A12BF7}"/>
+              </a:ext>
+            </a:extLst>
+          </p:cNvPr>
+          <p:cNvSpPr>
+            <a:spLocks noGrp="1" noRot="1" noChangeAspect="1"/>
+          </p:cNvSpPr>
+          <p:nvPr>
+            <p:ph type="sldImg"/>
+          </p:nvPr>
+        </p:nvSpPr>
+        <p:spPr/>
+      </p:sp>
+      <p:sp>
+        <p:nvSpPr>
+          <p:cNvPr id="3" name="슬라이드 노트 개체 틀 2">
+            <a:extLst>
+              <a:ext uri="{FF2B5EF4-FFF2-40B4-BE49-F238E27FC236}">
+                <a16:creationId xmlns:a16="http://schemas.microsoft.com/office/drawing/2014/main" id="{61925083-77F6-C188-630A-22E92DE17F65}"/>
+              </a:ext>
+            </a:extLst>
+          </p:cNvPr>
+          <p:cNvSpPr>
+            <a:spLocks noGrp="1"/>
+          </p:cNvSpPr>
+          <p:nvPr>
+            <p:ph type="body" idx="1"/>
+          </p:nvPr>
+        </p:nvSpPr>
+        <p:spPr/>
+        <p:txBody>
+          <a:bodyPr/>
+          <a:lstStyle/>
+          <a:p>
+            <a:endParaRPr lang="ko-KR" altLang="en-US" dirty="0"/>
+          </a:p>
+        </p:txBody>
+      </p:sp>
+      <p:sp>
+        <p:nvSpPr>
+          <p:cNvPr id="4" name="슬라이드 번호 개체 틀 3">
+            <a:extLst>
+              <a:ext uri="{FF2B5EF4-FFF2-40B4-BE49-F238E27FC236}">
+                <a16:creationId xmlns:a16="http://schemas.microsoft.com/office/drawing/2014/main" id="{269EF609-7754-B135-DFED-70F0A703E11B}"/>
+              </a:ext>
+            </a:extLst>
+          </p:cNvPr>
+          <p:cNvSpPr>
+            <a:spLocks noGrp="1"/>
+          </p:cNvSpPr>
+          <p:nvPr>
+            <p:ph type="sldNum" sz="quarter" idx="5"/>
+          </p:nvPr>
+        </p:nvSpPr>
+        <p:spPr/>
+        <p:txBody>
+          <a:bodyPr/>
+          <a:lstStyle/>
+          <a:p>
+            <a:fld id="{0098AE32-E7AE-48A5-9392-CCB4D2CF538A}" type="slidenum">
+              <a:rPr lang="ko-KR" altLang="en-US" smtClean="0"/>
+              <a:t>12</a:t>
+            </a:fld>
+            <a:endParaRPr lang="ko-KR" altLang="en-US"/>
+          </a:p>
+        </p:txBody>
+      </p:sp>
+    </p:spTree>
+    <p:extLst>
+      <p:ext uri="{BB962C8B-B14F-4D97-AF65-F5344CB8AC3E}">
+        <p14:creationId xmlns:p14="http://schemas.microsoft.com/office/powerpoint/2010/main" val="2199045488"/>
       </p:ext>
     </p:extLst>
   </p:cSld>
@@ -6598,7 +6997,13 @@
               <a:rPr lang="en-US" altLang="ko-KR" b="1" dirty="0">
                 <a:latin typeface="+mj-lt"/>
               </a:rPr>
-              <a:t>– </a:t>
+              <a:t>– SIL</a:t>
+            </a:r>
+            <a:r>
+              <a:rPr lang="ko-KR" altLang="en-US" b="1" dirty="0">
+                <a:latin typeface="+mj-lt"/>
+              </a:rPr>
+              <a:t>의 </a:t>
             </a:r>
             <a:r>
               <a:rPr lang="ko-KR" altLang="en-US" b="1" dirty="0"/>
@@ -7713,6 +8118,14 @@
           <a:p>
             <a:pPr algn="ctr"/>
             <a:r>
+              <a:rPr lang="en-US" altLang="ko-KR" sz="2000" b="1" dirty="0"/>
+              <a:t>SIL</a:t>
+            </a:r>
+            <a:endParaRPr lang="en-US" altLang="ko-KR" b="1" dirty="0"/>
+          </a:p>
+          <a:p>
+            <a:pPr algn="ctr"/>
+            <a:r>
               <a:rPr lang="en-US" altLang="ko-KR" dirty="0"/>
               <a:t>App loop</a:t>
             </a:r>
@@ -8065,10 +8478,345 @@
           </a:p>
         </p:txBody>
       </p:sp>
+      <p:pic>
+        <p:nvPicPr>
+          <p:cNvPr id="2" name="그림 1">
+            <a:extLst>
+              <a:ext uri="{FF2B5EF4-FFF2-40B4-BE49-F238E27FC236}">
+                <a16:creationId xmlns:a16="http://schemas.microsoft.com/office/drawing/2014/main" id="{75AB6C75-4F89-2E97-6B75-343BC36D9559}"/>
+              </a:ext>
+            </a:extLst>
+          </p:cNvPr>
+          <p:cNvPicPr/>
+          <p:nvPr/>
+        </p:nvPicPr>
+        <p:blipFill>
+          <a:blip r:embed="rId3"/>
+          <a:stretch>
+            <a:fillRect/>
+          </a:stretch>
+        </p:blipFill>
+        <p:spPr>
+          <a:xfrm>
+            <a:off x="819393" y="772111"/>
+            <a:ext cx="5871963" cy="5313777"/>
+          </a:xfrm>
+          <a:prstGeom prst="rect">
+            <a:avLst/>
+          </a:prstGeom>
+          <a:effectLst/>
+        </p:spPr>
+      </p:pic>
     </p:spTree>
     <p:extLst>
       <p:ext uri="{BB962C8B-B14F-4D97-AF65-F5344CB8AC3E}">
         <p14:creationId xmlns:p14="http://schemas.microsoft.com/office/powerpoint/2010/main" val="1111353104"/>
+      </p:ext>
+    </p:extLst>
+  </p:cSld>
+  <p:clrMapOvr>
+    <a:masterClrMapping/>
+  </p:clrMapOvr>
+</p:sld>
+</file>
+
+<file path=ppt/slides/slide12.xml><?xml version="1.0" encoding="utf-8"?>
+<p:sld xmlns:a="http://schemas.openxmlformats.org/drawingml/2006/main" xmlns:r="http://schemas.openxmlformats.org/officeDocument/2006/relationships" xmlns:p="http://schemas.openxmlformats.org/presentationml/2006/main">
+  <p:cSld>
+    <p:spTree>
+      <p:nvGrpSpPr>
+        <p:cNvPr id="1" name="">
+          <a:extLst>
+            <a:ext uri="{FF2B5EF4-FFF2-40B4-BE49-F238E27FC236}">
+              <a16:creationId xmlns:a16="http://schemas.microsoft.com/office/drawing/2014/main" id="{62CE476F-B3D1-D7E7-351D-369A2704DA87}"/>
+            </a:ext>
+          </a:extLst>
+        </p:cNvPr>
+        <p:cNvGrpSpPr/>
+        <p:nvPr/>
+      </p:nvGrpSpPr>
+      <p:grpSpPr>
+        <a:xfrm>
+          <a:off x="0" y="0"/>
+          <a:ext cx="0" cy="0"/>
+          <a:chOff x="0" y="0"/>
+          <a:chExt cx="0" cy="0"/>
+        </a:xfrm>
+      </p:grpSpPr>
+      <p:sp>
+        <p:nvSpPr>
+          <p:cNvPr id="4" name="TextBox 3">
+            <a:extLst>
+              <a:ext uri="{FF2B5EF4-FFF2-40B4-BE49-F238E27FC236}">
+                <a16:creationId xmlns:a16="http://schemas.microsoft.com/office/drawing/2014/main" id="{0E9012FF-F574-B039-FFDA-E8F7BE93F7D2}"/>
+              </a:ext>
+            </a:extLst>
+          </p:cNvPr>
+          <p:cNvSpPr txBox="1"/>
+          <p:nvPr/>
+        </p:nvSpPr>
+        <p:spPr>
+          <a:xfrm>
+            <a:off x="406871" y="173267"/>
+            <a:ext cx="11582878" cy="3385542"/>
+          </a:xfrm>
+          <a:prstGeom prst="rect">
+            <a:avLst/>
+          </a:prstGeom>
+          <a:noFill/>
+        </p:spPr>
+        <p:txBody>
+          <a:bodyPr wrap="square" rtlCol="0">
+            <a:spAutoFit/>
+          </a:bodyPr>
+          <a:lstStyle/>
+          <a:p>
+            <a:r>
+              <a:rPr lang="en-US" altLang="ko-KR" b="1" dirty="0">
+                <a:solidFill>
+                  <a:schemeClr val="accent4"/>
+                </a:solidFill>
+                <a:latin typeface="+mj-lt"/>
+              </a:rPr>
+              <a:t>4. </a:t>
+            </a:r>
+            <a:r>
+              <a:rPr lang="ko-KR" altLang="en-US" b="1" dirty="0">
+                <a:solidFill>
+                  <a:schemeClr val="accent4"/>
+                </a:solidFill>
+                <a:latin typeface="+mj-lt"/>
+              </a:rPr>
+              <a:t>실험결과</a:t>
+            </a:r>
+            <a:endParaRPr lang="en-US" altLang="ko-KR" b="1" dirty="0">
+              <a:solidFill>
+                <a:schemeClr val="accent4"/>
+              </a:solidFill>
+              <a:latin typeface="+mj-lt"/>
+            </a:endParaRPr>
+          </a:p>
+          <a:p>
+            <a:endParaRPr lang="en-US" altLang="ko-KR" b="1" dirty="0">
+              <a:solidFill>
+                <a:schemeClr val="accent4"/>
+              </a:solidFill>
+              <a:latin typeface="+mj-lt"/>
+            </a:endParaRPr>
+          </a:p>
+          <a:p>
+            <a:r>
+              <a:rPr lang="en-US" altLang="ko-KR" b="1" dirty="0">
+                <a:solidFill>
+                  <a:schemeClr val="accent4"/>
+                </a:solidFill>
+                <a:latin typeface="+mj-lt"/>
+              </a:rPr>
+              <a:t>(</a:t>
+            </a:r>
+            <a:r>
+              <a:rPr lang="ko-KR" altLang="en-US" b="1" dirty="0">
+                <a:solidFill>
+                  <a:schemeClr val="accent4"/>
+                </a:solidFill>
+                <a:latin typeface="+mj-lt"/>
+              </a:rPr>
+              <a:t>단순 호버링</a:t>
+            </a:r>
+            <a:r>
+              <a:rPr lang="en-US" altLang="ko-KR" b="1" dirty="0">
+                <a:solidFill>
+                  <a:schemeClr val="accent4"/>
+                </a:solidFill>
+                <a:latin typeface="+mj-lt"/>
+              </a:rPr>
+              <a:t>)</a:t>
+            </a:r>
+          </a:p>
+          <a:p>
+            <a:r>
+              <a:rPr lang="en-US" altLang="ko-KR" dirty="0">
+                <a:solidFill>
+                  <a:schemeClr val="accent4"/>
+                </a:solidFill>
+              </a:rPr>
+              <a:t>RPC vs SHM </a:t>
+            </a:r>
+            <a:r>
+              <a:rPr lang="ko-KR" altLang="en-US" dirty="0">
+                <a:solidFill>
+                  <a:schemeClr val="accent4"/>
+                </a:solidFill>
+              </a:rPr>
+              <a:t>최대 센서 샘플링 주파수 비교</a:t>
+            </a:r>
+            <a:endParaRPr lang="en-US" altLang="ko-KR" dirty="0">
+              <a:solidFill>
+                <a:schemeClr val="accent4"/>
+              </a:solidFill>
+            </a:endParaRPr>
+          </a:p>
+          <a:p>
+            <a:r>
+              <a:rPr lang="en-US" altLang="ko-KR" dirty="0">
+                <a:solidFill>
+                  <a:schemeClr val="accent4"/>
+                </a:solidFill>
+              </a:rPr>
+              <a:t>RPC vs SHM </a:t>
+            </a:r>
+            <a:r>
+              <a:rPr lang="ko-KR" altLang="en-US" dirty="0">
+                <a:solidFill>
+                  <a:schemeClr val="accent4"/>
+                </a:solidFill>
+              </a:rPr>
+              <a:t>지연 및 </a:t>
+            </a:r>
+            <a:r>
+              <a:rPr lang="ko-KR" altLang="en-US" dirty="0" err="1">
+                <a:solidFill>
+                  <a:schemeClr val="accent4"/>
+                </a:solidFill>
+              </a:rPr>
+              <a:t>지터</a:t>
+            </a:r>
+            <a:r>
+              <a:rPr lang="ko-KR" altLang="en-US" dirty="0">
+                <a:solidFill>
+                  <a:schemeClr val="accent4"/>
+                </a:solidFill>
+              </a:rPr>
+              <a:t> 특성 비교</a:t>
+            </a:r>
+            <a:endParaRPr lang="en-US" altLang="ko-KR" dirty="0">
+              <a:solidFill>
+                <a:schemeClr val="accent4"/>
+              </a:solidFill>
+            </a:endParaRPr>
+          </a:p>
+          <a:p>
+            <a:r>
+              <a:rPr lang="en-US" altLang="ko-KR" dirty="0">
+                <a:solidFill>
+                  <a:schemeClr val="accent4"/>
+                </a:solidFill>
+              </a:rPr>
+              <a:t>RPC vs SHM </a:t>
+            </a:r>
+            <a:r>
+              <a:rPr lang="ko-KR" altLang="en-US" dirty="0">
+                <a:solidFill>
+                  <a:schemeClr val="accent4"/>
+                </a:solidFill>
+              </a:rPr>
+              <a:t>비행 제어 성능 비교</a:t>
+            </a:r>
+            <a:endParaRPr lang="en-US" altLang="ko-KR" dirty="0">
+              <a:solidFill>
+                <a:schemeClr val="accent4"/>
+              </a:solidFill>
+            </a:endParaRPr>
+          </a:p>
+          <a:p>
+            <a:endParaRPr lang="en-US" altLang="ko-KR" dirty="0">
+              <a:solidFill>
+                <a:schemeClr val="accent4"/>
+              </a:solidFill>
+            </a:endParaRPr>
+          </a:p>
+          <a:p>
+            <a:r>
+              <a:rPr lang="en-US" altLang="ko-KR" b="1" dirty="0">
+                <a:solidFill>
+                  <a:schemeClr val="accent4"/>
+                </a:solidFill>
+              </a:rPr>
+              <a:t>(</a:t>
+            </a:r>
+            <a:r>
+              <a:rPr lang="ko-KR" altLang="en-US" b="1" dirty="0" err="1">
+                <a:solidFill>
+                  <a:schemeClr val="accent4"/>
+                </a:solidFill>
+              </a:rPr>
+              <a:t>외란</a:t>
+            </a:r>
+            <a:r>
+              <a:rPr lang="ko-KR" altLang="en-US" b="1" dirty="0">
+                <a:solidFill>
+                  <a:schemeClr val="accent4"/>
+                </a:solidFill>
+              </a:rPr>
+              <a:t> 주입 시</a:t>
+            </a:r>
+            <a:r>
+              <a:rPr lang="en-US" altLang="ko-KR" b="1" dirty="0">
+                <a:solidFill>
+                  <a:schemeClr val="accent4"/>
+                </a:solidFill>
+              </a:rPr>
+              <a:t>)</a:t>
+            </a:r>
+            <a:endParaRPr lang="en-US" altLang="ko-KR" dirty="0">
+              <a:solidFill>
+                <a:schemeClr val="accent4"/>
+              </a:solidFill>
+            </a:endParaRPr>
+          </a:p>
+          <a:p>
+            <a:r>
+              <a:rPr lang="en-US" altLang="ko-KR" dirty="0">
+                <a:solidFill>
+                  <a:schemeClr val="accent4"/>
+                </a:solidFill>
+              </a:rPr>
+              <a:t>RPC vs SHM </a:t>
+            </a:r>
+            <a:r>
+              <a:rPr lang="ko-KR" altLang="en-US" dirty="0">
+                <a:solidFill>
+                  <a:schemeClr val="accent4"/>
+                </a:solidFill>
+              </a:rPr>
+              <a:t>비행 제어 성능 비교</a:t>
+            </a:r>
+            <a:endParaRPr lang="en-US" altLang="ko-KR" dirty="0">
+              <a:solidFill>
+                <a:schemeClr val="accent4"/>
+              </a:solidFill>
+            </a:endParaRPr>
+          </a:p>
+          <a:p>
+            <a:endParaRPr lang="en-US" altLang="ko-KR" b="1" dirty="0">
+              <a:solidFill>
+                <a:schemeClr val="accent4"/>
+              </a:solidFill>
+            </a:endParaRPr>
+          </a:p>
+          <a:p>
+            <a:endParaRPr lang="en-US" altLang="ko-KR" b="1" dirty="0">
+              <a:solidFill>
+                <a:schemeClr val="accent4"/>
+              </a:solidFill>
+            </a:endParaRPr>
+          </a:p>
+          <a:p>
+            <a:r>
+              <a:rPr lang="en-US" altLang="ko-KR" sz="1600" dirty="0">
+                <a:solidFill>
+                  <a:schemeClr val="accent4"/>
+                </a:solidFill>
+              </a:rPr>
+              <a:t>  </a:t>
+            </a:r>
+          </a:p>
+        </p:txBody>
+      </p:sp>
+    </p:spTree>
+    <p:extLst>
+      <p:ext uri="{BB962C8B-B14F-4D97-AF65-F5344CB8AC3E}">
+        <p14:creationId xmlns:p14="http://schemas.microsoft.com/office/powerpoint/2010/main" val="3269333472"/>
       </p:ext>
     </p:extLst>
   </p:cSld>
@@ -11867,13 +12615,14 @@
               <a:t>기반 통신을 이용한 </a:t>
             </a:r>
             <a:r>
-              <a:rPr lang="en-US" altLang="ko-KR" sz="1600" dirty="0"/>
+              <a:rPr lang="en-US" altLang="ko-KR" sz="1600" b="1" dirty="0"/>
               <a:t>1 kHz IMU </a:t>
             </a:r>
             <a:r>
-              <a:rPr lang="ko-KR" altLang="en-US" sz="1600" dirty="0"/>
+              <a:rPr lang="ko-KR" altLang="en-US" sz="1600" b="1" dirty="0"/>
               <a:t>데이터 수집 가능성 평가</a:t>
             </a:r>
+            <a:endParaRPr lang="ko-KR" altLang="en-US" sz="1600" dirty="0"/>
           </a:p>
           <a:p>
             <a:r>
@@ -11882,243 +12631,245 @@
             </a:r>
             <a:r>
               <a:rPr lang="ko-KR" altLang="en-US" sz="1600" dirty="0"/>
-              <a:t>샘플 간 시간 간격 분석을 통한 지연</a:t>
-            </a:r>
+              <a:t>샘플 간 시간 간격 분석을 통한 </a:t>
+            </a:r>
+            <a:r>
+              <a:rPr lang="ko-KR" altLang="en-US" sz="1600" b="1" dirty="0"/>
+              <a:t>지연</a:t>
+            </a:r>
+            <a:r>
+              <a:rPr lang="en-US" altLang="ko-KR" sz="1600" b="1" dirty="0"/>
+              <a:t>(latency) </a:t>
+            </a:r>
+            <a:r>
+              <a:rPr lang="ko-KR" altLang="en-US" sz="1600" b="1" dirty="0"/>
+              <a:t>및 </a:t>
+            </a:r>
+            <a:r>
+              <a:rPr lang="ko-KR" altLang="en-US" sz="1600" b="1" dirty="0" err="1"/>
+              <a:t>지터</a:t>
+            </a:r>
+            <a:r>
+              <a:rPr lang="en-US" altLang="ko-KR" sz="1600" b="1" dirty="0"/>
+              <a:t>(jitter) </a:t>
+            </a:r>
+            <a:r>
+              <a:rPr lang="ko-KR" altLang="en-US" sz="1600" b="1" dirty="0"/>
+              <a:t>특성 측정</a:t>
+            </a:r>
+            <a:endParaRPr lang="ko-KR" altLang="en-US" sz="1600" dirty="0"/>
+          </a:p>
+          <a:p>
+            <a:endParaRPr lang="en-US" altLang="ko-KR" sz="1600" dirty="0"/>
+          </a:p>
+          <a:p>
+            <a:r>
+              <a:rPr lang="en-US" altLang="ko-KR" sz="1600" b="1" dirty="0"/>
+              <a:t>3.2 </a:t>
+            </a:r>
+            <a:r>
+              <a:rPr lang="ko-KR" altLang="en-US" sz="1600" b="1" dirty="0"/>
+              <a:t>공용 제어 구조 추상화</a:t>
+            </a:r>
+          </a:p>
+          <a:p>
             <a:r>
               <a:rPr lang="en-US" altLang="ko-KR" sz="1600" dirty="0"/>
-              <a:t>(latency) </a:t>
+              <a:t> - RPC </a:t>
             </a:r>
             <a:r>
               <a:rPr lang="ko-KR" altLang="en-US" sz="1600" dirty="0"/>
               <a:t>및 </a:t>
             </a:r>
             <a:r>
+              <a:rPr lang="en-US" altLang="ko-KR" sz="1600" dirty="0"/>
+              <a:t>SHM </a:t>
+            </a:r>
+            <a:r>
+              <a:rPr lang="ko-KR" altLang="en-US" sz="1600" dirty="0"/>
+              <a:t>방식을 </a:t>
+            </a:r>
+            <a:r>
+              <a:rPr lang="ko-KR" altLang="en-US" sz="1600" b="1" dirty="0"/>
+              <a:t>동일 인터페이스로 사용 가능한 샘플링</a:t>
+            </a:r>
+            <a:r>
+              <a:rPr lang="en-US" altLang="ko-KR" sz="1600" b="1" dirty="0"/>
+              <a:t>·</a:t>
+            </a:r>
+            <a:r>
+              <a:rPr lang="ko-KR" altLang="en-US" sz="1600" b="1" dirty="0"/>
+              <a:t>제어 루프 추상 클래스 설계</a:t>
+            </a:r>
+            <a:endParaRPr lang="ko-KR" altLang="en-US" sz="1600" dirty="0"/>
+          </a:p>
+          <a:p>
+            <a:r>
+              <a:rPr lang="en-US" altLang="ko-KR" sz="1600" dirty="0"/>
+              <a:t> - </a:t>
+            </a:r>
+            <a:r>
+              <a:rPr lang="ko-KR" altLang="en-US" sz="1600" dirty="0"/>
+              <a:t>시뮬레이터와 실제 </a:t>
+            </a:r>
+            <a:r>
+              <a:rPr lang="en-US" altLang="ko-KR" sz="1600" dirty="0"/>
+              <a:t>FC </a:t>
+            </a:r>
+            <a:r>
+              <a:rPr lang="ko-KR" altLang="en-US" sz="1600" dirty="0"/>
+              <a:t>환경에 </a:t>
+            </a:r>
+            <a:r>
+              <a:rPr lang="ko-KR" altLang="en-US" sz="1600" b="1" dirty="0"/>
+              <a:t>동일 코드 구조 적용 가능성 확보</a:t>
+            </a:r>
+            <a:endParaRPr lang="ko-KR" altLang="en-US" sz="1600" dirty="0"/>
+          </a:p>
+          <a:p>
+            <a:endParaRPr lang="en-US" altLang="ko-KR" sz="1600" dirty="0"/>
+          </a:p>
+          <a:p>
+            <a:r>
+              <a:rPr lang="en-US" altLang="ko-KR" sz="1600" b="1" dirty="0"/>
+              <a:t>3.3 Shared Memory(SHM) </a:t>
+            </a:r>
+            <a:r>
+              <a:rPr lang="ko-KR" altLang="en-US" sz="1600" b="1" dirty="0"/>
+              <a:t>기반 고속 통신 구조 설계</a:t>
+            </a:r>
+          </a:p>
+          <a:p>
+            <a:r>
+              <a:rPr lang="en-US" altLang="ko-KR" sz="1600" dirty="0"/>
+              <a:t> - </a:t>
+            </a:r>
+            <a:r>
+              <a:rPr lang="ko-KR" altLang="en-US" sz="1600" dirty="0"/>
+              <a:t>네트워크</a:t>
+            </a:r>
+            <a:r>
+              <a:rPr lang="en-US" altLang="ko-KR" sz="1600" dirty="0"/>
+              <a:t>/RPC</a:t>
+            </a:r>
+            <a:r>
+              <a:rPr lang="ko-KR" altLang="en-US" sz="1600" dirty="0"/>
+              <a:t>를 사용하지 않는 </a:t>
+            </a:r>
+            <a:r>
+              <a:rPr lang="en-US" altLang="ko-KR" sz="1600" b="1" dirty="0"/>
+              <a:t>SHM </a:t>
+            </a:r>
+            <a:r>
+              <a:rPr lang="ko-KR" altLang="en-US" sz="1600" b="1" dirty="0"/>
+              <a:t>기반 센서</a:t>
+            </a:r>
+            <a:r>
+              <a:rPr lang="en-US" altLang="ko-KR" sz="1600" b="1" dirty="0"/>
+              <a:t>·</a:t>
+            </a:r>
+            <a:r>
+              <a:rPr lang="ko-KR" altLang="en-US" sz="1600" b="1" dirty="0"/>
+              <a:t>제어 데이터 교환 라이브러리 구현</a:t>
+            </a:r>
+            <a:endParaRPr lang="ko-KR" altLang="en-US" sz="1600" dirty="0"/>
+          </a:p>
+          <a:p>
+            <a:r>
+              <a:rPr lang="en-US" altLang="ko-KR" sz="1600" dirty="0"/>
+              <a:t> - </a:t>
+            </a:r>
+            <a:r>
+              <a:rPr lang="ko-KR" altLang="en-US" sz="1600" dirty="0"/>
+              <a:t>별도 프로세스에서 동작 가능한 </a:t>
+            </a:r>
+            <a:r>
+              <a:rPr lang="ko-KR" altLang="en-US" sz="1600" b="1" dirty="0"/>
+              <a:t>고정 주기</a:t>
+            </a:r>
+            <a:r>
+              <a:rPr lang="en-US" altLang="ko-KR" sz="1600" b="1" dirty="0"/>
+              <a:t>(real-time) </a:t>
+            </a:r>
+            <a:r>
+              <a:rPr lang="ko-KR" altLang="en-US" sz="1600" b="1" dirty="0"/>
+              <a:t>실행 구조 설계</a:t>
+            </a:r>
+            <a:endParaRPr lang="ko-KR" altLang="en-US" sz="1600" dirty="0"/>
+          </a:p>
+          <a:p>
+            <a:endParaRPr lang="en-US" altLang="ko-KR" sz="1600" dirty="0"/>
+          </a:p>
+          <a:p>
+            <a:r>
+              <a:rPr lang="en-US" altLang="ko-KR" sz="1600" b="1" dirty="0"/>
+              <a:t>3.4 </a:t>
+            </a:r>
+            <a:r>
+              <a:rPr lang="ko-KR" altLang="en-US" sz="1600" b="1" dirty="0"/>
+              <a:t>비행 제어 성능 비교 실험</a:t>
+            </a:r>
+            <a:endParaRPr lang="en-US" altLang="ko-KR" sz="1600" b="1" dirty="0"/>
+          </a:p>
+          <a:p>
+            <a:r>
+              <a:rPr lang="en-US" altLang="ko-KR" sz="1600" dirty="0"/>
+              <a:t>  (</a:t>
+            </a:r>
+            <a:r>
+              <a:rPr lang="ko-KR" altLang="en-US" sz="1600" dirty="0"/>
+              <a:t>단순 호버링 조건에서</a:t>
+            </a:r>
+            <a:r>
+              <a:rPr lang="en-US" altLang="ko-KR" sz="1600" dirty="0"/>
+              <a:t>)</a:t>
+            </a:r>
+          </a:p>
+          <a:p>
+            <a:r>
+              <a:rPr lang="en-US" altLang="ko-KR" sz="1600" dirty="0"/>
+              <a:t> - RPC vs SHM </a:t>
+            </a:r>
+            <a:r>
+              <a:rPr lang="ko-KR" altLang="en-US" sz="1600" dirty="0"/>
+              <a:t>최대 센서 샘플링 주파수 비교</a:t>
+            </a:r>
+            <a:endParaRPr lang="en-US" altLang="ko-KR" sz="1600" dirty="0"/>
+          </a:p>
+          <a:p>
+            <a:r>
+              <a:rPr lang="en-US" altLang="ko-KR" sz="1600" dirty="0"/>
+              <a:t> - RPC vs SHM </a:t>
+            </a:r>
+            <a:r>
+              <a:rPr lang="ko-KR" altLang="en-US" sz="1600" dirty="0"/>
+              <a:t>지연 및 </a:t>
+            </a:r>
+            <a:r>
               <a:rPr lang="ko-KR" altLang="en-US" sz="1600" dirty="0" err="1"/>
               <a:t>지터</a:t>
             </a:r>
             <a:r>
+              <a:rPr lang="ko-KR" altLang="en-US" sz="1600" dirty="0"/>
+              <a:t> 특성 비교</a:t>
+            </a:r>
+            <a:endParaRPr lang="en-US" altLang="ko-KR" sz="1600" dirty="0"/>
+          </a:p>
+          <a:p>
+            <a:r>
               <a:rPr lang="en-US" altLang="ko-KR" sz="1600" dirty="0"/>
-              <a:t>(jitter) </a:t>
+              <a:t> - RPC vs SHM </a:t>
             </a:r>
             <a:r>
               <a:rPr lang="ko-KR" altLang="en-US" sz="1600" dirty="0"/>
-              <a:t>특성 측정</a:t>
-            </a:r>
-          </a:p>
-          <a:p>
+              <a:t>비행 제어 성능 비교</a:t>
+            </a:r>
             <a:endParaRPr lang="en-US" altLang="ko-KR" sz="1600" dirty="0"/>
           </a:p>
           <a:p>
             <a:r>
-              <a:rPr lang="en-US" altLang="ko-KR" sz="1600" b="1" dirty="0"/>
-              <a:t>3.2 </a:t>
-            </a:r>
-            <a:r>
-              <a:rPr lang="ko-KR" altLang="en-US" sz="1600" b="1" dirty="0"/>
-              <a:t>공용 제어 구조 추상화</a:t>
-            </a:r>
-          </a:p>
-          <a:p>
-            <a:r>
               <a:rPr lang="en-US" altLang="ko-KR" sz="1600" dirty="0"/>
-              <a:t> - RPC </a:t>
-            </a:r>
-            <a:r>
-              <a:rPr lang="ko-KR" altLang="en-US" sz="1600" dirty="0"/>
-              <a:t>및 </a:t>
-            </a:r>
-            <a:r>
-              <a:rPr lang="en-US" altLang="ko-KR" sz="1600" dirty="0"/>
-              <a:t>SHM </a:t>
-            </a:r>
-            <a:r>
-              <a:rPr lang="ko-KR" altLang="en-US" sz="1600" dirty="0"/>
-              <a:t>방식을 </a:t>
-            </a:r>
-            <a:r>
-              <a:rPr lang="ko-KR" altLang="en-US" sz="1600" b="1" dirty="0"/>
-              <a:t>동일 인터페이스로 사용 가능한 샘플링</a:t>
-            </a:r>
-            <a:r>
-              <a:rPr lang="en-US" altLang="ko-KR" sz="1600" b="1" dirty="0"/>
-              <a:t>·</a:t>
-            </a:r>
-            <a:r>
-              <a:rPr lang="ko-KR" altLang="en-US" sz="1600" b="1" dirty="0"/>
-              <a:t>제어 루프 추상 클래스 설계</a:t>
-            </a:r>
-            <a:endParaRPr lang="ko-KR" altLang="en-US" sz="1600" dirty="0"/>
-          </a:p>
-          <a:p>
-            <a:r>
-              <a:rPr lang="en-US" altLang="ko-KR" sz="1600" dirty="0"/>
-              <a:t> - </a:t>
-            </a:r>
-            <a:r>
-              <a:rPr lang="ko-KR" altLang="en-US" sz="1600" dirty="0"/>
-              <a:t>시뮬레이터와 실제 </a:t>
-            </a:r>
-            <a:r>
-              <a:rPr lang="en-US" altLang="ko-KR" sz="1600" dirty="0"/>
-              <a:t>FC </a:t>
-            </a:r>
-            <a:r>
-              <a:rPr lang="ko-KR" altLang="en-US" sz="1600" dirty="0"/>
-              <a:t>환경에 </a:t>
-            </a:r>
-            <a:r>
-              <a:rPr lang="ko-KR" altLang="en-US" sz="1600" b="1" dirty="0"/>
-              <a:t>동일 코드 구조 적용 가능성 확보</a:t>
-            </a:r>
-            <a:endParaRPr lang="ko-KR" altLang="en-US" sz="1600" dirty="0"/>
-          </a:p>
-          <a:p>
-            <a:endParaRPr lang="en-US" altLang="ko-KR" sz="1600" dirty="0"/>
-          </a:p>
-          <a:p>
-            <a:r>
-              <a:rPr lang="en-US" altLang="ko-KR" sz="1600" b="1" dirty="0"/>
-              <a:t>3.3 Shared Memory(SHM) </a:t>
-            </a:r>
-            <a:r>
-              <a:rPr lang="ko-KR" altLang="en-US" sz="1600" b="1" dirty="0"/>
-              <a:t>기반 고속 통신 구조 설계</a:t>
-            </a:r>
-          </a:p>
-          <a:p>
-            <a:r>
-              <a:rPr lang="en-US" altLang="ko-KR" sz="1600" dirty="0"/>
-              <a:t> - </a:t>
-            </a:r>
-            <a:r>
-              <a:rPr lang="ko-KR" altLang="en-US" sz="1600" dirty="0"/>
-              <a:t>네트워크</a:t>
-            </a:r>
-            <a:r>
-              <a:rPr lang="en-US" altLang="ko-KR" sz="1600" dirty="0"/>
-              <a:t>/RPC</a:t>
-            </a:r>
-            <a:r>
-              <a:rPr lang="ko-KR" altLang="en-US" sz="1600" dirty="0"/>
-              <a:t>를 사용하지 않는 </a:t>
-            </a:r>
-            <a:r>
-              <a:rPr lang="en-US" altLang="ko-KR" sz="1600" b="1" dirty="0"/>
-              <a:t>SHM </a:t>
-            </a:r>
-            <a:r>
-              <a:rPr lang="ko-KR" altLang="en-US" sz="1600" b="1" dirty="0"/>
-              <a:t>기반 센서</a:t>
-            </a:r>
-            <a:r>
-              <a:rPr lang="en-US" altLang="ko-KR" sz="1600" b="1" dirty="0"/>
-              <a:t>·</a:t>
-            </a:r>
-            <a:r>
-              <a:rPr lang="ko-KR" altLang="en-US" sz="1600" b="1" dirty="0"/>
-              <a:t>제어 데이터 교환 라이브러리 구현</a:t>
-            </a:r>
-            <a:endParaRPr lang="ko-KR" altLang="en-US" sz="1600" dirty="0"/>
-          </a:p>
-          <a:p>
-            <a:r>
-              <a:rPr lang="en-US" altLang="ko-KR" sz="1600" dirty="0"/>
-              <a:t> - </a:t>
-            </a:r>
-            <a:r>
-              <a:rPr lang="ko-KR" altLang="en-US" sz="1600" dirty="0"/>
-              <a:t>별도 프로세스에서 동작 가능한 </a:t>
-            </a:r>
-            <a:r>
-              <a:rPr lang="ko-KR" altLang="en-US" sz="1600" b="1" dirty="0"/>
-              <a:t>고정 주기</a:t>
-            </a:r>
-            <a:r>
-              <a:rPr lang="en-US" altLang="ko-KR" sz="1600" b="1" dirty="0"/>
-              <a:t>(real-time) </a:t>
-            </a:r>
-            <a:r>
-              <a:rPr lang="ko-KR" altLang="en-US" sz="1600" b="1" dirty="0"/>
-              <a:t>실행 구조 설계</a:t>
-            </a:r>
-            <a:endParaRPr lang="ko-KR" altLang="en-US" sz="1600" dirty="0"/>
-          </a:p>
-          <a:p>
-            <a:endParaRPr lang="en-US" altLang="ko-KR" sz="1600" dirty="0"/>
-          </a:p>
-          <a:p>
-            <a:r>
-              <a:rPr lang="en-US" altLang="ko-KR" sz="1600" b="1" dirty="0"/>
-              <a:t>3.4 </a:t>
-            </a:r>
-            <a:r>
-              <a:rPr lang="ko-KR" altLang="en-US" sz="1600" b="1" dirty="0"/>
-              <a:t>비행 제어 성능 비교 실험</a:t>
-            </a:r>
-            <a:endParaRPr lang="en-US" altLang="ko-KR" sz="1600" b="1" dirty="0"/>
-          </a:p>
-          <a:p>
-            <a:r>
-              <a:rPr lang="en-US" altLang="ko-KR" sz="1600" dirty="0"/>
-              <a:t> - </a:t>
-            </a:r>
-            <a:r>
-              <a:rPr lang="ko-KR" altLang="en-US" sz="1600" dirty="0"/>
-              <a:t>단순 </a:t>
-            </a:r>
-            <a:r>
-              <a:rPr lang="ko-KR" altLang="en-US" sz="1600" dirty="0" err="1"/>
-              <a:t>호버링</a:t>
-            </a:r>
-            <a:r>
-              <a:rPr lang="ko-KR" altLang="en-US" sz="1600" dirty="0"/>
-              <a:t> 조건에서</a:t>
-            </a:r>
-            <a:endParaRPr lang="en-US" altLang="ko-KR" sz="1600" dirty="0"/>
-          </a:p>
-          <a:p>
-            <a:r>
-              <a:rPr lang="en-US" altLang="ko-KR" sz="1600" dirty="0"/>
-              <a:t> - RPC </a:t>
-            </a:r>
-            <a:r>
-              <a:rPr lang="ko-KR" altLang="en-US" sz="1600" dirty="0"/>
-              <a:t>기반 제어</a:t>
-            </a:r>
-            <a:endParaRPr lang="en-US" altLang="ko-KR" sz="1600" dirty="0"/>
-          </a:p>
-          <a:p>
-            <a:r>
-              <a:rPr lang="en-US" altLang="ko-KR" sz="1600" dirty="0"/>
-              <a:t> - SHM </a:t>
-            </a:r>
-            <a:r>
-              <a:rPr lang="ko-KR" altLang="en-US" sz="1600" dirty="0"/>
-              <a:t>기반 제어</a:t>
-            </a:r>
-            <a:endParaRPr lang="en-US" altLang="ko-KR" sz="1600" dirty="0"/>
-          </a:p>
-          <a:p>
-            <a:br>
-              <a:rPr lang="ko-KR" altLang="en-US" sz="1600" b="1" dirty="0"/>
-            </a:br>
-            <a:r>
-              <a:rPr lang="en-US" altLang="ko-KR" sz="1600" b="1" dirty="0"/>
-              <a:t>3.5 </a:t>
-            </a:r>
-            <a:r>
-              <a:rPr lang="ko-KR" altLang="en-US" sz="1600" b="1" dirty="0"/>
-              <a:t>비행 안정성 및 응답 특성 비교</a:t>
-            </a:r>
-          </a:p>
-          <a:p>
-            <a:r>
-              <a:rPr lang="en-US" altLang="ko-KR" sz="1600" dirty="0"/>
-              <a:t> - IMU </a:t>
-            </a:r>
-            <a:r>
-              <a:rPr lang="ko-KR" altLang="en-US" sz="1600" dirty="0"/>
-              <a:t>바이어스 등 </a:t>
+              <a:t>  (</a:t>
             </a:r>
             <a:r>
               <a:rPr lang="ko-KR" altLang="en-US" sz="1600" dirty="0" err="1"/>
@@ -12126,13 +12877,23 @@
             </a:r>
             <a:r>
               <a:rPr lang="ko-KR" altLang="en-US" sz="1600" dirty="0"/>
-              <a:t> 주입 시 </a:t>
-            </a:r>
-            <a:r>
-              <a:rPr lang="ko-KR" altLang="en-US" sz="1600" b="1" dirty="0"/>
-              <a:t>제어 성능 변화 비교</a:t>
-            </a:r>
-            <a:endParaRPr lang="ko-KR" altLang="en-US" sz="1600" dirty="0"/>
+              <a:t> 주입 시</a:t>
+            </a:r>
+            <a:r>
+              <a:rPr lang="en-US" altLang="ko-KR" sz="1600" dirty="0"/>
+              <a:t>)</a:t>
+            </a:r>
+          </a:p>
+          <a:p>
+            <a:r>
+              <a:rPr lang="en-US" altLang="ko-KR" sz="1600" dirty="0"/>
+              <a:t> - RPC vs SHM </a:t>
+            </a:r>
+            <a:r>
+              <a:rPr lang="ko-KR" altLang="en-US" sz="1600" dirty="0"/>
+              <a:t>비행 제어 성능 비교</a:t>
+            </a:r>
+            <a:endParaRPr lang="en-US" altLang="ko-KR" sz="1600" dirty="0"/>
           </a:p>
         </p:txBody>
       </p:sp>
@@ -12392,7 +13153,7 @@
           <a:p>
             <a:pPr algn="ctr"/>
             <a:r>
-              <a:rPr lang="en-US" altLang="ko-KR" b="1" dirty="0"/>
+              <a:rPr lang="en-US" altLang="ko-KR" sz="2000" b="1" dirty="0"/>
               <a:t>SIL Application</a:t>
             </a:r>
           </a:p>
